--- a/Rover_Presentation.pptx
+++ b/Rover_Presentation.pptx
@@ -4,6 +4,9 @@
   <p:sldMasterIdLst>
     <p:sldMasterId id="2147483648" r:id="rId1"/>
   </p:sldMasterIdLst>
+  <p:notesMasterIdLst>
+    <p:notesMasterId r:id="rId16"/>
+  </p:notesMasterIdLst>
   <p:sldIdLst>
     <p:sldId id="256" r:id="rId2"/>
     <p:sldId id="257" r:id="rId3"/>
@@ -18,10 +21,8 @@
     <p:sldId id="266" r:id="rId12"/>
     <p:sldId id="267" r:id="rId13"/>
     <p:sldId id="268" r:id="rId14"/>
+    <p:sldId id="269" r:id="rId15"/>
   </p:sldIdLst>
-  <p:notesMasterIdLst>
-    <p:notesMasterId r:id="rId15"/>
-  </p:notesMasterIdLst>
   <p:sldSz cx="12192000" cy="6858000"/>
   <p:notesSz cx="6858000" cy="12192000"/>
   <p:defaultTextStyle>
@@ -116,6 +117,11 @@
       </a:defRPr>
     </a:lvl9pPr>
   </p:defaultTextStyle>
+  <p:extLst>
+    <p:ext uri="{EFAFB233-063F-42B5-8137-9DF3F51BA10A}">
+      <p15:sldGuideLst xmlns:p15="http://schemas.microsoft.com/office/powerpoint/2012/main"/>
+    </p:ext>
+  </p:extLst>
 </p:presentation>
 </file>
 
@@ -141,234 +147,10 @@
           <a:chExt cx="0" cy="0"/>
         </a:xfrm>
       </p:grpSpPr>
-      <p:sp>
-        <p:nvSpPr>
-          <p:cNvPr id="2" name="Header Placeholder 1"/>
-          <p:cNvSpPr>
-            <a:spLocks noGrp="1"/>
-          </p:cNvSpPr>
-          <p:nvPr>
-            <p:ph type="hdr" sz="quarter"/>
-          </p:nvPr>
-        </p:nvSpPr>
-        <p:spPr>
-          <a:xfrm>
-            <a:off x="0" y="0"/>
-            <a:ext cx="2971800" cy="458788"/>
-          </a:xfrm>
-          <a:prstGeom prst="rect">
-            <a:avLst/>
-          </a:prstGeom>
-        </p:spPr>
-        <p:txBody>
-          <a:bodyPr vert="horz" lIns="91440" tIns="45720" rIns="91440" bIns="45720" rtlCol="0"/>
-          <a:lstStyle>
-            <a:lvl1pPr algn="l">
-              <a:defRPr sz="1200"/>
-            </a:lvl1pPr>
-          </a:lstStyle>
-          <a:p>
-            <a:endParaRPr lang="en-US"/>
-          </a:p>
-        </p:txBody>
-      </p:sp>
-      <p:sp>
-        <p:nvSpPr>
-          <p:cNvPr id="3" name="Date Placeholder 2"/>
-          <p:cNvSpPr>
-            <a:spLocks noGrp="1"/>
-          </p:cNvSpPr>
-          <p:nvPr>
-            <p:ph type="dt" idx="1"/>
-          </p:nvPr>
-        </p:nvSpPr>
-        <p:spPr>
-          <a:xfrm>
-            <a:off x="3884613" y="0"/>
-            <a:ext cx="2971800" cy="458788"/>
-          </a:xfrm>
-          <a:prstGeom prst="rect">
-            <a:avLst/>
-          </a:prstGeom>
-        </p:spPr>
-        <p:txBody>
-          <a:bodyPr vert="horz" lIns="91440" tIns="45720" rIns="91440" bIns="45720" rtlCol="0"/>
-          <a:lstStyle>
-            <a:lvl1pPr algn="r">
-              <a:defRPr sz="1200"/>
-            </a:lvl1pPr>
-          </a:lstStyle>
-          <a:p>
-            <a:fld id="{5282F153-3F37-0F45-9E97-73ACFA13230C}" type="datetimeFigureOut">
-              <a:rPr lang="en-US"/>
-              <a:t>7/23/19</a:t>
-            </a:fld>
-            <a:endParaRPr lang="en-US"/>
-          </a:p>
-        </p:txBody>
-      </p:sp>
-      <p:sp>
-        <p:nvSpPr>
-          <p:cNvPr id="4" name="Slide Image Placeholder 3"/>
-          <p:cNvSpPr>
-            <a:spLocks noGrp="1" noRot="1" noChangeAspect="1"/>
-          </p:cNvSpPr>
-          <p:nvPr>
-            <p:ph type="sldImg" idx="2"/>
-          </p:nvPr>
-        </p:nvSpPr>
-        <p:spPr>
-          <a:xfrm>
-            <a:off x="685800" y="1143000"/>
-            <a:ext cx="5486400" cy="3086100"/>
-          </a:xfrm>
-          <a:prstGeom prst="rect">
-            <a:avLst/>
-          </a:prstGeom>
-          <a:noFill/>
-          <a:ln w="12700">
-            <a:solidFill>
-              <a:prstClr val="black"/>
-            </a:solidFill>
-          </a:ln>
-        </p:spPr>
-        <p:txBody>
-          <a:bodyPr vert="horz" lIns="91440" tIns="45720" rIns="91440" bIns="45720" rtlCol="0" anchor="ctr"/>
-          <a:lstStyle/>
-          <a:p>
-            <a:endParaRPr lang="en-US"/>
-          </a:p>
-        </p:txBody>
-      </p:sp>
-      <p:sp>
-        <p:nvSpPr>
-          <p:cNvPr id="5" name="Notes Placeholder 4"/>
-          <p:cNvSpPr>
-            <a:spLocks noGrp="1"/>
-          </p:cNvSpPr>
-          <p:nvPr>
-            <p:ph type="body" sz="quarter" idx="3"/>
-          </p:nvPr>
-        </p:nvSpPr>
-        <p:spPr>
-          <a:xfrm>
-            <a:off x="685800" y="4400550"/>
-            <a:ext cx="5486400" cy="3600450"/>
-          </a:xfrm>
-          <a:prstGeom prst="rect">
-            <a:avLst/>
-          </a:prstGeom>
-        </p:spPr>
-        <p:txBody>
-          <a:bodyPr vert="horz" lIns="91440" tIns="45720" rIns="91440" bIns="45720" rtlCol="0"/>
-          <a:lstStyle/>
-          <a:p>
-            <a:pPr lvl="0"/>
-            <a:r>
-              <a:rPr lang="en-US"/>
-              <a:t>Click to edit Master text styles</a:t>
-            </a:r>
-          </a:p>
-          <a:p>
-            <a:pPr lvl="1"/>
-            <a:r>
-              <a:rPr lang="en-US"/>
-              <a:t>Second level</a:t>
-            </a:r>
-          </a:p>
-          <a:p>
-            <a:pPr lvl="2"/>
-            <a:r>
-              <a:rPr lang="en-US"/>
-              <a:t>Third level</a:t>
-            </a:r>
-          </a:p>
-          <a:p>
-            <a:pPr lvl="3"/>
-            <a:r>
-              <a:rPr lang="en-US"/>
-              <a:t>Fourth level</a:t>
-            </a:r>
-          </a:p>
-          <a:p>
-            <a:pPr lvl="4"/>
-            <a:r>
-              <a:rPr lang="en-US"/>
-              <a:t>Fifth level</a:t>
-            </a:r>
-          </a:p>
-        </p:txBody>
-      </p:sp>
-      <p:sp>
-        <p:nvSpPr>
-          <p:cNvPr id="6" name="Footer Placeholder 5"/>
-          <p:cNvSpPr>
-            <a:spLocks noGrp="1"/>
-          </p:cNvSpPr>
-          <p:nvPr>
-            <p:ph type="ftr" sz="quarter" idx="4"/>
-          </p:nvPr>
-        </p:nvSpPr>
-        <p:spPr>
-          <a:xfrm>
-            <a:off x="0" y="8685213"/>
-            <a:ext cx="2971800" cy="458787"/>
-          </a:xfrm>
-          <a:prstGeom prst="rect">
-            <a:avLst/>
-          </a:prstGeom>
-        </p:spPr>
-        <p:txBody>
-          <a:bodyPr vert="horz" lIns="91440" tIns="45720" rIns="91440" bIns="45720" rtlCol="0" anchor="b"/>
-          <a:lstStyle>
-            <a:lvl1pPr algn="l">
-              <a:defRPr sz="1200"/>
-            </a:lvl1pPr>
-          </a:lstStyle>
-          <a:p>
-            <a:endParaRPr lang="en-US"/>
-          </a:p>
-        </p:txBody>
-      </p:sp>
-      <p:sp>
-        <p:nvSpPr>
-          <p:cNvPr id="7" name="Slide Number Placeholder 6"/>
-          <p:cNvSpPr>
-            <a:spLocks noGrp="1"/>
-          </p:cNvSpPr>
-          <p:nvPr>
-            <p:ph type="sldNum" sz="quarter" idx="5"/>
-          </p:nvPr>
-        </p:nvSpPr>
-        <p:spPr>
-          <a:xfrm>
-            <a:off x="3884613" y="8685213"/>
-            <a:ext cx="2971800" cy="458787"/>
-          </a:xfrm>
-          <a:prstGeom prst="rect">
-            <a:avLst/>
-          </a:prstGeom>
-        </p:spPr>
-        <p:txBody>
-          <a:bodyPr vert="horz" lIns="91440" tIns="45720" rIns="91440" bIns="45720" rtlCol="0" anchor="b"/>
-          <a:lstStyle>
-            <a:lvl1pPr algn="r">
-              <a:defRPr sz="1200"/>
-            </a:lvl1pPr>
-          </a:lstStyle>
-          <a:p>
-            <a:fld id="{CE5E9CC1-C706-0F49-92D6-E571CC5EEA8F}" type="slidenum">
-              <a:rPr lang="en-US"/>
-              <a:t>‹#›</a:t>
-            </a:fld>
-            <a:endParaRPr lang="en-US"/>
-          </a:p>
-        </p:txBody>
-      </p:sp>
     </p:spTree>
     <p:extLst>
       <p:ext uri="{BB962C8B-B14F-4D97-AF65-F5344CB8AC3E}">
-        <p14:creationId xmlns:p14="http://schemas.microsoft.com/office/powerpoint/2010/main" val="1024086991"/>
+        <p14:creationId xmlns:p14="http://schemas.microsoft.com/office/powerpoint/2010/main" val="1053789340"/>
       </p:ext>
     </p:extLst>
   </p:cSld>
@@ -512,10 +294,6 @@
           <a:bodyPr/>
           <a:lstStyle/>
           <a:p>
-            <a:r>
-              <a:rPr lang="en-US" dirty="0"/>
-              <a:t/>
-            </a:r>
             <a:endParaRPr lang="en-US" dirty="0"/>
           </a:p>
         </p:txBody>
@@ -600,10 +378,6 @@
           <a:bodyPr/>
           <a:lstStyle/>
           <a:p>
-            <a:r>
-              <a:rPr lang="en-US" dirty="0"/>
-              <a:t/>
-            </a:r>
             <a:endParaRPr lang="en-US" dirty="0"/>
           </a:p>
         </p:txBody>
@@ -688,10 +462,6 @@
           <a:bodyPr/>
           <a:lstStyle/>
           <a:p>
-            <a:r>
-              <a:rPr lang="en-US" dirty="0"/>
-              <a:t/>
-            </a:r>
             <a:endParaRPr lang="en-US" dirty="0"/>
           </a:p>
         </p:txBody>
@@ -776,10 +546,6 @@
           <a:bodyPr/>
           <a:lstStyle/>
           <a:p>
-            <a:r>
-              <a:rPr lang="en-US" dirty="0"/>
-              <a:t/>
-            </a:r>
             <a:endParaRPr lang="en-US" dirty="0"/>
           </a:p>
         </p:txBody>
@@ -864,10 +630,6 @@
           <a:bodyPr/>
           <a:lstStyle/>
           <a:p>
-            <a:r>
-              <a:rPr lang="en-US" dirty="0"/>
-              <a:t/>
-            </a:r>
             <a:endParaRPr lang="en-US" dirty="0"/>
           </a:p>
         </p:txBody>
@@ -890,6 +652,90 @@
             <a:fld id="{F7021451-1387-4CA6-816F-3879F97B5CBC}" type="slidenum">
               <a:rPr lang="en-US"/>
               <a:t>13</a:t>
+            </a:fld>
+            <a:endParaRPr lang="en-US"/>
+          </a:p>
+        </p:txBody>
+      </p:sp>
+    </p:spTree>
+    <p:extLst>
+      <p:ext uri="{BB962C8B-B14F-4D97-AF65-F5344CB8AC3E}">
+        <p14:creationId xmlns:p14="http://schemas.microsoft.com/office/powerpoint/2010/main" val="1024086991"/>
+      </p:ext>
+    </p:extLst>
+  </p:cSld>
+  <p:clrMapOvr>
+    <a:masterClrMapping/>
+  </p:clrMapOvr>
+</p:notes>
+</file>
+
+<file path=ppt/notesSlides/notesSlide14.xml><?xml version="1.0" encoding="utf-8"?>
+<p:notes xmlns:a="http://schemas.openxmlformats.org/drawingml/2006/main" xmlns:r="http://schemas.openxmlformats.org/officeDocument/2006/relationships" xmlns:p="http://schemas.openxmlformats.org/presentationml/2006/main">
+  <p:cSld>
+    <p:spTree>
+      <p:nvGrpSpPr>
+        <p:cNvPr id="1" name=""/>
+        <p:cNvGrpSpPr/>
+        <p:nvPr/>
+      </p:nvGrpSpPr>
+      <p:grpSpPr>
+        <a:xfrm>
+          <a:off x="0" y="0"/>
+          <a:ext cx="0" cy="0"/>
+          <a:chOff x="0" y="0"/>
+          <a:chExt cx="0" cy="0"/>
+        </a:xfrm>
+      </p:grpSpPr>
+      <p:sp>
+        <p:nvSpPr>
+          <p:cNvPr id="2" name="Slide Image Placeholder 1"/>
+          <p:cNvSpPr>
+            <a:spLocks noGrp="1" noRot="1" noChangeAspect="1"/>
+          </p:cNvSpPr>
+          <p:nvPr>
+            <p:ph type="sldImg"/>
+          </p:nvPr>
+        </p:nvSpPr>
+        <p:spPr/>
+      </p:sp>
+      <p:sp>
+        <p:nvSpPr>
+          <p:cNvPr id="3" name="Notes Placeholder 2"/>
+          <p:cNvSpPr>
+            <a:spLocks noGrp="1"/>
+          </p:cNvSpPr>
+          <p:nvPr>
+            <p:ph type="body" idx="1"/>
+          </p:nvPr>
+        </p:nvSpPr>
+        <p:spPr/>
+        <p:txBody>
+          <a:bodyPr/>
+          <a:lstStyle/>
+          <a:p>
+            <a:endParaRPr lang="en-US" dirty="0"/>
+          </a:p>
+        </p:txBody>
+      </p:sp>
+      <p:sp>
+        <p:nvSpPr>
+          <p:cNvPr id="4" name="Slide Number Placeholder 3"/>
+          <p:cNvSpPr>
+            <a:spLocks noGrp="1"/>
+          </p:cNvSpPr>
+          <p:nvPr>
+            <p:ph type="sldNum" sz="quarter" idx="10"/>
+          </p:nvPr>
+        </p:nvSpPr>
+        <p:spPr/>
+        <p:txBody>
+          <a:bodyPr/>
+          <a:lstStyle/>
+          <a:p>
+            <a:fld id="{F7021451-1387-4CA6-816F-3879F97B5CBC}" type="slidenum">
+              <a:rPr lang="en-US"/>
+              <a:t>14</a:t>
             </a:fld>
             <a:endParaRPr lang="en-US"/>
           </a:p>
@@ -952,10 +798,6 @@
           <a:bodyPr/>
           <a:lstStyle/>
           <a:p>
-            <a:r>
-              <a:rPr lang="en-US" dirty="0"/>
-              <a:t/>
-            </a:r>
             <a:endParaRPr lang="en-US" dirty="0"/>
           </a:p>
         </p:txBody>
@@ -1040,10 +882,6 @@
           <a:bodyPr/>
           <a:lstStyle/>
           <a:p>
-            <a:r>
-              <a:rPr lang="en-US" dirty="0"/>
-              <a:t/>
-            </a:r>
             <a:endParaRPr lang="en-US" dirty="0"/>
           </a:p>
         </p:txBody>
@@ -1128,10 +966,6 @@
           <a:bodyPr/>
           <a:lstStyle/>
           <a:p>
-            <a:r>
-              <a:rPr lang="en-US" dirty="0"/>
-              <a:t/>
-            </a:r>
             <a:endParaRPr lang="en-US" dirty="0"/>
           </a:p>
         </p:txBody>
@@ -1216,10 +1050,6 @@
           <a:bodyPr/>
           <a:lstStyle/>
           <a:p>
-            <a:r>
-              <a:rPr lang="en-US" dirty="0"/>
-              <a:t/>
-            </a:r>
             <a:endParaRPr lang="en-US" dirty="0"/>
           </a:p>
         </p:txBody>
@@ -1304,10 +1134,6 @@
           <a:bodyPr/>
           <a:lstStyle/>
           <a:p>
-            <a:r>
-              <a:rPr lang="en-US" dirty="0"/>
-              <a:t/>
-            </a:r>
             <a:endParaRPr lang="en-US" dirty="0"/>
           </a:p>
         </p:txBody>
@@ -1392,10 +1218,6 @@
           <a:bodyPr/>
           <a:lstStyle/>
           <a:p>
-            <a:r>
-              <a:rPr lang="en-US" dirty="0"/>
-              <a:t/>
-            </a:r>
             <a:endParaRPr lang="en-US" dirty="0"/>
           </a:p>
         </p:txBody>
@@ -1480,10 +1302,6 @@
           <a:bodyPr/>
           <a:lstStyle/>
           <a:p>
-            <a:r>
-              <a:rPr lang="en-US" dirty="0"/>
-              <a:t/>
-            </a:r>
             <a:endParaRPr lang="en-US" dirty="0"/>
           </a:p>
         </p:txBody>
@@ -1568,10 +1386,6 @@
           <a:bodyPr/>
           <a:lstStyle/>
           <a:p>
-            <a:r>
-              <a:rPr lang="en-US" dirty="0"/>
-              <a:t/>
-            </a:r>
             <a:endParaRPr lang="en-US" dirty="0"/>
           </a:p>
         </p:txBody>
@@ -1645,6 +1459,11 @@
 <file path=ppt/slideMasters/slideMaster1.xml><?xml version="1.0" encoding="utf-8"?>
 <p:sldMaster xmlns:a="http://schemas.openxmlformats.org/drawingml/2006/main" xmlns:r="http://schemas.openxmlformats.org/officeDocument/2006/relationships" xmlns:p="http://schemas.openxmlformats.org/presentationml/2006/main">
   <p:cSld>
+    <p:bg>
+      <p:bgRef idx="1001">
+        <a:schemeClr val="bg1"/>
+      </p:bgRef>
+    </p:bg>
     <p:spTree>
       <p:nvGrpSpPr>
         <p:cNvPr id="1" name=""/>
@@ -1927,6 +1746,7 @@
         <a:solidFill>
           <a:srgbClr val="21295C"/>
         </a:solidFill>
+        <a:effectLst/>
       </p:bgPr>
     </p:bg>
     <p:spTree>
@@ -2015,11 +1835,11 @@
           <a:bodyPr wrap="square" lIns="0" tIns="0" rIns="0" bIns="0" rtlCol="0" anchor="ctr"/>
           <a:lstStyle/>
           <a:p>
-            <a:pPr indent="0" marL="0">
-              <a:buNone/>
-            </a:pPr>
-            <a:r>
-              <a:rPr lang="en-US" sz="1500" b="1" spc="400" kern="0" dirty="0">
+            <a:pPr marL="0" indent="0">
+              <a:buNone/>
+            </a:pPr>
+            <a:r>
+              <a:rPr lang="en-US" sz="1500" b="1" kern="0" spc="400" dirty="0">
                 <a:solidFill>
                   <a:srgbClr val="1C7293"/>
                 </a:solidFill>
@@ -2054,7 +1874,7 @@
           <a:bodyPr wrap="square" lIns="0" tIns="0" rIns="0" bIns="0" rtlCol="0" anchor="ctr"/>
           <a:lstStyle/>
           <a:p>
-            <a:pPr indent="0" marL="0">
+            <a:pPr marL="0" indent="0">
               <a:buNone/>
             </a:pPr>
             <a:r>
@@ -2093,7 +1913,7 @@
           <a:bodyPr wrap="square" lIns="0" tIns="0" rIns="0" bIns="0" rtlCol="0" anchor="ctr"/>
           <a:lstStyle/>
           <a:p>
-            <a:pPr indent="0" marL="0">
+            <a:pPr marL="0" indent="0">
               <a:buNone/>
             </a:pPr>
             <a:r>
@@ -2132,7 +1952,7 @@
           <a:bodyPr wrap="square" lIns="0" tIns="0" rIns="0" bIns="0" rtlCol="0" anchor="ctr"/>
           <a:lstStyle/>
           <a:p>
-            <a:pPr indent="0" marL="0">
+            <a:pPr marL="0" indent="0">
               <a:buNone/>
             </a:pPr>
             <a:r>
@@ -2171,7 +1991,7 @@
           <a:bodyPr wrap="square" lIns="0" tIns="0" rIns="0" bIns="0" rtlCol="0" anchor="ctr"/>
           <a:lstStyle/>
           <a:p>
-            <a:pPr indent="0" marL="0">
+            <a:pPr marL="0" indent="0">
               <a:buNone/>
             </a:pPr>
             <a:r>
@@ -2188,7 +2008,7 @@
             <a:endParaRPr lang="en-US" sz="1500" dirty="0"/>
           </a:p>
           <a:p>
-            <a:pPr indent="0" marL="0">
+            <a:pPr marL="0" indent="0">
               <a:buNone/>
             </a:pPr>
             <a:r>
@@ -2205,7 +2025,7 @@
             <a:endParaRPr lang="en-US" sz="1500" dirty="0"/>
           </a:p>
           <a:p>
-            <a:pPr indent="0" marL="0">
+            <a:pPr marL="0" indent="0">
               <a:buNone/>
             </a:pPr>
             <a:r>
@@ -2239,6 +2059,7 @@
         <a:solidFill>
           <a:srgbClr val="F4F7FA"/>
         </a:solidFill>
+        <a:effectLst/>
       </p:bgPr>
     </p:bg>
     <p:spTree>
@@ -2276,11 +2097,11 @@
           <a:bodyPr wrap="square" lIns="0" tIns="0" rIns="0" bIns="0" rtlCol="0" anchor="ctr"/>
           <a:lstStyle/>
           <a:p>
-            <a:pPr indent="0" marL="0">
-              <a:buNone/>
-            </a:pPr>
-            <a:r>
-              <a:rPr lang="en-US" sz="1200" b="1" spc="300" kern="0" dirty="0">
+            <a:pPr marL="0" indent="0">
+              <a:buNone/>
+            </a:pPr>
+            <a:r>
+              <a:rPr lang="en-US" sz="1200" b="1" kern="0" spc="300" dirty="0">
                 <a:solidFill>
                   <a:srgbClr val="1C7293"/>
                 </a:solidFill>
@@ -2315,7 +2136,7 @@
           <a:bodyPr wrap="square" lIns="0" tIns="0" rIns="0" bIns="0" rtlCol="0" anchor="ctr"/>
           <a:lstStyle/>
           <a:p>
-            <a:pPr indent="0" marL="0">
+            <a:pPr marL="0" indent="0">
               <a:buNone/>
             </a:pPr>
             <a:r>
@@ -2374,7 +2195,7 @@
           <a:bodyPr wrap="square" lIns="0" tIns="0" rIns="0" bIns="0" rtlCol="0" anchor="ctr"/>
           <a:lstStyle/>
           <a:p>
-            <a:pPr indent="0" marL="0">
+            <a:pPr marL="0" indent="0">
               <a:buNone/>
             </a:pPr>
             <a:r>
@@ -2388,9 +2209,6 @@
               </a:rPr>
               <a:t>easy</a:t>
             </a:r>
-            <a:pPr indent="0" marL="0">
-              <a:buNone/>
-            </a:pPr>
             <a:r>
               <a:rPr lang="en-US" sz="1100" i="1" dirty="0">
                 <a:solidFill>
@@ -2452,7 +2270,7 @@
           <a:bodyPr wrap="square" lIns="0" tIns="0" rIns="0" bIns="0" rtlCol="0" anchor="t"/>
           <a:lstStyle/>
           <a:p>
-            <a:pPr indent="0" marL="0">
+            <a:pPr marL="0" indent="0">
               <a:lnSpc>
                 <a:spcPct val="100000"/>
               </a:lnSpc>
@@ -2472,7 +2290,7 @@
             <a:endParaRPr lang="en-US" sz="1100" dirty="0"/>
           </a:p>
           <a:p>
-            <a:pPr indent="0" marL="0">
+            <a:pPr marL="0" indent="0">
               <a:lnSpc>
                 <a:spcPct val="100000"/>
               </a:lnSpc>
@@ -2492,7 +2310,7 @@
             <a:endParaRPr lang="en-US" sz="1100" dirty="0"/>
           </a:p>
           <a:p>
-            <a:pPr indent="0" marL="0">
+            <a:pPr marL="0" indent="0">
               <a:lnSpc>
                 <a:spcPct val="100000"/>
               </a:lnSpc>
@@ -2512,7 +2330,7 @@
             <a:endParaRPr lang="en-US" sz="1100" dirty="0"/>
           </a:p>
           <a:p>
-            <a:pPr indent="0" marL="0">
+            <a:pPr marL="0" indent="0">
               <a:lnSpc>
                 <a:spcPct val="100000"/>
               </a:lnSpc>
@@ -2554,7 +2372,7 @@
           <a:bodyPr wrap="square" lIns="0" tIns="0" rIns="0" bIns="0" rtlCol="0" anchor="ctr"/>
           <a:lstStyle/>
           <a:p>
-            <a:pPr indent="0" marL="0">
+            <a:pPr marL="0" indent="0">
               <a:buNone/>
             </a:pPr>
             <a:r>
@@ -2613,7 +2431,7 @@
           <a:bodyPr wrap="square" lIns="0" tIns="0" rIns="0" bIns="0" rtlCol="0" anchor="ctr"/>
           <a:lstStyle/>
           <a:p>
-            <a:pPr indent="0" marL="0">
+            <a:pPr marL="0" indent="0">
               <a:buNone/>
             </a:pPr>
             <a:r>
@@ -2627,9 +2445,6 @@
               </a:rPr>
               <a:t>tight</a:t>
             </a:r>
-            <a:pPr indent="0" marL="0">
-              <a:buNone/>
-            </a:pPr>
             <a:r>
               <a:rPr lang="en-US" sz="1100" i="1" dirty="0">
                 <a:solidFill>
@@ -2691,7 +2506,7 @@
           <a:bodyPr wrap="square" lIns="0" tIns="0" rIns="0" bIns="0" rtlCol="0" anchor="t"/>
           <a:lstStyle/>
           <a:p>
-            <a:pPr indent="0" marL="0">
+            <a:pPr marL="0" indent="0">
               <a:lnSpc>
                 <a:spcPct val="100000"/>
               </a:lnSpc>
@@ -2711,7 +2526,7 @@
             <a:endParaRPr lang="en-US" sz="1100" dirty="0"/>
           </a:p>
           <a:p>
-            <a:pPr indent="0" marL="0">
+            <a:pPr marL="0" indent="0">
               <a:lnSpc>
                 <a:spcPct val="100000"/>
               </a:lnSpc>
@@ -2731,7 +2546,7 @@
             <a:endParaRPr lang="en-US" sz="1100" dirty="0"/>
           </a:p>
           <a:p>
-            <a:pPr indent="0" marL="0">
+            <a:pPr marL="0" indent="0">
               <a:lnSpc>
                 <a:spcPct val="100000"/>
               </a:lnSpc>
@@ -2751,7 +2566,7 @@
             <a:endParaRPr lang="en-US" sz="1100" dirty="0"/>
           </a:p>
           <a:p>
-            <a:pPr indent="0" marL="0">
+            <a:pPr marL="0" indent="0">
               <a:lnSpc>
                 <a:spcPct val="100000"/>
               </a:lnSpc>
@@ -2771,7 +2586,7 @@
             <a:endParaRPr lang="en-US" sz="1100" dirty="0"/>
           </a:p>
           <a:p>
-            <a:pPr indent="0" marL="0">
+            <a:pPr marL="0" indent="0">
               <a:lnSpc>
                 <a:spcPct val="100000"/>
               </a:lnSpc>
@@ -2791,7 +2606,7 @@
             <a:endParaRPr lang="en-US" sz="1100" dirty="0"/>
           </a:p>
           <a:p>
-            <a:pPr indent="0" marL="0">
+            <a:pPr marL="0" indent="0">
               <a:lnSpc>
                 <a:spcPct val="100000"/>
               </a:lnSpc>
@@ -2833,7 +2648,7 @@
           <a:bodyPr wrap="square" lIns="0" tIns="0" rIns="0" bIns="0" rtlCol="0" anchor="ctr"/>
           <a:lstStyle/>
           <a:p>
-            <a:pPr indent="0" marL="0">
+            <a:pPr marL="0" indent="0">
               <a:buNone/>
             </a:pPr>
             <a:r>
@@ -2892,7 +2707,7 @@
           <a:bodyPr wrap="square" lIns="0" tIns="0" rIns="0" bIns="0" rtlCol="0" anchor="ctr"/>
           <a:lstStyle/>
           <a:p>
-            <a:pPr indent="0" marL="0">
+            <a:pPr marL="0" indent="0">
               <a:buNone/>
             </a:pPr>
             <a:r>
@@ -2906,9 +2721,6 @@
               </a:rPr>
               <a:t>fastzone-only</a:t>
             </a:r>
-            <a:pPr indent="0" marL="0">
-              <a:buNone/>
-            </a:pPr>
             <a:r>
               <a:rPr lang="en-US" sz="1100" i="1" dirty="0">
                 <a:solidFill>
@@ -2970,7 +2782,7 @@
           <a:bodyPr wrap="square" lIns="0" tIns="0" rIns="0" bIns="0" rtlCol="0" anchor="t"/>
           <a:lstStyle/>
           <a:p>
-            <a:pPr indent="0" marL="0">
+            <a:pPr marL="0" indent="0">
               <a:lnSpc>
                 <a:spcPct val="100000"/>
               </a:lnSpc>
@@ -2990,7 +2802,7 @@
             <a:endParaRPr lang="en-US" sz="1100" dirty="0"/>
           </a:p>
           <a:p>
-            <a:pPr indent="0" marL="0">
+            <a:pPr marL="0" indent="0">
               <a:lnSpc>
                 <a:spcPct val="100000"/>
               </a:lnSpc>
@@ -3010,7 +2822,7 @@
             <a:endParaRPr lang="en-US" sz="1100" dirty="0"/>
           </a:p>
           <a:p>
-            <a:pPr indent="0" marL="0">
+            <a:pPr marL="0" indent="0">
               <a:lnSpc>
                 <a:spcPct val="100000"/>
               </a:lnSpc>
@@ -3030,7 +2842,7 @@
             <a:endParaRPr lang="en-US" sz="1100" dirty="0"/>
           </a:p>
           <a:p>
-            <a:pPr indent="0" marL="0">
+            <a:pPr marL="0" indent="0">
               <a:lnSpc>
                 <a:spcPct val="100000"/>
               </a:lnSpc>
@@ -3050,7 +2862,7 @@
             <a:endParaRPr lang="en-US" sz="1100" dirty="0"/>
           </a:p>
           <a:p>
-            <a:pPr indent="0" marL="0">
+            <a:pPr marL="0" indent="0">
               <a:lnSpc>
                 <a:spcPct val="100000"/>
               </a:lnSpc>
@@ -3092,7 +2904,7 @@
           <a:bodyPr wrap="square" lIns="0" tIns="0" rIns="0" bIns="0" rtlCol="0" anchor="ctr"/>
           <a:lstStyle/>
           <a:p>
-            <a:pPr indent="0" marL="0">
+            <a:pPr marL="0" indent="0">
               <a:buNone/>
             </a:pPr>
             <a:r>
@@ -3151,7 +2963,7 @@
           <a:bodyPr wrap="square" lIns="0" tIns="0" rIns="0" bIns="0" rtlCol="0" anchor="ctr"/>
           <a:lstStyle/>
           <a:p>
-            <a:pPr indent="0" marL="0">
+            <a:pPr marL="0" indent="0">
               <a:buNone/>
             </a:pPr>
             <a:r>
@@ -3165,9 +2977,6 @@
               </a:rPr>
               <a:t>infeasible</a:t>
             </a:r>
-            <a:pPr indent="0" marL="0">
-              <a:buNone/>
-            </a:pPr>
             <a:r>
               <a:rPr lang="en-US" sz="1100" i="1" dirty="0">
                 <a:solidFill>
@@ -3229,7 +3038,7 @@
           <a:bodyPr wrap="square" lIns="0" tIns="0" rIns="0" bIns="0" rtlCol="0" anchor="t"/>
           <a:lstStyle/>
           <a:p>
-            <a:pPr indent="0" marL="0">
+            <a:pPr marL="0" indent="0">
               <a:lnSpc>
                 <a:spcPct val="100000"/>
               </a:lnSpc>
@@ -3249,7 +3058,7 @@
             <a:endParaRPr lang="en-US" sz="1100" dirty="0"/>
           </a:p>
           <a:p>
-            <a:pPr indent="0" marL="0">
+            <a:pPr marL="0" indent="0">
               <a:lnSpc>
                 <a:spcPct val="100000"/>
               </a:lnSpc>
@@ -3269,7 +3078,7 @@
             <a:endParaRPr lang="en-US" sz="1100" dirty="0"/>
           </a:p>
           <a:p>
-            <a:pPr indent="0" marL="0">
+            <a:pPr marL="0" indent="0">
               <a:lnSpc>
                 <a:spcPct val="100000"/>
               </a:lnSpc>
@@ -3311,7 +3120,7 @@
           <a:bodyPr wrap="square" lIns="0" tIns="0" rIns="0" bIns="0" rtlCol="0" anchor="ctr"/>
           <a:lstStyle/>
           <a:p>
-            <a:pPr indent="0" marL="0">
+            <a:pPr marL="0" indent="0">
               <a:buNone/>
             </a:pPr>
             <a:r>
@@ -3345,6 +3154,7 @@
         <a:solidFill>
           <a:srgbClr val="F4F7FA"/>
         </a:solidFill>
+        <a:effectLst/>
       </p:bgPr>
     </p:bg>
     <p:spTree>
@@ -3382,11 +3192,11 @@
           <a:bodyPr wrap="square" lIns="0" tIns="0" rIns="0" bIns="0" rtlCol="0" anchor="ctr"/>
           <a:lstStyle/>
           <a:p>
-            <a:pPr indent="0" marL="0">
-              <a:buNone/>
-            </a:pPr>
-            <a:r>
-              <a:rPr lang="en-US" sz="1200" b="1" spc="300" kern="0" dirty="0">
+            <a:pPr marL="0" indent="0">
+              <a:buNone/>
+            </a:pPr>
+            <a:r>
+              <a:rPr lang="en-US" sz="1200" b="1" kern="0" spc="300" dirty="0">
                 <a:solidFill>
                   <a:srgbClr val="1C7293"/>
                 </a:solidFill>
@@ -3421,7 +3231,7 @@
           <a:bodyPr wrap="square" lIns="0" tIns="0" rIns="0" bIns="0" rtlCol="0" anchor="ctr"/>
           <a:lstStyle/>
           <a:p>
-            <a:pPr indent="0" marL="0">
+            <a:pPr marL="0" indent="0">
               <a:buNone/>
             </a:pPr>
             <a:r>
@@ -3463,7 +3273,7 @@
             <a:prstDash val="solid"/>
           </a:ln>
           <a:effectLst>
-            <a:outerShdw sx="100000" sy="100000" kx="0" ky="0" algn="bl" rotWithShape="0" blurRad="63500" dist="25400" dir="8100000">
+            <a:outerShdw blurRad="63500" dist="25400" dir="8100000" algn="bl" rotWithShape="0">
               <a:srgbClr val="000000">
                 <a:alpha val="10000"/>
               </a:srgbClr>
@@ -3512,7 +3322,7 @@
           <a:bodyPr wrap="square" lIns="0" tIns="0" rIns="0" bIns="0" rtlCol="0" anchor="ctr"/>
           <a:lstStyle/>
           <a:p>
-            <a:pPr indent="0" marL="0">
+            <a:pPr marL="0" indent="0">
               <a:buNone/>
             </a:pPr>
             <a:r>
@@ -3681,7 +3491,7 @@
             <a:prstDash val="solid"/>
           </a:ln>
           <a:effectLst>
-            <a:outerShdw sx="100000" sy="100000" kx="0" ky="0" algn="bl" rotWithShape="0" blurRad="63500" dist="25400" dir="8100000">
+            <a:outerShdw blurRad="63500" dist="25400" dir="8100000" algn="bl" rotWithShape="0">
               <a:srgbClr val="000000">
                 <a:alpha val="10000"/>
               </a:srgbClr>
@@ -3730,7 +3540,7 @@
           <a:bodyPr wrap="square" lIns="0" tIns="0" rIns="0" bIns="0" rtlCol="0" anchor="ctr"/>
           <a:lstStyle/>
           <a:p>
-            <a:pPr indent="0" marL="0">
+            <a:pPr marL="0" indent="0">
               <a:buNone/>
             </a:pPr>
             <a:r>
@@ -3891,6 +3701,7 @@
         <a:solidFill>
           <a:srgbClr val="F4F7FA"/>
         </a:solidFill>
+        <a:effectLst/>
       </p:bgPr>
     </p:bg>
     <p:spTree>
@@ -3928,11 +3739,11 @@
           <a:bodyPr wrap="square" lIns="0" tIns="0" rIns="0" bIns="0" rtlCol="0" anchor="ctr"/>
           <a:lstStyle/>
           <a:p>
-            <a:pPr indent="0" marL="0">
-              <a:buNone/>
-            </a:pPr>
-            <a:r>
-              <a:rPr lang="en-US" sz="1200" b="1" spc="300" kern="0" dirty="0">
+            <a:pPr marL="0" indent="0">
+              <a:buNone/>
+            </a:pPr>
+            <a:r>
+              <a:rPr lang="en-US" sz="1200" b="1" kern="0" spc="300" dirty="0">
                 <a:solidFill>
                   <a:srgbClr val="1C7293"/>
                 </a:solidFill>
@@ -3967,7 +3778,7 @@
           <a:bodyPr wrap="square" lIns="0" tIns="0" rIns="0" bIns="0" rtlCol="0" anchor="ctr"/>
           <a:lstStyle/>
           <a:p>
-            <a:pPr indent="0" marL="0">
+            <a:pPr marL="0" indent="0">
               <a:buNone/>
             </a:pPr>
             <a:r>
@@ -4006,7 +3817,7 @@
           <a:bodyPr wrap="square" lIns="0" tIns="0" rIns="0" bIns="0" rtlCol="0" anchor="ctr"/>
           <a:lstStyle/>
           <a:p>
-            <a:pPr indent="0" marL="0">
+            <a:pPr marL="0" indent="0">
               <a:buNone/>
             </a:pPr>
             <a:r>
@@ -4048,7 +3859,7 @@
             <a:prstDash val="solid"/>
           </a:ln>
           <a:effectLst>
-            <a:outerShdw sx="100000" sy="100000" kx="0" ky="0" algn="bl" rotWithShape="0" blurRad="63500" dist="25400" dir="8100000">
+            <a:outerShdw blurRad="63500" dist="25400" dir="8100000" algn="bl" rotWithShape="0">
               <a:srgbClr val="000000">
                 <a:alpha val="10000"/>
               </a:srgbClr>
@@ -4097,7 +3908,7 @@
           <a:bodyPr wrap="square" lIns="0" tIns="0" rIns="0" bIns="0" rtlCol="0" anchor="ctr"/>
           <a:lstStyle/>
           <a:p>
-            <a:pPr indent="0" marL="0">
+            <a:pPr marL="0" indent="0">
               <a:buNone/>
             </a:pPr>
             <a:r>
@@ -4136,7 +3947,7 @@
           <a:bodyPr wrap="square" lIns="0" tIns="0" rIns="0" bIns="0" rtlCol="0" anchor="ctr"/>
           <a:lstStyle/>
           <a:p>
-            <a:pPr indent="0" marL="0">
+            <a:pPr marL="0" indent="0">
               <a:buNone/>
             </a:pPr>
             <a:r>
@@ -4175,7 +3986,7 @@
           <a:bodyPr wrap="square" lIns="0" tIns="0" rIns="0" bIns="0" rtlCol="0" anchor="t"/>
           <a:lstStyle/>
           <a:p>
-            <a:pPr indent="0" marL="0">
+            <a:pPr marL="0" indent="0">
               <a:buNone/>
             </a:pPr>
             <a:r>
@@ -4217,7 +4028,7 @@
             <a:prstDash val="solid"/>
           </a:ln>
           <a:effectLst>
-            <a:outerShdw sx="100000" sy="100000" kx="0" ky="0" algn="bl" rotWithShape="0" blurRad="63500" dist="25400" dir="8100000">
+            <a:outerShdw blurRad="63500" dist="25400" dir="8100000" algn="bl" rotWithShape="0">
               <a:srgbClr val="000000">
                 <a:alpha val="10000"/>
               </a:srgbClr>
@@ -4266,7 +4077,7 @@
           <a:bodyPr wrap="square" lIns="0" tIns="0" rIns="0" bIns="0" rtlCol="0" anchor="ctr"/>
           <a:lstStyle/>
           <a:p>
-            <a:pPr indent="0" marL="0">
+            <a:pPr marL="0" indent="0">
               <a:buNone/>
             </a:pPr>
             <a:r>
@@ -4305,7 +4116,7 @@
           <a:bodyPr wrap="square" lIns="0" tIns="0" rIns="0" bIns="0" rtlCol="0" anchor="ctr"/>
           <a:lstStyle/>
           <a:p>
-            <a:pPr indent="0" marL="0">
+            <a:pPr marL="0" indent="0">
               <a:buNone/>
             </a:pPr>
             <a:r>
@@ -4344,7 +4155,7 @@
           <a:bodyPr wrap="square" lIns="0" tIns="0" rIns="0" bIns="0" rtlCol="0" anchor="t"/>
           <a:lstStyle/>
           <a:p>
-            <a:pPr indent="0" marL="0">
+            <a:pPr marL="0" indent="0">
               <a:buNone/>
             </a:pPr>
             <a:r>
@@ -4386,7 +4197,7 @@
             <a:prstDash val="solid"/>
           </a:ln>
           <a:effectLst>
-            <a:outerShdw sx="100000" sy="100000" kx="0" ky="0" algn="bl" rotWithShape="0" blurRad="63500" dist="25400" dir="8100000">
+            <a:outerShdw blurRad="63500" dist="25400" dir="8100000" algn="bl" rotWithShape="0">
               <a:srgbClr val="000000">
                 <a:alpha val="10000"/>
               </a:srgbClr>
@@ -4435,7 +4246,7 @@
           <a:bodyPr wrap="square" lIns="0" tIns="0" rIns="0" bIns="0" rtlCol="0" anchor="ctr"/>
           <a:lstStyle/>
           <a:p>
-            <a:pPr indent="0" marL="0">
+            <a:pPr marL="0" indent="0">
               <a:buNone/>
             </a:pPr>
             <a:r>
@@ -4474,7 +4285,7 @@
           <a:bodyPr wrap="square" lIns="0" tIns="0" rIns="0" bIns="0" rtlCol="0" anchor="ctr"/>
           <a:lstStyle/>
           <a:p>
-            <a:pPr indent="0" marL="0">
+            <a:pPr marL="0" indent="0">
               <a:buNone/>
             </a:pPr>
             <a:r>
@@ -4513,7 +4324,7 @@
           <a:bodyPr wrap="square" lIns="0" tIns="0" rIns="0" bIns="0" rtlCol="0" anchor="t"/>
           <a:lstStyle/>
           <a:p>
-            <a:pPr indent="0" marL="0">
+            <a:pPr marL="0" indent="0">
               <a:buNone/>
             </a:pPr>
             <a:r>
@@ -4555,7 +4366,7 @@
             <a:prstDash val="solid"/>
           </a:ln>
           <a:effectLst>
-            <a:outerShdw sx="100000" sy="100000" kx="0" ky="0" algn="bl" rotWithShape="0" blurRad="63500" dist="25400" dir="8100000">
+            <a:outerShdw blurRad="63500" dist="25400" dir="8100000" algn="bl" rotWithShape="0">
               <a:srgbClr val="000000">
                 <a:alpha val="10000"/>
               </a:srgbClr>
@@ -4584,7 +4395,7 @@
           <a:bodyPr wrap="square" lIns="0" tIns="0" rIns="0" bIns="0" rtlCol="0" anchor="ctr"/>
           <a:lstStyle/>
           <a:p>
-            <a:pPr indent="0" marL="0">
+            <a:pPr marL="0" indent="0">
               <a:buNone/>
             </a:pPr>
             <a:r>
@@ -4623,7 +4434,7 @@
           <a:bodyPr wrap="square" lIns="0" tIns="0" rIns="0" bIns="0" rtlCol="0" anchor="t"/>
           <a:lstStyle/>
           <a:p>
-            <a:pPr indent="0" marL="0">
+            <a:pPr marL="0" indent="0">
               <a:spcAft>
                 <a:spcPts val="400"/>
               </a:spcAft>
@@ -4643,7 +4454,7 @@
             <a:endParaRPr lang="en-US" sz="1350" dirty="0"/>
           </a:p>
           <a:p>
-            <a:pPr indent="0" marL="0">
+            <a:pPr marL="0" indent="0">
               <a:spcAft>
                 <a:spcPts val="400"/>
               </a:spcAft>
@@ -4663,7 +4474,7 @@
             <a:endParaRPr lang="en-US" sz="1350" dirty="0"/>
           </a:p>
           <a:p>
-            <a:pPr indent="0" marL="0">
+            <a:pPr marL="0" indent="0">
               <a:spcAft>
                 <a:spcPts val="400"/>
               </a:spcAft>
@@ -4698,8 +4509,9 @@
     <p:bg>
       <p:bgPr>
         <a:solidFill>
-          <a:srgbClr val="21295C"/>
+          <a:srgbClr val="F4F7FA"/>
         </a:solidFill>
+        <a:effectLst/>
       </p:bgPr>
     </p:bg>
     <p:spTree>
@@ -4718,6 +4530,2027 @@
       </p:grpSpPr>
       <p:sp>
         <p:nvSpPr>
+          <p:cNvPr id="2" name="Text 0"/>
+          <p:cNvSpPr/>
+          <p:nvPr/>
+        </p:nvSpPr>
+        <p:spPr>
+          <a:xfrm>
+            <a:off x="548640" y="384048"/>
+            <a:ext cx="11064240" cy="274320"/>
+          </a:xfrm>
+          <a:prstGeom prst="rect">
+            <a:avLst/>
+          </a:prstGeom>
+          <a:noFill/>
+          <a:ln/>
+        </p:spPr>
+        <p:txBody>
+          <a:bodyPr wrap="square" lIns="0" tIns="0" rIns="0" bIns="0" rtlCol="0" anchor="ctr"/>
+          <a:lstStyle/>
+          <a:p>
+            <a:pPr marL="0" indent="0">
+              <a:buNone/>
+            </a:pPr>
+            <a:r>
+              <a:rPr lang="en-US" sz="1200" b="1" kern="0" spc="300" dirty="0">
+                <a:solidFill>
+                  <a:srgbClr val="1C7293"/>
+                </a:solidFill>
+                <a:latin typeface="Trebuchet MS" pitchFamily="34" charset="0"/>
+                <a:ea typeface="Trebuchet MS" pitchFamily="34" charset="-122"/>
+                <a:cs typeface="Trebuchet MS" pitchFamily="34" charset="-120"/>
+              </a:rPr>
+              <a:t>OPTIONAL EXTENSION</a:t>
+            </a:r>
+            <a:endParaRPr lang="en-US" sz="1200" dirty="0"/>
+          </a:p>
+        </p:txBody>
+      </p:sp>
+      <p:sp>
+        <p:nvSpPr>
+          <p:cNvPr id="3" name="Text 1"/>
+          <p:cNvSpPr/>
+          <p:nvPr/>
+        </p:nvSpPr>
+        <p:spPr>
+          <a:xfrm>
+            <a:off x="548640" y="658368"/>
+            <a:ext cx="11064240" cy="640080"/>
+          </a:xfrm>
+          <a:prstGeom prst="rect">
+            <a:avLst/>
+          </a:prstGeom>
+          <a:noFill/>
+          <a:ln/>
+        </p:spPr>
+        <p:txBody>
+          <a:bodyPr wrap="square" lIns="0" tIns="0" rIns="0" bIns="0" rtlCol="0" anchor="ctr"/>
+          <a:lstStyle/>
+          <a:p>
+            <a:pPr marL="0" indent="0">
+              <a:buNone/>
+            </a:pPr>
+            <a:r>
+              <a:rPr lang="en-US" sz="2800" b="1" dirty="0">
+                <a:solidFill>
+                  <a:srgbClr val="21295C"/>
+                </a:solidFill>
+                <a:latin typeface="Trebuchet MS" pitchFamily="34" charset="0"/>
+                <a:ea typeface="Trebuchet MS" pitchFamily="34" charset="-122"/>
+                <a:cs typeface="Trebuchet MS" pitchFamily="34" charset="-120"/>
+              </a:rPr>
+              <a:t>Durative movement — travel now takes time</a:t>
+            </a:r>
+            <a:endParaRPr lang="en-US" sz="2800" dirty="0"/>
+          </a:p>
+        </p:txBody>
+      </p:sp>
+      <p:sp>
+        <p:nvSpPr>
+          <p:cNvPr id="4" name="Text 2"/>
+          <p:cNvSpPr/>
+          <p:nvPr/>
+        </p:nvSpPr>
+        <p:spPr>
+          <a:xfrm>
+            <a:off x="548640" y="1371600"/>
+            <a:ext cx="11064240" cy="365760"/>
+          </a:xfrm>
+          <a:prstGeom prst="rect">
+            <a:avLst/>
+          </a:prstGeom>
+          <a:noFill/>
+          <a:ln/>
+        </p:spPr>
+        <p:txBody>
+          <a:bodyPr wrap="square" lIns="0" tIns="0" rIns="0" bIns="0" rtlCol="0" anchor="ctr"/>
+          <a:lstStyle/>
+          <a:p>
+            <a:pPr marL="0" indent="0">
+              <a:buNone/>
+            </a:pPr>
+            <a:r>
+              <a:rPr lang="en-US" sz="1350" i="1" dirty="0">
+                <a:solidFill>
+                  <a:srgbClr val="1A2233"/>
+                </a:solidFill>
+                <a:latin typeface="Calibri" pitchFamily="34" charset="0"/>
+                <a:ea typeface="Calibri" pitchFamily="34" charset="-122"/>
+                <a:cs typeface="Calibri" pitchFamily="34" charset="-120"/>
+              </a:rPr>
+              <a:t>Modelled the PDDL+ way: </a:t>
+            </a:r>
+            <a:r>
+              <a:rPr lang="en-US" sz="1350" b="1" i="1" dirty="0">
+                <a:solidFill>
+                  <a:srgbClr val="065A82"/>
+                </a:solidFill>
+                <a:latin typeface="Consolas" pitchFamily="34" charset="0"/>
+                <a:ea typeface="Consolas" pitchFamily="34" charset="-122"/>
+                <a:cs typeface="Consolas" pitchFamily="34" charset="-120"/>
+              </a:rPr>
+              <a:t>start-move</a:t>
+            </a:r>
+            <a:r>
+              <a:rPr lang="en-US" sz="1350" i="1" dirty="0">
+                <a:solidFill>
+                  <a:srgbClr val="1A2233"/>
+                </a:solidFill>
+                <a:latin typeface="Calibri" pitchFamily="34" charset="0"/>
+                <a:ea typeface="Calibri" pitchFamily="34" charset="-122"/>
+                <a:cs typeface="Calibri" pitchFamily="34" charset="-120"/>
+              </a:rPr>
+              <a:t> (action) → </a:t>
+            </a:r>
+            <a:r>
+              <a:rPr lang="en-US" sz="1350" b="1" i="1" dirty="0">
+                <a:solidFill>
+                  <a:srgbClr val="1C7293"/>
+                </a:solidFill>
+                <a:latin typeface="Consolas" pitchFamily="34" charset="0"/>
+                <a:ea typeface="Consolas" pitchFamily="34" charset="-122"/>
+                <a:cs typeface="Consolas" pitchFamily="34" charset="-120"/>
+              </a:rPr>
+              <a:t>travel</a:t>
+            </a:r>
+            <a:r>
+              <a:rPr lang="en-US" sz="1350" i="1" dirty="0">
+                <a:solidFill>
+                  <a:srgbClr val="1A2233"/>
+                </a:solidFill>
+                <a:latin typeface="Calibri" pitchFamily="34" charset="0"/>
+                <a:ea typeface="Calibri" pitchFamily="34" charset="-122"/>
+                <a:cs typeface="Calibri" pitchFamily="34" charset="-120"/>
+              </a:rPr>
+              <a:t> (process counts a 5-tick timer down) → </a:t>
+            </a:r>
+            <a:r>
+              <a:rPr lang="en-US" sz="1350" b="1" i="1" dirty="0">
+                <a:solidFill>
+                  <a:srgbClr val="E8A33D"/>
+                </a:solidFill>
+                <a:latin typeface="Consolas" pitchFamily="34" charset="0"/>
+                <a:ea typeface="Consolas" pitchFamily="34" charset="-122"/>
+                <a:cs typeface="Consolas" pitchFamily="34" charset="-120"/>
+              </a:rPr>
+              <a:t>arrive</a:t>
+            </a:r>
+            <a:r>
+              <a:rPr lang="en-US" sz="1350" i="1" dirty="0">
+                <a:solidFill>
+                  <a:srgbClr val="1A2233"/>
+                </a:solidFill>
+                <a:latin typeface="Calibri" pitchFamily="34" charset="0"/>
+                <a:ea typeface="Calibri" pitchFamily="34" charset="-122"/>
+                <a:cs typeface="Calibri" pitchFamily="34" charset="-120"/>
+              </a:rPr>
+              <a:t> (event lands the rover).</a:t>
+            </a:r>
+            <a:endParaRPr lang="en-US" sz="1350" dirty="0"/>
+          </a:p>
+        </p:txBody>
+      </p:sp>
+      <p:graphicFrame>
+        <p:nvGraphicFramePr>
+          <p:cNvPr id="14" name="Table 0"/>
+          <p:cNvGraphicFramePr>
+            <a:graphicFrameLocks noGrp="1"/>
+          </p:cNvGraphicFramePr>
+          <p:nvPr>
+            <p:extLst>
+              <p:ext uri="{D42A27DB-BD31-4B8C-83A1-F6EECF244321}">
+                <p14:modId xmlns:p14="http://schemas.microsoft.com/office/powerpoint/2010/main" val="1579011935"/>
+              </p:ext>
+            </p:extLst>
+          </p:nvPr>
+        </p:nvGraphicFramePr>
+        <p:xfrm>
+          <a:off x="548640" y="1828800"/>
+          <a:ext cx="6766560" cy="2240280"/>
+        </p:xfrm>
+        <a:graphic>
+          <a:graphicData uri="http://schemas.openxmlformats.org/drawingml/2006/table">
+            <a:tbl>
+              <a:tblPr/>
+              <a:tblGrid>
+                <a:gridCol w="1371600">
+                  <a:extLst>
+                    <a:ext uri="{9D8B030D-6E8A-4147-A177-3AD203B41FA5}">
+                      <a16:colId xmlns:a16="http://schemas.microsoft.com/office/drawing/2014/main" val="20000"/>
+                    </a:ext>
+                  </a:extLst>
+                </a:gridCol>
+                <a:gridCol w="1828800">
+                  <a:extLst>
+                    <a:ext uri="{9D8B030D-6E8A-4147-A177-3AD203B41FA5}">
+                      <a16:colId xmlns:a16="http://schemas.microsoft.com/office/drawing/2014/main" val="20001"/>
+                    </a:ext>
+                  </a:extLst>
+                </a:gridCol>
+                <a:gridCol w="1737360">
+                  <a:extLst>
+                    <a:ext uri="{9D8B030D-6E8A-4147-A177-3AD203B41FA5}">
+                      <a16:colId xmlns:a16="http://schemas.microsoft.com/office/drawing/2014/main" val="20002"/>
+                    </a:ext>
+                  </a:extLst>
+                </a:gridCol>
+                <a:gridCol w="1828800">
+                  <a:extLst>
+                    <a:ext uri="{9D8B030D-6E8A-4147-A177-3AD203B41FA5}">
+                      <a16:colId xmlns:a16="http://schemas.microsoft.com/office/drawing/2014/main" val="20003"/>
+                    </a:ext>
+                  </a:extLst>
+                </a:gridCol>
+              </a:tblGrid>
+              <a:tr h="411480">
+                <a:tc>
+                  <a:txBody>
+                    <a:bodyPr/>
+                    <a:lstStyle/>
+                    <a:p>
+                      <a:pPr marL="0" indent="0" algn="l">
+                        <a:buNone/>
+                      </a:pPr>
+                      <a:r>
+                        <a:rPr lang="en-US" sz="1150" b="1" dirty="0">
+                          <a:solidFill>
+                            <a:srgbClr val="FFFFFF"/>
+                          </a:solidFill>
+                          <a:latin typeface="Calibri" pitchFamily="34" charset="0"/>
+                          <a:ea typeface="Calibri" pitchFamily="34" charset="-122"/>
+                          <a:cs typeface="Calibri" pitchFamily="34" charset="-120"/>
+                        </a:rPr>
+                        <a:t>Case</a:t>
+                      </a:r>
+                      <a:endParaRPr lang="en-US" sz="1150" dirty="0">
+                        <a:latin typeface="Calibri" charset="0"/>
+                        <a:ea typeface="Calibri" charset="0"/>
+                        <a:cs typeface="Calibri" charset="0"/>
+                      </a:endParaRPr>
+                    </a:p>
+                  </a:txBody>
+                  <a:tcPr anchor="ctr">
+                    <a:lnL w="6350" cap="flat" cmpd="sng" algn="ctr">
+                      <a:solidFill>
+                        <a:srgbClr val="D8E0E8"/>
+                      </a:solidFill>
+                      <a:prstDash val="solid"/>
+                      <a:round/>
+                      <a:headEnd type="none" w="med" len="med"/>
+                      <a:tailEnd type="none" w="med" len="med"/>
+                    </a:lnL>
+                    <a:lnR w="6350" cap="flat" cmpd="sng" algn="ctr">
+                      <a:solidFill>
+                        <a:srgbClr val="D8E0E8"/>
+                      </a:solidFill>
+                      <a:prstDash val="solid"/>
+                      <a:round/>
+                      <a:headEnd type="none" w="med" len="med"/>
+                      <a:tailEnd type="none" w="med" len="med"/>
+                    </a:lnR>
+                    <a:lnT w="6350" cap="flat" cmpd="sng" algn="ctr">
+                      <a:solidFill>
+                        <a:srgbClr val="D8E0E8"/>
+                      </a:solidFill>
+                      <a:prstDash val="solid"/>
+                      <a:round/>
+                      <a:headEnd type="none" w="med" len="med"/>
+                      <a:tailEnd type="none" w="med" len="med"/>
+                    </a:lnT>
+                    <a:lnB w="6350" cap="flat" cmpd="sng" algn="ctr">
+                      <a:solidFill>
+                        <a:srgbClr val="D8E0E8"/>
+                      </a:solidFill>
+                      <a:prstDash val="solid"/>
+                      <a:round/>
+                      <a:headEnd type="none" w="med" len="med"/>
+                      <a:tailEnd type="none" w="med" len="med"/>
+                    </a:lnB>
+                    <a:solidFill>
+                      <a:srgbClr val="21295C"/>
+                    </a:solidFill>
+                  </a:tcPr>
+                </a:tc>
+                <a:tc>
+                  <a:txBody>
+                    <a:bodyPr/>
+                    <a:lstStyle/>
+                    <a:p>
+                      <a:pPr marL="0" indent="0" algn="ctr">
+                        <a:buNone/>
+                      </a:pPr>
+                      <a:r>
+                        <a:rPr lang="en-US" sz="1150" b="1" dirty="0">
+                          <a:solidFill>
+                            <a:srgbClr val="FFFFFF"/>
+                          </a:solidFill>
+                          <a:latin typeface="Calibri" pitchFamily="34" charset="0"/>
+                          <a:ea typeface="Calibri" pitchFamily="34" charset="-122"/>
+                          <a:cs typeface="Calibri" pitchFamily="34" charset="-120"/>
+                        </a:rPr>
+                        <a:t>Instantaneous (Q2)</a:t>
+                      </a:r>
+                      <a:endParaRPr lang="en-US" sz="1150" dirty="0">
+                        <a:latin typeface="Calibri" charset="0"/>
+                        <a:ea typeface="Calibri" charset="0"/>
+                        <a:cs typeface="Calibri" charset="0"/>
+                      </a:endParaRPr>
+                    </a:p>
+                  </a:txBody>
+                  <a:tcPr anchor="ctr">
+                    <a:lnL w="6350" cap="flat" cmpd="sng" algn="ctr">
+                      <a:solidFill>
+                        <a:srgbClr val="D8E0E8"/>
+                      </a:solidFill>
+                      <a:prstDash val="solid"/>
+                      <a:round/>
+                      <a:headEnd type="none" w="med" len="med"/>
+                      <a:tailEnd type="none" w="med" len="med"/>
+                    </a:lnL>
+                    <a:lnR w="6350" cap="flat" cmpd="sng" algn="ctr">
+                      <a:solidFill>
+                        <a:srgbClr val="D8E0E8"/>
+                      </a:solidFill>
+                      <a:prstDash val="solid"/>
+                      <a:round/>
+                      <a:headEnd type="none" w="med" len="med"/>
+                      <a:tailEnd type="none" w="med" len="med"/>
+                    </a:lnR>
+                    <a:lnT w="6350" cap="flat" cmpd="sng" algn="ctr">
+                      <a:solidFill>
+                        <a:srgbClr val="D8E0E8"/>
+                      </a:solidFill>
+                      <a:prstDash val="solid"/>
+                      <a:round/>
+                      <a:headEnd type="none" w="med" len="med"/>
+                      <a:tailEnd type="none" w="med" len="med"/>
+                    </a:lnT>
+                    <a:lnB w="6350" cap="flat" cmpd="sng" algn="ctr">
+                      <a:solidFill>
+                        <a:srgbClr val="D8E0E8"/>
+                      </a:solidFill>
+                      <a:prstDash val="solid"/>
+                      <a:round/>
+                      <a:headEnd type="none" w="med" len="med"/>
+                      <a:tailEnd type="none" w="med" len="med"/>
+                    </a:lnB>
+                    <a:solidFill>
+                      <a:srgbClr val="21295C"/>
+                    </a:solidFill>
+                  </a:tcPr>
+                </a:tc>
+                <a:tc>
+                  <a:txBody>
+                    <a:bodyPr/>
+                    <a:lstStyle/>
+                    <a:p>
+                      <a:pPr marL="0" indent="0" algn="ctr">
+                        <a:buNone/>
+                      </a:pPr>
+                      <a:r>
+                        <a:rPr lang="en-US" sz="1150" b="1" dirty="0">
+                          <a:solidFill>
+                            <a:srgbClr val="FFFFFF"/>
+                          </a:solidFill>
+                          <a:latin typeface="Calibri" pitchFamily="34" charset="0"/>
+                          <a:ea typeface="Calibri" pitchFamily="34" charset="-122"/>
+                          <a:cs typeface="Calibri" pitchFamily="34" charset="-120"/>
+                        </a:rPr>
+                        <a:t>Durative (bonus)</a:t>
+                      </a:r>
+                      <a:endParaRPr lang="en-US" sz="1150" dirty="0">
+                        <a:latin typeface="Calibri" charset="0"/>
+                        <a:ea typeface="Calibri" charset="0"/>
+                        <a:cs typeface="Calibri" charset="0"/>
+                      </a:endParaRPr>
+                    </a:p>
+                  </a:txBody>
+                  <a:tcPr anchor="ctr">
+                    <a:lnL w="6350" cap="flat" cmpd="sng" algn="ctr">
+                      <a:solidFill>
+                        <a:srgbClr val="D8E0E8"/>
+                      </a:solidFill>
+                      <a:prstDash val="solid"/>
+                      <a:round/>
+                      <a:headEnd type="none" w="med" len="med"/>
+                      <a:tailEnd type="none" w="med" len="med"/>
+                    </a:lnL>
+                    <a:lnR w="6350" cap="flat" cmpd="sng" algn="ctr">
+                      <a:solidFill>
+                        <a:srgbClr val="D8E0E8"/>
+                      </a:solidFill>
+                      <a:prstDash val="solid"/>
+                      <a:round/>
+                      <a:headEnd type="none" w="med" len="med"/>
+                      <a:tailEnd type="none" w="med" len="med"/>
+                    </a:lnR>
+                    <a:lnT w="6350" cap="flat" cmpd="sng" algn="ctr">
+                      <a:solidFill>
+                        <a:srgbClr val="D8E0E8"/>
+                      </a:solidFill>
+                      <a:prstDash val="solid"/>
+                      <a:round/>
+                      <a:headEnd type="none" w="med" len="med"/>
+                      <a:tailEnd type="none" w="med" len="med"/>
+                    </a:lnT>
+                    <a:lnB w="6350" cap="flat" cmpd="sng" algn="ctr">
+                      <a:solidFill>
+                        <a:srgbClr val="D8E0E8"/>
+                      </a:solidFill>
+                      <a:prstDash val="solid"/>
+                      <a:round/>
+                      <a:headEnd type="none" w="med" len="med"/>
+                      <a:tailEnd type="none" w="med" len="med"/>
+                    </a:lnB>
+                    <a:solidFill>
+                      <a:srgbClr val="21295C"/>
+                    </a:solidFill>
+                  </a:tcPr>
+                </a:tc>
+                <a:tc>
+                  <a:txBody>
+                    <a:bodyPr/>
+                    <a:lstStyle/>
+                    <a:p>
+                      <a:pPr marL="0" indent="0" algn="l">
+                        <a:buNone/>
+                      </a:pPr>
+                      <a:r>
+                        <a:rPr lang="en-US" sz="1150" b="1" dirty="0">
+                          <a:solidFill>
+                            <a:srgbClr val="FFFFFF"/>
+                          </a:solidFill>
+                          <a:latin typeface="Calibri" pitchFamily="34" charset="0"/>
+                          <a:ea typeface="Calibri" pitchFamily="34" charset="-122"/>
+                          <a:cs typeface="Calibri" pitchFamily="34" charset="-120"/>
+                        </a:rPr>
+                        <a:t>Why it shifts</a:t>
+                      </a:r>
+                      <a:endParaRPr lang="en-US" sz="1150" dirty="0">
+                        <a:latin typeface="Calibri" charset="0"/>
+                        <a:ea typeface="Calibri" charset="0"/>
+                        <a:cs typeface="Calibri" charset="0"/>
+                      </a:endParaRPr>
+                    </a:p>
+                  </a:txBody>
+                  <a:tcPr anchor="ctr">
+                    <a:lnL w="6350" cap="flat" cmpd="sng" algn="ctr">
+                      <a:solidFill>
+                        <a:srgbClr val="D8E0E8"/>
+                      </a:solidFill>
+                      <a:prstDash val="solid"/>
+                      <a:round/>
+                      <a:headEnd type="none" w="med" len="med"/>
+                      <a:tailEnd type="none" w="med" len="med"/>
+                    </a:lnL>
+                    <a:lnR w="6350" cap="flat" cmpd="sng" algn="ctr">
+                      <a:solidFill>
+                        <a:srgbClr val="D8E0E8"/>
+                      </a:solidFill>
+                      <a:prstDash val="solid"/>
+                      <a:round/>
+                      <a:headEnd type="none" w="med" len="med"/>
+                      <a:tailEnd type="none" w="med" len="med"/>
+                    </a:lnR>
+                    <a:lnT w="6350" cap="flat" cmpd="sng" algn="ctr">
+                      <a:solidFill>
+                        <a:srgbClr val="D8E0E8"/>
+                      </a:solidFill>
+                      <a:prstDash val="solid"/>
+                      <a:round/>
+                      <a:headEnd type="none" w="med" len="med"/>
+                      <a:tailEnd type="none" w="med" len="med"/>
+                    </a:lnT>
+                    <a:lnB w="6350" cap="flat" cmpd="sng" algn="ctr">
+                      <a:solidFill>
+                        <a:srgbClr val="D8E0E8"/>
+                      </a:solidFill>
+                      <a:prstDash val="solid"/>
+                      <a:round/>
+                      <a:headEnd type="none" w="med" len="med"/>
+                      <a:tailEnd type="none" w="med" len="med"/>
+                    </a:lnB>
+                    <a:solidFill>
+                      <a:srgbClr val="21295C"/>
+                    </a:solidFill>
+                  </a:tcPr>
+                </a:tc>
+                <a:extLst>
+                  <a:ext uri="{0D108BD9-81ED-4DB2-BD59-A6C34878D82A}">
+                    <a16:rowId xmlns:a16="http://schemas.microsoft.com/office/drawing/2014/main" val="10000"/>
+                  </a:ext>
+                </a:extLst>
+              </a:tr>
+              <a:tr h="457200">
+                <a:tc>
+                  <a:txBody>
+                    <a:bodyPr/>
+                    <a:lstStyle/>
+                    <a:p>
+                      <a:pPr marL="0" indent="0" algn="l">
+                        <a:buNone/>
+                      </a:pPr>
+                      <a:r>
+                        <a:rPr lang="en-US" sz="1150" dirty="0">
+                          <a:solidFill>
+                            <a:srgbClr val="21295C"/>
+                          </a:solidFill>
+                          <a:latin typeface="Consolas" pitchFamily="34" charset="0"/>
+                          <a:ea typeface="Consolas" pitchFamily="34" charset="-122"/>
+                          <a:cs typeface="Consolas" pitchFamily="34" charset="-120"/>
+                        </a:rPr>
+                        <a:t>easy</a:t>
+                      </a:r>
+                      <a:endParaRPr lang="en-US" sz="1150" dirty="0">
+                        <a:latin typeface="Consolas" charset="0"/>
+                        <a:ea typeface="Consolas" charset="0"/>
+                        <a:cs typeface="Consolas" charset="0"/>
+                      </a:endParaRPr>
+                    </a:p>
+                  </a:txBody>
+                  <a:tcPr anchor="ctr">
+                    <a:lnL w="6350" cap="flat" cmpd="sng" algn="ctr">
+                      <a:solidFill>
+                        <a:srgbClr val="D8E0E8"/>
+                      </a:solidFill>
+                      <a:prstDash val="solid"/>
+                      <a:round/>
+                      <a:headEnd type="none" w="med" len="med"/>
+                      <a:tailEnd type="none" w="med" len="med"/>
+                    </a:lnL>
+                    <a:lnR w="6350" cap="flat" cmpd="sng" algn="ctr">
+                      <a:solidFill>
+                        <a:srgbClr val="D8E0E8"/>
+                      </a:solidFill>
+                      <a:prstDash val="solid"/>
+                      <a:round/>
+                      <a:headEnd type="none" w="med" len="med"/>
+                      <a:tailEnd type="none" w="med" len="med"/>
+                    </a:lnR>
+                    <a:lnT w="6350" cap="flat" cmpd="sng" algn="ctr">
+                      <a:solidFill>
+                        <a:srgbClr val="D8E0E8"/>
+                      </a:solidFill>
+                      <a:prstDash val="solid"/>
+                      <a:round/>
+                      <a:headEnd type="none" w="med" len="med"/>
+                      <a:tailEnd type="none" w="med" len="med"/>
+                    </a:lnT>
+                    <a:lnB w="6350" cap="flat" cmpd="sng" algn="ctr">
+                      <a:solidFill>
+                        <a:srgbClr val="D8E0E8"/>
+                      </a:solidFill>
+                      <a:prstDash val="solid"/>
+                      <a:round/>
+                      <a:headEnd type="none" w="med" len="med"/>
+                      <a:tailEnd type="none" w="med" len="med"/>
+                    </a:lnB>
+                  </a:tcPr>
+                </a:tc>
+                <a:tc>
+                  <a:txBody>
+                    <a:bodyPr/>
+                    <a:lstStyle/>
+                    <a:p>
+                      <a:pPr marL="0" indent="0" algn="ctr">
+                        <a:buNone/>
+                      </a:pPr>
+                      <a:r>
+                        <a:rPr lang="en-US" sz="1150" dirty="0">
+                          <a:solidFill>
+                            <a:srgbClr val="1A2233"/>
+                          </a:solidFill>
+                          <a:latin typeface="Calibri" pitchFamily="34" charset="0"/>
+                          <a:ea typeface="Calibri" pitchFamily="34" charset="-122"/>
+                          <a:cs typeface="Calibri" pitchFamily="34" charset="-120"/>
+                        </a:rPr>
+                        <a:t>finishes t=0</a:t>
+                      </a:r>
+                      <a:endParaRPr lang="en-US" sz="1150" dirty="0">
+                        <a:latin typeface="Calibri" charset="0"/>
+                        <a:ea typeface="Calibri" charset="0"/>
+                        <a:cs typeface="Calibri" charset="0"/>
+                      </a:endParaRPr>
+                    </a:p>
+                  </a:txBody>
+                  <a:tcPr anchor="ctr">
+                    <a:lnL w="6350" cap="flat" cmpd="sng" algn="ctr">
+                      <a:solidFill>
+                        <a:srgbClr val="D8E0E8"/>
+                      </a:solidFill>
+                      <a:prstDash val="solid"/>
+                      <a:round/>
+                      <a:headEnd type="none" w="med" len="med"/>
+                      <a:tailEnd type="none" w="med" len="med"/>
+                    </a:lnL>
+                    <a:lnR w="6350" cap="flat" cmpd="sng" algn="ctr">
+                      <a:solidFill>
+                        <a:srgbClr val="D8E0E8"/>
+                      </a:solidFill>
+                      <a:prstDash val="solid"/>
+                      <a:round/>
+                      <a:headEnd type="none" w="med" len="med"/>
+                      <a:tailEnd type="none" w="med" len="med"/>
+                    </a:lnR>
+                    <a:lnT w="6350" cap="flat" cmpd="sng" algn="ctr">
+                      <a:solidFill>
+                        <a:srgbClr val="D8E0E8"/>
+                      </a:solidFill>
+                      <a:prstDash val="solid"/>
+                      <a:round/>
+                      <a:headEnd type="none" w="med" len="med"/>
+                      <a:tailEnd type="none" w="med" len="med"/>
+                    </a:lnT>
+                    <a:lnB w="6350" cap="flat" cmpd="sng" algn="ctr">
+                      <a:solidFill>
+                        <a:srgbClr val="D8E0E8"/>
+                      </a:solidFill>
+                      <a:prstDash val="solid"/>
+                      <a:round/>
+                      <a:headEnd type="none" w="med" len="med"/>
+                      <a:tailEnd type="none" w="med" len="med"/>
+                    </a:lnB>
+                  </a:tcPr>
+                </a:tc>
+                <a:tc>
+                  <a:txBody>
+                    <a:bodyPr/>
+                    <a:lstStyle/>
+                    <a:p>
+                      <a:pPr marL="0" indent="0" algn="ctr">
+                        <a:buNone/>
+                      </a:pPr>
+                      <a:r>
+                        <a:rPr lang="en-US" sz="1150" b="1" dirty="0">
+                          <a:solidFill>
+                            <a:srgbClr val="065A82"/>
+                          </a:solidFill>
+                          <a:latin typeface="Calibri" pitchFamily="34" charset="0"/>
+                          <a:ea typeface="Calibri" pitchFamily="34" charset="-122"/>
+                          <a:cs typeface="Calibri" pitchFamily="34" charset="-120"/>
+                        </a:rPr>
+                        <a:t>finishes t=15</a:t>
+                      </a:r>
+                      <a:endParaRPr lang="en-US" sz="1150" dirty="0">
+                        <a:latin typeface="Calibri" charset="0"/>
+                        <a:ea typeface="Calibri" charset="0"/>
+                        <a:cs typeface="Calibri" charset="0"/>
+                      </a:endParaRPr>
+                    </a:p>
+                  </a:txBody>
+                  <a:tcPr anchor="ctr">
+                    <a:lnL w="6350" cap="flat" cmpd="sng" algn="ctr">
+                      <a:solidFill>
+                        <a:srgbClr val="D8E0E8"/>
+                      </a:solidFill>
+                      <a:prstDash val="solid"/>
+                      <a:round/>
+                      <a:headEnd type="none" w="med" len="med"/>
+                      <a:tailEnd type="none" w="med" len="med"/>
+                    </a:lnL>
+                    <a:lnR w="6350" cap="flat" cmpd="sng" algn="ctr">
+                      <a:solidFill>
+                        <a:srgbClr val="D8E0E8"/>
+                      </a:solidFill>
+                      <a:prstDash val="solid"/>
+                      <a:round/>
+                      <a:headEnd type="none" w="med" len="med"/>
+                      <a:tailEnd type="none" w="med" len="med"/>
+                    </a:lnR>
+                    <a:lnT w="6350" cap="flat" cmpd="sng" algn="ctr">
+                      <a:solidFill>
+                        <a:srgbClr val="D8E0E8"/>
+                      </a:solidFill>
+                      <a:prstDash val="solid"/>
+                      <a:round/>
+                      <a:headEnd type="none" w="med" len="med"/>
+                      <a:tailEnd type="none" w="med" len="med"/>
+                    </a:lnT>
+                    <a:lnB w="6350" cap="flat" cmpd="sng" algn="ctr">
+                      <a:solidFill>
+                        <a:srgbClr val="D8E0E8"/>
+                      </a:solidFill>
+                      <a:prstDash val="solid"/>
+                      <a:round/>
+                      <a:headEnd type="none" w="med" len="med"/>
+                      <a:tailEnd type="none" w="med" len="med"/>
+                    </a:lnB>
+                  </a:tcPr>
+                </a:tc>
+                <a:tc>
+                  <a:txBody>
+                    <a:bodyPr/>
+                    <a:lstStyle/>
+                    <a:p>
+                      <a:pPr marL="0" indent="0" algn="l">
+                        <a:buNone/>
+                      </a:pPr>
+                      <a:r>
+                        <a:rPr lang="en-US" sz="1150" dirty="0">
+                          <a:solidFill>
+                            <a:srgbClr val="1A2233"/>
+                          </a:solidFill>
+                          <a:latin typeface="Calibri" pitchFamily="34" charset="0"/>
+                          <a:ea typeface="Calibri" pitchFamily="34" charset="-122"/>
+                          <a:cs typeface="Calibri" pitchFamily="34" charset="-120"/>
+                        </a:rPr>
+                        <a:t>travel now costs 3×5 ticks</a:t>
+                      </a:r>
+                      <a:endParaRPr lang="en-US" sz="1150" dirty="0">
+                        <a:latin typeface="Calibri" charset="0"/>
+                        <a:ea typeface="Calibri" charset="0"/>
+                        <a:cs typeface="Calibri" charset="0"/>
+                      </a:endParaRPr>
+                    </a:p>
+                  </a:txBody>
+                  <a:tcPr anchor="ctr">
+                    <a:lnL w="6350" cap="flat" cmpd="sng" algn="ctr">
+                      <a:solidFill>
+                        <a:srgbClr val="D8E0E8"/>
+                      </a:solidFill>
+                      <a:prstDash val="solid"/>
+                      <a:round/>
+                      <a:headEnd type="none" w="med" len="med"/>
+                      <a:tailEnd type="none" w="med" len="med"/>
+                    </a:lnL>
+                    <a:lnR w="6350" cap="flat" cmpd="sng" algn="ctr">
+                      <a:solidFill>
+                        <a:srgbClr val="D8E0E8"/>
+                      </a:solidFill>
+                      <a:prstDash val="solid"/>
+                      <a:round/>
+                      <a:headEnd type="none" w="med" len="med"/>
+                      <a:tailEnd type="none" w="med" len="med"/>
+                    </a:lnR>
+                    <a:lnT w="6350" cap="flat" cmpd="sng" algn="ctr">
+                      <a:solidFill>
+                        <a:srgbClr val="D8E0E8"/>
+                      </a:solidFill>
+                      <a:prstDash val="solid"/>
+                      <a:round/>
+                      <a:headEnd type="none" w="med" len="med"/>
+                      <a:tailEnd type="none" w="med" len="med"/>
+                    </a:lnT>
+                    <a:lnB w="6350" cap="flat" cmpd="sng" algn="ctr">
+                      <a:solidFill>
+                        <a:srgbClr val="D8E0E8"/>
+                      </a:solidFill>
+                      <a:prstDash val="solid"/>
+                      <a:round/>
+                      <a:headEnd type="none" w="med" len="med"/>
+                      <a:tailEnd type="none" w="med" len="med"/>
+                    </a:lnB>
+                  </a:tcPr>
+                </a:tc>
+                <a:extLst>
+                  <a:ext uri="{0D108BD9-81ED-4DB2-BD59-A6C34878D82A}">
+                    <a16:rowId xmlns:a16="http://schemas.microsoft.com/office/drawing/2014/main" val="10001"/>
+                  </a:ext>
+                </a:extLst>
+              </a:tr>
+              <a:tr h="457200">
+                <a:tc>
+                  <a:txBody>
+                    <a:bodyPr/>
+                    <a:lstStyle/>
+                    <a:p>
+                      <a:pPr marL="0" indent="0" algn="l">
+                        <a:buNone/>
+                      </a:pPr>
+                      <a:r>
+                        <a:rPr lang="en-US" sz="1150" dirty="0">
+                          <a:solidFill>
+                            <a:srgbClr val="21295C"/>
+                          </a:solidFill>
+                          <a:latin typeface="Consolas" pitchFamily="34" charset="0"/>
+                          <a:ea typeface="Consolas" pitchFamily="34" charset="-122"/>
+                          <a:cs typeface="Consolas" pitchFamily="34" charset="-120"/>
+                        </a:rPr>
+                        <a:t>tight</a:t>
+                      </a:r>
+                      <a:endParaRPr lang="en-US" sz="1150" dirty="0">
+                        <a:latin typeface="Consolas" charset="0"/>
+                        <a:ea typeface="Consolas" charset="0"/>
+                        <a:cs typeface="Consolas" charset="0"/>
+                      </a:endParaRPr>
+                    </a:p>
+                  </a:txBody>
+                  <a:tcPr anchor="ctr">
+                    <a:lnL w="6350" cap="flat" cmpd="sng" algn="ctr">
+                      <a:solidFill>
+                        <a:srgbClr val="D8E0E8"/>
+                      </a:solidFill>
+                      <a:prstDash val="solid"/>
+                      <a:round/>
+                      <a:headEnd type="none" w="med" len="med"/>
+                      <a:tailEnd type="none" w="med" len="med"/>
+                    </a:lnL>
+                    <a:lnR w="6350" cap="flat" cmpd="sng" algn="ctr">
+                      <a:solidFill>
+                        <a:srgbClr val="D8E0E8"/>
+                      </a:solidFill>
+                      <a:prstDash val="solid"/>
+                      <a:round/>
+                      <a:headEnd type="none" w="med" len="med"/>
+                      <a:tailEnd type="none" w="med" len="med"/>
+                    </a:lnR>
+                    <a:lnT w="6350" cap="flat" cmpd="sng" algn="ctr">
+                      <a:solidFill>
+                        <a:srgbClr val="D8E0E8"/>
+                      </a:solidFill>
+                      <a:prstDash val="solid"/>
+                      <a:round/>
+                      <a:headEnd type="none" w="med" len="med"/>
+                      <a:tailEnd type="none" w="med" len="med"/>
+                    </a:lnT>
+                    <a:lnB w="6350" cap="flat" cmpd="sng" algn="ctr">
+                      <a:solidFill>
+                        <a:srgbClr val="D8E0E8"/>
+                      </a:solidFill>
+                      <a:prstDash val="solid"/>
+                      <a:round/>
+                      <a:headEnd type="none" w="med" len="med"/>
+                      <a:tailEnd type="none" w="med" len="med"/>
+                    </a:lnB>
+                  </a:tcPr>
+                </a:tc>
+                <a:tc>
+                  <a:txBody>
+                    <a:bodyPr/>
+                    <a:lstStyle/>
+                    <a:p>
+                      <a:pPr marL="0" indent="0" algn="ctr">
+                        <a:buNone/>
+                      </a:pPr>
+                      <a:r>
+                        <a:rPr lang="en-US" sz="1150" dirty="0">
+                          <a:solidFill>
+                            <a:srgbClr val="1A2233"/>
+                          </a:solidFill>
+                          <a:latin typeface="Calibri" pitchFamily="34" charset="0"/>
+                          <a:ea typeface="Calibri" pitchFamily="34" charset="-122"/>
+                          <a:cs typeface="Calibri" pitchFamily="34" charset="-120"/>
+                        </a:rPr>
+                        <a:t>47 ticks</a:t>
+                      </a:r>
+                      <a:endParaRPr lang="en-US" sz="1150" dirty="0">
+                        <a:latin typeface="Calibri" charset="0"/>
+                        <a:ea typeface="Calibri" charset="0"/>
+                        <a:cs typeface="Calibri" charset="0"/>
+                      </a:endParaRPr>
+                    </a:p>
+                  </a:txBody>
+                  <a:tcPr anchor="ctr">
+                    <a:lnL w="6350" cap="flat" cmpd="sng" algn="ctr">
+                      <a:solidFill>
+                        <a:srgbClr val="D8E0E8"/>
+                      </a:solidFill>
+                      <a:prstDash val="solid"/>
+                      <a:round/>
+                      <a:headEnd type="none" w="med" len="med"/>
+                      <a:tailEnd type="none" w="med" len="med"/>
+                    </a:lnL>
+                    <a:lnR w="6350" cap="flat" cmpd="sng" algn="ctr">
+                      <a:solidFill>
+                        <a:srgbClr val="D8E0E8"/>
+                      </a:solidFill>
+                      <a:prstDash val="solid"/>
+                      <a:round/>
+                      <a:headEnd type="none" w="med" len="med"/>
+                      <a:tailEnd type="none" w="med" len="med"/>
+                    </a:lnR>
+                    <a:lnT w="6350" cap="flat" cmpd="sng" algn="ctr">
+                      <a:solidFill>
+                        <a:srgbClr val="D8E0E8"/>
+                      </a:solidFill>
+                      <a:prstDash val="solid"/>
+                      <a:round/>
+                      <a:headEnd type="none" w="med" len="med"/>
+                      <a:tailEnd type="none" w="med" len="med"/>
+                    </a:lnT>
+                    <a:lnB w="6350" cap="flat" cmpd="sng" algn="ctr">
+                      <a:solidFill>
+                        <a:srgbClr val="D8E0E8"/>
+                      </a:solidFill>
+                      <a:prstDash val="solid"/>
+                      <a:round/>
+                      <a:headEnd type="none" w="med" len="med"/>
+                      <a:tailEnd type="none" w="med" len="med"/>
+                    </a:lnB>
+                  </a:tcPr>
+                </a:tc>
+                <a:tc>
+                  <a:txBody>
+                    <a:bodyPr/>
+                    <a:lstStyle/>
+                    <a:p>
+                      <a:pPr marL="0" indent="0" algn="ctr">
+                        <a:buNone/>
+                      </a:pPr>
+                      <a:r>
+                        <a:rPr lang="en-US" sz="1150" b="1" dirty="0">
+                          <a:solidFill>
+                            <a:srgbClr val="065A82"/>
+                          </a:solidFill>
+                          <a:latin typeface="Calibri" pitchFamily="34" charset="0"/>
+                          <a:ea typeface="Calibri" pitchFamily="34" charset="-122"/>
+                          <a:cs typeface="Calibri" pitchFamily="34" charset="-120"/>
+                        </a:rPr>
+                        <a:t>65 ticks</a:t>
+                      </a:r>
+                      <a:endParaRPr lang="en-US" sz="1150" dirty="0">
+                        <a:latin typeface="Calibri" charset="0"/>
+                        <a:ea typeface="Calibri" charset="0"/>
+                        <a:cs typeface="Calibri" charset="0"/>
+                      </a:endParaRPr>
+                    </a:p>
+                  </a:txBody>
+                  <a:tcPr anchor="ctr">
+                    <a:lnL w="6350" cap="flat" cmpd="sng" algn="ctr">
+                      <a:solidFill>
+                        <a:srgbClr val="D8E0E8"/>
+                      </a:solidFill>
+                      <a:prstDash val="solid"/>
+                      <a:round/>
+                      <a:headEnd type="none" w="med" len="med"/>
+                      <a:tailEnd type="none" w="med" len="med"/>
+                    </a:lnL>
+                    <a:lnR w="6350" cap="flat" cmpd="sng" algn="ctr">
+                      <a:solidFill>
+                        <a:srgbClr val="D8E0E8"/>
+                      </a:solidFill>
+                      <a:prstDash val="solid"/>
+                      <a:round/>
+                      <a:headEnd type="none" w="med" len="med"/>
+                      <a:tailEnd type="none" w="med" len="med"/>
+                    </a:lnR>
+                    <a:lnT w="6350" cap="flat" cmpd="sng" algn="ctr">
+                      <a:solidFill>
+                        <a:srgbClr val="D8E0E8"/>
+                      </a:solidFill>
+                      <a:prstDash val="solid"/>
+                      <a:round/>
+                      <a:headEnd type="none" w="med" len="med"/>
+                      <a:tailEnd type="none" w="med" len="med"/>
+                    </a:lnT>
+                    <a:lnB w="6350" cap="flat" cmpd="sng" algn="ctr">
+                      <a:solidFill>
+                        <a:srgbClr val="D8E0E8"/>
+                      </a:solidFill>
+                      <a:prstDash val="solid"/>
+                      <a:round/>
+                      <a:headEnd type="none" w="med" len="med"/>
+                      <a:tailEnd type="none" w="med" len="med"/>
+                    </a:lnB>
+                  </a:tcPr>
+                </a:tc>
+                <a:tc>
+                  <a:txBody>
+                    <a:bodyPr/>
+                    <a:lstStyle/>
+                    <a:p>
+                      <a:pPr marL="0" indent="0" algn="l">
+                        <a:buNone/>
+                      </a:pPr>
+                      <a:r>
+                        <a:rPr lang="en-US" sz="1150" dirty="0">
+                          <a:solidFill>
+                            <a:srgbClr val="1A2233"/>
+                          </a:solidFill>
+                          <a:latin typeface="Calibri" pitchFamily="34" charset="0"/>
+                          <a:ea typeface="Calibri" pitchFamily="34" charset="-122"/>
+                          <a:cs typeface="Calibri" pitchFamily="34" charset="-120"/>
+                        </a:rPr>
+                        <a:t>+15 travel on top of slow charge</a:t>
+                      </a:r>
+                      <a:endParaRPr lang="en-US" sz="1150" dirty="0">
+                        <a:latin typeface="Calibri" charset="0"/>
+                        <a:ea typeface="Calibri" charset="0"/>
+                        <a:cs typeface="Calibri" charset="0"/>
+                      </a:endParaRPr>
+                    </a:p>
+                  </a:txBody>
+                  <a:tcPr anchor="ctr">
+                    <a:lnL w="6350" cap="flat" cmpd="sng" algn="ctr">
+                      <a:solidFill>
+                        <a:srgbClr val="D8E0E8"/>
+                      </a:solidFill>
+                      <a:prstDash val="solid"/>
+                      <a:round/>
+                      <a:headEnd type="none" w="med" len="med"/>
+                      <a:tailEnd type="none" w="med" len="med"/>
+                    </a:lnL>
+                    <a:lnR w="6350" cap="flat" cmpd="sng" algn="ctr">
+                      <a:solidFill>
+                        <a:srgbClr val="D8E0E8"/>
+                      </a:solidFill>
+                      <a:prstDash val="solid"/>
+                      <a:round/>
+                      <a:headEnd type="none" w="med" len="med"/>
+                      <a:tailEnd type="none" w="med" len="med"/>
+                    </a:lnR>
+                    <a:lnT w="6350" cap="flat" cmpd="sng" algn="ctr">
+                      <a:solidFill>
+                        <a:srgbClr val="D8E0E8"/>
+                      </a:solidFill>
+                      <a:prstDash val="solid"/>
+                      <a:round/>
+                      <a:headEnd type="none" w="med" len="med"/>
+                      <a:tailEnd type="none" w="med" len="med"/>
+                    </a:lnT>
+                    <a:lnB w="6350" cap="flat" cmpd="sng" algn="ctr">
+                      <a:solidFill>
+                        <a:srgbClr val="D8E0E8"/>
+                      </a:solidFill>
+                      <a:prstDash val="solid"/>
+                      <a:round/>
+                      <a:headEnd type="none" w="med" len="med"/>
+                      <a:tailEnd type="none" w="med" len="med"/>
+                    </a:lnB>
+                  </a:tcPr>
+                </a:tc>
+                <a:extLst>
+                  <a:ext uri="{0D108BD9-81ED-4DB2-BD59-A6C34878D82A}">
+                    <a16:rowId xmlns:a16="http://schemas.microsoft.com/office/drawing/2014/main" val="10002"/>
+                  </a:ext>
+                </a:extLst>
+              </a:tr>
+              <a:tr h="457200">
+                <a:tc>
+                  <a:txBody>
+                    <a:bodyPr/>
+                    <a:lstStyle/>
+                    <a:p>
+                      <a:pPr marL="0" indent="0" algn="l">
+                        <a:buNone/>
+                      </a:pPr>
+                      <a:r>
+                        <a:rPr lang="en-US" sz="1150" dirty="0">
+                          <a:solidFill>
+                            <a:srgbClr val="21295C"/>
+                          </a:solidFill>
+                          <a:latin typeface="Consolas" pitchFamily="34" charset="0"/>
+                          <a:ea typeface="Consolas" pitchFamily="34" charset="-122"/>
+                          <a:cs typeface="Consolas" pitchFamily="34" charset="-120"/>
+                        </a:rPr>
+                        <a:t>fastzone</a:t>
+                      </a:r>
+                      <a:endParaRPr lang="en-US" sz="1150" dirty="0">
+                        <a:latin typeface="Consolas" charset="0"/>
+                        <a:ea typeface="Consolas" charset="0"/>
+                        <a:cs typeface="Consolas" charset="0"/>
+                      </a:endParaRPr>
+                    </a:p>
+                  </a:txBody>
+                  <a:tcPr anchor="ctr">
+                    <a:lnL w="6350" cap="flat" cmpd="sng" algn="ctr">
+                      <a:solidFill>
+                        <a:srgbClr val="D8E0E8"/>
+                      </a:solidFill>
+                      <a:prstDash val="solid"/>
+                      <a:round/>
+                      <a:headEnd type="none" w="med" len="med"/>
+                      <a:tailEnd type="none" w="med" len="med"/>
+                    </a:lnL>
+                    <a:lnR w="6350" cap="flat" cmpd="sng" algn="ctr">
+                      <a:solidFill>
+                        <a:srgbClr val="D8E0E8"/>
+                      </a:solidFill>
+                      <a:prstDash val="solid"/>
+                      <a:round/>
+                      <a:headEnd type="none" w="med" len="med"/>
+                      <a:tailEnd type="none" w="med" len="med"/>
+                    </a:lnR>
+                    <a:lnT w="6350" cap="flat" cmpd="sng" algn="ctr">
+                      <a:solidFill>
+                        <a:srgbClr val="D8E0E8"/>
+                      </a:solidFill>
+                      <a:prstDash val="solid"/>
+                      <a:round/>
+                      <a:headEnd type="none" w="med" len="med"/>
+                      <a:tailEnd type="none" w="med" len="med"/>
+                    </a:lnT>
+                    <a:lnB w="6350" cap="flat" cmpd="sng" algn="ctr">
+                      <a:solidFill>
+                        <a:srgbClr val="D8E0E8"/>
+                      </a:solidFill>
+                      <a:prstDash val="solid"/>
+                      <a:round/>
+                      <a:headEnd type="none" w="med" len="med"/>
+                      <a:tailEnd type="none" w="med" len="med"/>
+                    </a:lnB>
+                  </a:tcPr>
+                </a:tc>
+                <a:tc>
+                  <a:txBody>
+                    <a:bodyPr/>
+                    <a:lstStyle/>
+                    <a:p>
+                      <a:pPr marL="0" indent="0" algn="ctr">
+                        <a:buNone/>
+                      </a:pPr>
+                      <a:r>
+                        <a:rPr lang="en-US" sz="1150" dirty="0">
+                          <a:solidFill>
+                            <a:srgbClr val="1A2233"/>
+                          </a:solidFill>
+                          <a:latin typeface="Calibri" pitchFamily="34" charset="0"/>
+                          <a:ea typeface="Calibri" pitchFamily="34" charset="-122"/>
+                          <a:cs typeface="Calibri" pitchFamily="34" charset="-120"/>
+                        </a:rPr>
+                        <a:t>boundary t=79</a:t>
+                      </a:r>
+                      <a:endParaRPr lang="en-US" sz="1150" dirty="0">
+                        <a:latin typeface="Calibri" charset="0"/>
+                        <a:ea typeface="Calibri" charset="0"/>
+                        <a:cs typeface="Calibri" charset="0"/>
+                      </a:endParaRPr>
+                    </a:p>
+                  </a:txBody>
+                  <a:tcPr anchor="ctr">
+                    <a:lnL w="6350" cap="flat" cmpd="sng" algn="ctr">
+                      <a:solidFill>
+                        <a:srgbClr val="D8E0E8"/>
+                      </a:solidFill>
+                      <a:prstDash val="solid"/>
+                      <a:round/>
+                      <a:headEnd type="none" w="med" len="med"/>
+                      <a:tailEnd type="none" w="med" len="med"/>
+                    </a:lnL>
+                    <a:lnR w="6350" cap="flat" cmpd="sng" algn="ctr">
+                      <a:solidFill>
+                        <a:srgbClr val="D8E0E8"/>
+                      </a:solidFill>
+                      <a:prstDash val="solid"/>
+                      <a:round/>
+                      <a:headEnd type="none" w="med" len="med"/>
+                      <a:tailEnd type="none" w="med" len="med"/>
+                    </a:lnR>
+                    <a:lnT w="6350" cap="flat" cmpd="sng" algn="ctr">
+                      <a:solidFill>
+                        <a:srgbClr val="D8E0E8"/>
+                      </a:solidFill>
+                      <a:prstDash val="solid"/>
+                      <a:round/>
+                      <a:headEnd type="none" w="med" len="med"/>
+                      <a:tailEnd type="none" w="med" len="med"/>
+                    </a:lnT>
+                    <a:lnB w="6350" cap="flat" cmpd="sng" algn="ctr">
+                      <a:solidFill>
+                        <a:srgbClr val="D8E0E8"/>
+                      </a:solidFill>
+                      <a:prstDash val="solid"/>
+                      <a:round/>
+                      <a:headEnd type="none" w="med" len="med"/>
+                      <a:tailEnd type="none" w="med" len="med"/>
+                    </a:lnB>
+                  </a:tcPr>
+                </a:tc>
+                <a:tc>
+                  <a:txBody>
+                    <a:bodyPr/>
+                    <a:lstStyle/>
+                    <a:p>
+                      <a:pPr marL="0" indent="0" algn="ctr">
+                        <a:buNone/>
+                      </a:pPr>
+                      <a:r>
+                        <a:rPr lang="en-US" sz="1150" b="1" dirty="0">
+                          <a:solidFill>
+                            <a:srgbClr val="065A82"/>
+                          </a:solidFill>
+                          <a:latin typeface="Calibri" pitchFamily="34" charset="0"/>
+                          <a:ea typeface="Calibri" pitchFamily="34" charset="-122"/>
+                          <a:cs typeface="Calibri" pitchFamily="34" charset="-120"/>
+                        </a:rPr>
+                        <a:t>boundary t=64</a:t>
+                      </a:r>
+                      <a:endParaRPr lang="en-US" sz="1150" dirty="0">
+                        <a:latin typeface="Calibri" charset="0"/>
+                        <a:ea typeface="Calibri" charset="0"/>
+                        <a:cs typeface="Calibri" charset="0"/>
+                      </a:endParaRPr>
+                    </a:p>
+                  </a:txBody>
+                  <a:tcPr anchor="ctr">
+                    <a:lnL w="6350" cap="flat" cmpd="sng" algn="ctr">
+                      <a:solidFill>
+                        <a:srgbClr val="D8E0E8"/>
+                      </a:solidFill>
+                      <a:prstDash val="solid"/>
+                      <a:round/>
+                      <a:headEnd type="none" w="med" len="med"/>
+                      <a:tailEnd type="none" w="med" len="med"/>
+                    </a:lnL>
+                    <a:lnR w="6350" cap="flat" cmpd="sng" algn="ctr">
+                      <a:solidFill>
+                        <a:srgbClr val="D8E0E8"/>
+                      </a:solidFill>
+                      <a:prstDash val="solid"/>
+                      <a:round/>
+                      <a:headEnd type="none" w="med" len="med"/>
+                      <a:tailEnd type="none" w="med" len="med"/>
+                    </a:lnR>
+                    <a:lnT w="6350" cap="flat" cmpd="sng" algn="ctr">
+                      <a:solidFill>
+                        <a:srgbClr val="D8E0E8"/>
+                      </a:solidFill>
+                      <a:prstDash val="solid"/>
+                      <a:round/>
+                      <a:headEnd type="none" w="med" len="med"/>
+                      <a:tailEnd type="none" w="med" len="med"/>
+                    </a:lnT>
+                    <a:lnB w="6350" cap="flat" cmpd="sng" algn="ctr">
+                      <a:solidFill>
+                        <a:srgbClr val="D8E0E8"/>
+                      </a:solidFill>
+                      <a:prstDash val="solid"/>
+                      <a:round/>
+                      <a:headEnd type="none" w="med" len="med"/>
+                      <a:tailEnd type="none" w="med" len="med"/>
+                    </a:lnB>
+                  </a:tcPr>
+                </a:tc>
+                <a:tc>
+                  <a:txBody>
+                    <a:bodyPr/>
+                    <a:lstStyle/>
+                    <a:p>
+                      <a:pPr marL="0" indent="0" algn="l">
+                        <a:buNone/>
+                      </a:pPr>
+                      <a:r>
+                        <a:rPr lang="en-US" sz="1150" dirty="0">
+                          <a:solidFill>
+                            <a:srgbClr val="1A2233"/>
+                          </a:solidFill>
+                          <a:latin typeface="Calibri" pitchFamily="34" charset="0"/>
+                          <a:ea typeface="Calibri" pitchFamily="34" charset="-122"/>
+                          <a:cs typeface="Calibri" pitchFamily="34" charset="-120"/>
+                        </a:rPr>
+                        <a:t>travel eats daylight earlier</a:t>
+                      </a:r>
+                      <a:endParaRPr lang="en-US" sz="1150" dirty="0">
+                        <a:latin typeface="Calibri" charset="0"/>
+                        <a:ea typeface="Calibri" charset="0"/>
+                        <a:cs typeface="Calibri" charset="0"/>
+                      </a:endParaRPr>
+                    </a:p>
+                  </a:txBody>
+                  <a:tcPr anchor="ctr">
+                    <a:lnL w="6350" cap="flat" cmpd="sng" algn="ctr">
+                      <a:solidFill>
+                        <a:srgbClr val="D8E0E8"/>
+                      </a:solidFill>
+                      <a:prstDash val="solid"/>
+                      <a:round/>
+                      <a:headEnd type="none" w="med" len="med"/>
+                      <a:tailEnd type="none" w="med" len="med"/>
+                    </a:lnL>
+                    <a:lnR w="6350" cap="flat" cmpd="sng" algn="ctr">
+                      <a:solidFill>
+                        <a:srgbClr val="D8E0E8"/>
+                      </a:solidFill>
+                      <a:prstDash val="solid"/>
+                      <a:round/>
+                      <a:headEnd type="none" w="med" len="med"/>
+                      <a:tailEnd type="none" w="med" len="med"/>
+                    </a:lnR>
+                    <a:lnT w="6350" cap="flat" cmpd="sng" algn="ctr">
+                      <a:solidFill>
+                        <a:srgbClr val="D8E0E8"/>
+                      </a:solidFill>
+                      <a:prstDash val="solid"/>
+                      <a:round/>
+                      <a:headEnd type="none" w="med" len="med"/>
+                      <a:tailEnd type="none" w="med" len="med"/>
+                    </a:lnT>
+                    <a:lnB w="6350" cap="flat" cmpd="sng" algn="ctr">
+                      <a:solidFill>
+                        <a:srgbClr val="D8E0E8"/>
+                      </a:solidFill>
+                      <a:prstDash val="solid"/>
+                      <a:round/>
+                      <a:headEnd type="none" w="med" len="med"/>
+                      <a:tailEnd type="none" w="med" len="med"/>
+                    </a:lnB>
+                  </a:tcPr>
+                </a:tc>
+                <a:extLst>
+                  <a:ext uri="{0D108BD9-81ED-4DB2-BD59-A6C34878D82A}">
+                    <a16:rowId xmlns:a16="http://schemas.microsoft.com/office/drawing/2014/main" val="10003"/>
+                  </a:ext>
+                </a:extLst>
+              </a:tr>
+              <a:tr h="457200">
+                <a:tc>
+                  <a:txBody>
+                    <a:bodyPr/>
+                    <a:lstStyle/>
+                    <a:p>
+                      <a:pPr marL="0" indent="0" algn="l">
+                        <a:buNone/>
+                      </a:pPr>
+                      <a:r>
+                        <a:rPr lang="en-US" sz="1150" dirty="0">
+                          <a:solidFill>
+                            <a:srgbClr val="21295C"/>
+                          </a:solidFill>
+                          <a:latin typeface="Consolas" pitchFamily="34" charset="0"/>
+                          <a:ea typeface="Consolas" pitchFamily="34" charset="-122"/>
+                          <a:cs typeface="Consolas" pitchFamily="34" charset="-120"/>
+                        </a:rPr>
+                        <a:t>infeasible</a:t>
+                      </a:r>
+                      <a:endParaRPr lang="en-US" sz="1150" dirty="0">
+                        <a:latin typeface="Consolas" charset="0"/>
+                        <a:ea typeface="Consolas" charset="0"/>
+                        <a:cs typeface="Consolas" charset="0"/>
+                      </a:endParaRPr>
+                    </a:p>
+                  </a:txBody>
+                  <a:tcPr anchor="ctr">
+                    <a:lnL w="6350" cap="flat" cmpd="sng" algn="ctr">
+                      <a:solidFill>
+                        <a:srgbClr val="D8E0E8"/>
+                      </a:solidFill>
+                      <a:prstDash val="solid"/>
+                      <a:round/>
+                      <a:headEnd type="none" w="med" len="med"/>
+                      <a:tailEnd type="none" w="med" len="med"/>
+                    </a:lnL>
+                    <a:lnR w="6350" cap="flat" cmpd="sng" algn="ctr">
+                      <a:solidFill>
+                        <a:srgbClr val="D8E0E8"/>
+                      </a:solidFill>
+                      <a:prstDash val="solid"/>
+                      <a:round/>
+                      <a:headEnd type="none" w="med" len="med"/>
+                      <a:tailEnd type="none" w="med" len="med"/>
+                    </a:lnR>
+                    <a:lnT w="6350" cap="flat" cmpd="sng" algn="ctr">
+                      <a:solidFill>
+                        <a:srgbClr val="D8E0E8"/>
+                      </a:solidFill>
+                      <a:prstDash val="solid"/>
+                      <a:round/>
+                      <a:headEnd type="none" w="med" len="med"/>
+                      <a:tailEnd type="none" w="med" len="med"/>
+                    </a:lnT>
+                    <a:lnB w="6350" cap="flat" cmpd="sng" algn="ctr">
+                      <a:solidFill>
+                        <a:srgbClr val="D8E0E8"/>
+                      </a:solidFill>
+                      <a:prstDash val="solid"/>
+                      <a:round/>
+                      <a:headEnd type="none" w="med" len="med"/>
+                      <a:tailEnd type="none" w="med" len="med"/>
+                    </a:lnB>
+                  </a:tcPr>
+                </a:tc>
+                <a:tc>
+                  <a:txBody>
+                    <a:bodyPr/>
+                    <a:lstStyle/>
+                    <a:p>
+                      <a:pPr marL="0" indent="0" algn="ctr">
+                        <a:buNone/>
+                      </a:pPr>
+                      <a:r>
+                        <a:rPr lang="en-US" sz="1150" dirty="0">
+                          <a:solidFill>
+                            <a:srgbClr val="1A2233"/>
+                          </a:solidFill>
+                          <a:latin typeface="Calibri" pitchFamily="34" charset="0"/>
+                          <a:ea typeface="Calibri" pitchFamily="34" charset="-122"/>
+                          <a:cs typeface="Calibri" pitchFamily="34" charset="-120"/>
+                        </a:rPr>
+                        <a:t>fails at t=85</a:t>
+                      </a:r>
+                      <a:endParaRPr lang="en-US" sz="1150" dirty="0">
+                        <a:latin typeface="Calibri" charset="0"/>
+                        <a:ea typeface="Calibri" charset="0"/>
+                        <a:cs typeface="Calibri" charset="0"/>
+                      </a:endParaRPr>
+                    </a:p>
+                  </a:txBody>
+                  <a:tcPr anchor="ctr">
+                    <a:lnL w="6350" cap="flat" cmpd="sng" algn="ctr">
+                      <a:solidFill>
+                        <a:srgbClr val="D8E0E8"/>
+                      </a:solidFill>
+                      <a:prstDash val="solid"/>
+                      <a:round/>
+                      <a:headEnd type="none" w="med" len="med"/>
+                      <a:tailEnd type="none" w="med" len="med"/>
+                    </a:lnL>
+                    <a:lnR w="6350" cap="flat" cmpd="sng" algn="ctr">
+                      <a:solidFill>
+                        <a:srgbClr val="D8E0E8"/>
+                      </a:solidFill>
+                      <a:prstDash val="solid"/>
+                      <a:round/>
+                      <a:headEnd type="none" w="med" len="med"/>
+                      <a:tailEnd type="none" w="med" len="med"/>
+                    </a:lnR>
+                    <a:lnT w="6350" cap="flat" cmpd="sng" algn="ctr">
+                      <a:solidFill>
+                        <a:srgbClr val="D8E0E8"/>
+                      </a:solidFill>
+                      <a:prstDash val="solid"/>
+                      <a:round/>
+                      <a:headEnd type="none" w="med" len="med"/>
+                      <a:tailEnd type="none" w="med" len="med"/>
+                    </a:lnT>
+                    <a:lnB w="6350" cap="flat" cmpd="sng" algn="ctr">
+                      <a:solidFill>
+                        <a:srgbClr val="D8E0E8"/>
+                      </a:solidFill>
+                      <a:prstDash val="solid"/>
+                      <a:round/>
+                      <a:headEnd type="none" w="med" len="med"/>
+                      <a:tailEnd type="none" w="med" len="med"/>
+                    </a:lnB>
+                  </a:tcPr>
+                </a:tc>
+                <a:tc>
+                  <a:txBody>
+                    <a:bodyPr/>
+                    <a:lstStyle/>
+                    <a:p>
+                      <a:pPr marL="0" indent="0" algn="ctr">
+                        <a:buNone/>
+                      </a:pPr>
+                      <a:r>
+                        <a:rPr lang="en-US" sz="1150" b="1" dirty="0">
+                          <a:solidFill>
+                            <a:srgbClr val="C62828"/>
+                          </a:solidFill>
+                          <a:latin typeface="Calibri" pitchFamily="34" charset="0"/>
+                          <a:ea typeface="Calibri" pitchFamily="34" charset="-122"/>
+                          <a:cs typeface="Calibri" pitchFamily="34" charset="-120"/>
+                        </a:rPr>
+                        <a:t>fails at t=75</a:t>
+                      </a:r>
+                      <a:endParaRPr lang="en-US" sz="1150" dirty="0">
+                        <a:latin typeface="Calibri" charset="0"/>
+                        <a:ea typeface="Calibri" charset="0"/>
+                        <a:cs typeface="Calibri" charset="0"/>
+                      </a:endParaRPr>
+                    </a:p>
+                  </a:txBody>
+                  <a:tcPr anchor="ctr">
+                    <a:lnL w="6350" cap="flat" cmpd="sng" algn="ctr">
+                      <a:solidFill>
+                        <a:srgbClr val="D8E0E8"/>
+                      </a:solidFill>
+                      <a:prstDash val="solid"/>
+                      <a:round/>
+                      <a:headEnd type="none" w="med" len="med"/>
+                      <a:tailEnd type="none" w="med" len="med"/>
+                    </a:lnL>
+                    <a:lnR w="6350" cap="flat" cmpd="sng" algn="ctr">
+                      <a:solidFill>
+                        <a:srgbClr val="D8E0E8"/>
+                      </a:solidFill>
+                      <a:prstDash val="solid"/>
+                      <a:round/>
+                      <a:headEnd type="none" w="med" len="med"/>
+                      <a:tailEnd type="none" w="med" len="med"/>
+                    </a:lnR>
+                    <a:lnT w="6350" cap="flat" cmpd="sng" algn="ctr">
+                      <a:solidFill>
+                        <a:srgbClr val="D8E0E8"/>
+                      </a:solidFill>
+                      <a:prstDash val="solid"/>
+                      <a:round/>
+                      <a:headEnd type="none" w="med" len="med"/>
+                      <a:tailEnd type="none" w="med" len="med"/>
+                    </a:lnT>
+                    <a:lnB w="6350" cap="flat" cmpd="sng" algn="ctr">
+                      <a:solidFill>
+                        <a:srgbClr val="D8E0E8"/>
+                      </a:solidFill>
+                      <a:prstDash val="solid"/>
+                      <a:round/>
+                      <a:headEnd type="none" w="med" len="med"/>
+                      <a:tailEnd type="none" w="med" len="med"/>
+                    </a:lnB>
+                  </a:tcPr>
+                </a:tc>
+                <a:tc>
+                  <a:txBody>
+                    <a:bodyPr/>
+                    <a:lstStyle/>
+                    <a:p>
+                      <a:pPr marL="0" indent="0" algn="l">
+                        <a:buNone/>
+                      </a:pPr>
+                      <a:r>
+                        <a:rPr lang="en-US" sz="1150" dirty="0">
+                          <a:solidFill>
+                            <a:srgbClr val="1A2233"/>
+                          </a:solidFill>
+                          <a:latin typeface="Calibri" pitchFamily="34" charset="0"/>
+                          <a:ea typeface="Calibri" pitchFamily="34" charset="-122"/>
+                          <a:cs typeface="Calibri" pitchFamily="34" charset="-120"/>
+                        </a:rPr>
+                        <a:t>deadline bites sooner</a:t>
+                      </a:r>
+                      <a:endParaRPr lang="en-US" sz="1150" dirty="0">
+                        <a:latin typeface="Calibri" charset="0"/>
+                        <a:ea typeface="Calibri" charset="0"/>
+                        <a:cs typeface="Calibri" charset="0"/>
+                      </a:endParaRPr>
+                    </a:p>
+                  </a:txBody>
+                  <a:tcPr anchor="ctr">
+                    <a:lnL w="6350" cap="flat" cmpd="sng" algn="ctr">
+                      <a:solidFill>
+                        <a:srgbClr val="D8E0E8"/>
+                      </a:solidFill>
+                      <a:prstDash val="solid"/>
+                      <a:round/>
+                      <a:headEnd type="none" w="med" len="med"/>
+                      <a:tailEnd type="none" w="med" len="med"/>
+                    </a:lnL>
+                    <a:lnR w="6350" cap="flat" cmpd="sng" algn="ctr">
+                      <a:solidFill>
+                        <a:srgbClr val="D8E0E8"/>
+                      </a:solidFill>
+                      <a:prstDash val="solid"/>
+                      <a:round/>
+                      <a:headEnd type="none" w="med" len="med"/>
+                      <a:tailEnd type="none" w="med" len="med"/>
+                    </a:lnR>
+                    <a:lnT w="6350" cap="flat" cmpd="sng" algn="ctr">
+                      <a:solidFill>
+                        <a:srgbClr val="D8E0E8"/>
+                      </a:solidFill>
+                      <a:prstDash val="solid"/>
+                      <a:round/>
+                      <a:headEnd type="none" w="med" len="med"/>
+                      <a:tailEnd type="none" w="med" len="med"/>
+                    </a:lnT>
+                    <a:lnB w="6350" cap="flat" cmpd="sng" algn="ctr">
+                      <a:solidFill>
+                        <a:srgbClr val="D8E0E8"/>
+                      </a:solidFill>
+                      <a:prstDash val="solid"/>
+                      <a:round/>
+                      <a:headEnd type="none" w="med" len="med"/>
+                      <a:tailEnd type="none" w="med" len="med"/>
+                    </a:lnB>
+                  </a:tcPr>
+                </a:tc>
+                <a:extLst>
+                  <a:ext uri="{0D108BD9-81ED-4DB2-BD59-A6C34878D82A}">
+                    <a16:rowId xmlns:a16="http://schemas.microsoft.com/office/drawing/2014/main" val="10004"/>
+                  </a:ext>
+                </a:extLst>
+              </a:tr>
+            </a:tbl>
+          </a:graphicData>
+        </a:graphic>
+      </p:graphicFrame>
+      <p:sp>
+        <p:nvSpPr>
+          <p:cNvPr id="6" name="Text 3"/>
+          <p:cNvSpPr/>
+          <p:nvPr/>
+        </p:nvSpPr>
+        <p:spPr>
+          <a:xfrm>
+            <a:off x="7589520" y="1783080"/>
+            <a:ext cx="4023360" cy="320040"/>
+          </a:xfrm>
+          <a:prstGeom prst="rect">
+            <a:avLst/>
+          </a:prstGeom>
+          <a:noFill/>
+          <a:ln/>
+        </p:spPr>
+        <p:txBody>
+          <a:bodyPr wrap="square" lIns="0" tIns="0" rIns="0" bIns="0" rtlCol="0" anchor="ctr"/>
+          <a:lstStyle/>
+          <a:p>
+            <a:pPr marL="0" indent="0">
+              <a:buNone/>
+            </a:pPr>
+            <a:r>
+              <a:rPr lang="en-US" sz="1250" b="1" dirty="0">
+                <a:solidFill>
+                  <a:srgbClr val="065A82"/>
+                </a:solidFill>
+                <a:latin typeface="Trebuchet MS" pitchFamily="34" charset="0"/>
+                <a:ea typeface="Trebuchet MS" pitchFamily="34" charset="-122"/>
+                <a:cs typeface="Trebuchet MS" pitchFamily="34" charset="-120"/>
+              </a:rPr>
+              <a:t>Sample output — fastzone (t=64)</a:t>
+            </a:r>
+            <a:endParaRPr lang="en-US" sz="1250" dirty="0"/>
+          </a:p>
+        </p:txBody>
+      </p:sp>
+      <p:sp>
+        <p:nvSpPr>
+          <p:cNvPr id="7" name="Shape 4"/>
+          <p:cNvSpPr/>
+          <p:nvPr/>
+        </p:nvSpPr>
+        <p:spPr>
+          <a:xfrm>
+            <a:off x="7589520" y="2148840"/>
+            <a:ext cx="4041648" cy="2057400"/>
+          </a:xfrm>
+          <a:prstGeom prst="rect">
+            <a:avLst/>
+          </a:prstGeom>
+          <a:solidFill>
+            <a:srgbClr val="1B2540"/>
+          </a:solidFill>
+          <a:ln w="12700">
+            <a:solidFill>
+              <a:srgbClr val="E8A33D"/>
+            </a:solidFill>
+            <a:prstDash val="solid"/>
+          </a:ln>
+        </p:spPr>
+      </p:sp>
+      <p:sp>
+        <p:nvSpPr>
+          <p:cNvPr id="8" name="Text 5"/>
+          <p:cNvSpPr/>
+          <p:nvPr/>
+        </p:nvSpPr>
+        <p:spPr>
+          <a:xfrm>
+            <a:off x="7735824" y="2249424"/>
+            <a:ext cx="3749040" cy="1874520"/>
+          </a:xfrm>
+          <a:prstGeom prst="rect">
+            <a:avLst/>
+          </a:prstGeom>
+          <a:noFill/>
+          <a:ln/>
+        </p:spPr>
+        <p:txBody>
+          <a:bodyPr wrap="square" lIns="0" tIns="0" rIns="0" bIns="0" rtlCol="0" anchor="t"/>
+          <a:lstStyle/>
+          <a:p>
+            <a:pPr marL="0" indent="0">
+              <a:lnSpc>
+                <a:spcPct val="100000"/>
+              </a:lnSpc>
+              <a:buNone/>
+            </a:pPr>
+            <a:r>
+              <a:rPr lang="en-US" sz="1050" dirty="0">
+                <a:solidFill>
+                  <a:srgbClr val="DCE7F2"/>
+                </a:solidFill>
+                <a:latin typeface="Consolas" pitchFamily="34" charset="0"/>
+                <a:ea typeface="Consolas" pitchFamily="34" charset="-122"/>
+                <a:cs typeface="Consolas" pitchFamily="34" charset="-120"/>
+              </a:rPr>
+              <a:t>0:    (start-move A-&gt;B)</a:t>
+            </a:r>
+            <a:endParaRPr lang="en-US" sz="1050" dirty="0"/>
+          </a:p>
+          <a:p>
+            <a:pPr marL="0" indent="0">
+              <a:lnSpc>
+                <a:spcPct val="100000"/>
+              </a:lnSpc>
+              <a:buNone/>
+            </a:pPr>
+            <a:r>
+              <a:rPr lang="en-US" sz="1050" dirty="0">
+                <a:solidFill>
+                  <a:srgbClr val="9EB3C2"/>
+                </a:solidFill>
+                <a:latin typeface="Consolas" pitchFamily="34" charset="0"/>
+                <a:ea typeface="Consolas" pitchFamily="34" charset="-122"/>
+                <a:cs typeface="Consolas" pitchFamily="34" charset="-120"/>
+              </a:rPr>
+              <a:t>0:    --waiting-- [5.0]    ; travel</a:t>
+            </a:r>
+            <a:endParaRPr lang="en-US" sz="1050" dirty="0"/>
+          </a:p>
+          <a:p>
+            <a:pPr marL="0" indent="0">
+              <a:lnSpc>
+                <a:spcPct val="100000"/>
+              </a:lnSpc>
+              <a:buNone/>
+            </a:pPr>
+            <a:r>
+              <a:rPr lang="en-US" sz="1050" dirty="0">
+                <a:solidFill>
+                  <a:srgbClr val="DCE7F2"/>
+                </a:solidFill>
+                <a:latin typeface="Consolas" pitchFamily="34" charset="0"/>
+                <a:ea typeface="Consolas" pitchFamily="34" charset="-122"/>
+                <a:cs typeface="Consolas" pitchFamily="34" charset="-120"/>
+              </a:rPr>
+              <a:t>5.0:  (start-move B-&gt;C)</a:t>
+            </a:r>
+            <a:endParaRPr lang="en-US" sz="1050" dirty="0"/>
+          </a:p>
+          <a:p>
+            <a:pPr marL="0" indent="0">
+              <a:lnSpc>
+                <a:spcPct val="100000"/>
+              </a:lnSpc>
+              <a:buNone/>
+            </a:pPr>
+            <a:r>
+              <a:rPr lang="en-US" sz="1050" dirty="0">
+                <a:solidFill>
+                  <a:srgbClr val="9EB3C2"/>
+                </a:solidFill>
+                <a:latin typeface="Consolas" pitchFamily="34" charset="0"/>
+                <a:ea typeface="Consolas" pitchFamily="34" charset="-122"/>
+                <a:cs typeface="Consolas" pitchFamily="34" charset="-120"/>
+              </a:rPr>
+              <a:t>5.0:  --waiting-- [30.0]   ; travel</a:t>
+            </a:r>
+            <a:endParaRPr lang="en-US" sz="1050" dirty="0"/>
+          </a:p>
+          <a:p>
+            <a:pPr marL="0" indent="0">
+              <a:lnSpc>
+                <a:spcPct val="100000"/>
+              </a:lnSpc>
+              <a:buNone/>
+            </a:pPr>
+            <a:r>
+              <a:rPr lang="en-US" sz="1050" dirty="0">
+                <a:solidFill>
+                  <a:srgbClr val="9EB3C2"/>
+                </a:solidFill>
+                <a:latin typeface="Consolas" pitchFamily="34" charset="0"/>
+                <a:ea typeface="Consolas" pitchFamily="34" charset="-122"/>
+                <a:cs typeface="Consolas" pitchFamily="34" charset="-120"/>
+              </a:rPr>
+              <a:t>                           +charge C</a:t>
+            </a:r>
+            <a:endParaRPr lang="en-US" sz="1050" dirty="0"/>
+          </a:p>
+          <a:p>
+            <a:pPr marL="0" indent="0">
+              <a:lnSpc>
+                <a:spcPct val="100000"/>
+              </a:lnSpc>
+              <a:buNone/>
+            </a:pPr>
+            <a:r>
+              <a:rPr lang="en-US" sz="1050" dirty="0">
+                <a:solidFill>
+                  <a:srgbClr val="DCE7F2"/>
+                </a:solidFill>
+                <a:latin typeface="Consolas" pitchFamily="34" charset="0"/>
+                <a:ea typeface="Consolas" pitchFamily="34" charset="-122"/>
+                <a:cs typeface="Consolas" pitchFamily="34" charset="-120"/>
+              </a:rPr>
+              <a:t>30.0: (start-move C-&gt;D)</a:t>
+            </a:r>
+            <a:endParaRPr lang="en-US" sz="1050" dirty="0"/>
+          </a:p>
+          <a:p>
+            <a:pPr marL="0" indent="0">
+              <a:lnSpc>
+                <a:spcPct val="100000"/>
+              </a:lnSpc>
+              <a:buNone/>
+            </a:pPr>
+            <a:r>
+              <a:rPr lang="en-US" sz="1050" dirty="0">
+                <a:solidFill>
+                  <a:srgbClr val="9EB3C2"/>
+                </a:solidFill>
+                <a:latin typeface="Consolas" pitchFamily="34" charset="0"/>
+                <a:ea typeface="Consolas" pitchFamily="34" charset="-122"/>
+                <a:cs typeface="Consolas" pitchFamily="34" charset="-120"/>
+              </a:rPr>
+              <a:t>      arrives D at t=35 (&lt; deadline)</a:t>
+            </a:r>
+            <a:endParaRPr lang="en-US" sz="1050" dirty="0"/>
+          </a:p>
+        </p:txBody>
+      </p:sp>
+      <p:sp>
+        <p:nvSpPr>
+          <p:cNvPr id="9" name="Shape 6"/>
+          <p:cNvSpPr/>
+          <p:nvPr/>
+        </p:nvSpPr>
+        <p:spPr>
+          <a:xfrm>
+            <a:off x="548640" y="4526280"/>
+            <a:ext cx="11082528" cy="1508760"/>
+          </a:xfrm>
+          <a:prstGeom prst="rect">
+            <a:avLst/>
+          </a:prstGeom>
+          <a:solidFill>
+            <a:srgbClr val="21295C"/>
+          </a:solidFill>
+          <a:ln w="12700">
+            <a:solidFill>
+              <a:srgbClr val="D8E0E8"/>
+            </a:solidFill>
+            <a:prstDash val="solid"/>
+          </a:ln>
+          <a:effectLst>
+            <a:outerShdw blurRad="63500" dist="25400" dir="8100000" algn="bl" rotWithShape="0">
+              <a:srgbClr val="000000">
+                <a:alpha val="10000"/>
+              </a:srgbClr>
+            </a:outerShdw>
+          </a:effectLst>
+        </p:spPr>
+      </p:sp>
+      <p:sp>
+        <p:nvSpPr>
+          <p:cNvPr id="10" name="Text 7"/>
+          <p:cNvSpPr/>
+          <p:nvPr/>
+        </p:nvSpPr>
+        <p:spPr>
+          <a:xfrm>
+            <a:off x="777240" y="4636008"/>
+            <a:ext cx="5486400" cy="365760"/>
+          </a:xfrm>
+          <a:prstGeom prst="rect">
+            <a:avLst/>
+          </a:prstGeom>
+          <a:noFill/>
+          <a:ln/>
+        </p:spPr>
+        <p:txBody>
+          <a:bodyPr wrap="square" lIns="0" tIns="0" rIns="0" bIns="0" rtlCol="0" anchor="ctr"/>
+          <a:lstStyle/>
+          <a:p>
+            <a:pPr marL="0" indent="0">
+              <a:buNone/>
+            </a:pPr>
+            <a:r>
+              <a:rPr lang="en-US" sz="1400" b="1" dirty="0">
+                <a:solidFill>
+                  <a:srgbClr val="E8A33D"/>
+                </a:solidFill>
+                <a:latin typeface="Trebuchet MS" pitchFamily="34" charset="0"/>
+                <a:ea typeface="Trebuchet MS" pitchFamily="34" charset="-122"/>
+                <a:cs typeface="Trebuchet MS" pitchFamily="34" charset="-120"/>
+              </a:rPr>
+              <a:t>The takeaway</a:t>
+            </a:r>
+            <a:endParaRPr lang="en-US" sz="1400" dirty="0"/>
+          </a:p>
+        </p:txBody>
+      </p:sp>
+      <p:sp>
+        <p:nvSpPr>
+          <p:cNvPr id="11" name="Text 8"/>
+          <p:cNvSpPr/>
+          <p:nvPr/>
+        </p:nvSpPr>
+        <p:spPr>
+          <a:xfrm>
+            <a:off x="777240" y="5029200"/>
+            <a:ext cx="10607040" cy="960120"/>
+          </a:xfrm>
+          <a:prstGeom prst="rect">
+            <a:avLst/>
+          </a:prstGeom>
+          <a:noFill/>
+          <a:ln/>
+        </p:spPr>
+        <p:txBody>
+          <a:bodyPr wrap="square" lIns="0" tIns="0" rIns="0" bIns="0" rtlCol="0" anchor="t"/>
+          <a:lstStyle/>
+          <a:p>
+            <a:pPr marL="0" indent="0">
+              <a:buNone/>
+            </a:pPr>
+            <a:r>
+              <a:rPr lang="en-US" sz="1300" dirty="0">
+                <a:solidFill>
+                  <a:srgbClr val="9EB3C2"/>
+                </a:solidFill>
+                <a:latin typeface="Calibri" pitchFamily="34" charset="0"/>
+                <a:ea typeface="Calibri" pitchFamily="34" charset="-122"/>
+                <a:cs typeface="Calibri" pitchFamily="34" charset="-120"/>
+              </a:rPr>
+              <a:t>Adding travel time </a:t>
+            </a:r>
+            <a:r>
+              <a:rPr lang="en-US" sz="1300" b="1" dirty="0">
+                <a:solidFill>
+                  <a:srgbClr val="FFFFFF"/>
+                </a:solidFill>
+                <a:latin typeface="Calibri" pitchFamily="34" charset="0"/>
+                <a:ea typeface="Calibri" pitchFamily="34" charset="-122"/>
+                <a:cs typeface="Calibri" pitchFamily="34" charset="-120"/>
+              </a:rPr>
+              <a:t>shifts every feasibility boundary earlier</a:t>
+            </a:r>
+            <a:r>
+              <a:rPr lang="en-US" sz="1300" dirty="0">
+                <a:solidFill>
+                  <a:srgbClr val="9EB3C2"/>
+                </a:solidFill>
+                <a:latin typeface="Calibri" pitchFamily="34" charset="0"/>
+                <a:ea typeface="Calibri" pitchFamily="34" charset="-122"/>
+                <a:cs typeface="Calibri" pitchFamily="34" charset="-120"/>
+              </a:rPr>
+              <a:t> — the rover has less daylight to spare because moving itself consumes the day. The </a:t>
+            </a:r>
+            <a:r>
+              <a:rPr lang="en-US" sz="1300" b="1" dirty="0">
+                <a:solidFill>
+                  <a:srgbClr val="FFFFFF"/>
+                </a:solidFill>
+                <a:latin typeface="Calibri" pitchFamily="34" charset="0"/>
+                <a:ea typeface="Calibri" pitchFamily="34" charset="-122"/>
+                <a:cs typeface="Calibri" pitchFamily="34" charset="-120"/>
+              </a:rPr>
+              <a:t>lesson is unchanged</a:t>
+            </a:r>
+            <a:r>
+              <a:rPr lang="en-US" sz="1300" dirty="0">
+                <a:solidFill>
+                  <a:srgbClr val="9EB3C2"/>
+                </a:solidFill>
+                <a:latin typeface="Calibri" pitchFamily="34" charset="0"/>
+                <a:ea typeface="Calibri" pitchFamily="34" charset="-122"/>
+                <a:cs typeface="Calibri" pitchFamily="34" charset="-120"/>
+              </a:rPr>
+              <a:t> (timing drives feasibility); the numbers simply tighten. Note: ENHSP supports processes/events, not </a:t>
+            </a:r>
+            <a:r>
+              <a:rPr lang="en-US" sz="1300" dirty="0">
+                <a:solidFill>
+                  <a:srgbClr val="FFFFFF"/>
+                </a:solidFill>
+                <a:latin typeface="Consolas" pitchFamily="34" charset="0"/>
+                <a:ea typeface="Consolas" pitchFamily="34" charset="-122"/>
+                <a:cs typeface="Consolas" pitchFamily="34" charset="-120"/>
+              </a:rPr>
+              <a:t>:durative-action</a:t>
+            </a:r>
+            <a:r>
+              <a:rPr lang="en-US" sz="1300" dirty="0">
+                <a:solidFill>
+                  <a:srgbClr val="9EB3C2"/>
+                </a:solidFill>
+                <a:latin typeface="Calibri" pitchFamily="34" charset="0"/>
+                <a:ea typeface="Calibri" pitchFamily="34" charset="-122"/>
+                <a:cs typeface="Calibri" pitchFamily="34" charset="-120"/>
+              </a:rPr>
+              <a:t> — so duration is modelled with a timer process + arrival event.</a:t>
+            </a:r>
+            <a:endParaRPr lang="en-US" sz="1300" dirty="0"/>
+          </a:p>
+        </p:txBody>
+      </p:sp>
+    </p:spTree>
+  </p:cSld>
+  <p:clrMapOvr>
+    <a:masterClrMapping/>
+  </p:clrMapOvr>
+</p:sld>
+</file>
+
+<file path=ppt/slides/slide14.xml><?xml version="1.0" encoding="utf-8"?>
+<p:sld xmlns:a="http://schemas.openxmlformats.org/drawingml/2006/main" xmlns:r="http://schemas.openxmlformats.org/officeDocument/2006/relationships" xmlns:p="http://schemas.openxmlformats.org/presentationml/2006/main">
+  <p:cSld name="Slide 14">
+    <p:bg>
+      <p:bgPr>
+        <a:solidFill>
+          <a:srgbClr val="21295C"/>
+        </a:solidFill>
+        <a:effectLst/>
+      </p:bgPr>
+    </p:bg>
+    <p:spTree>
+      <p:nvGrpSpPr>
+        <p:cNvPr id="1" name=""/>
+        <p:cNvGrpSpPr/>
+        <p:nvPr/>
+      </p:nvGrpSpPr>
+      <p:grpSpPr>
+        <a:xfrm>
+          <a:off x="0" y="0"/>
+          <a:ext cx="0" cy="0"/>
+          <a:chOff x="0" y="0"/>
+          <a:chExt cx="0" cy="0"/>
+        </a:xfrm>
+      </p:grpSpPr>
+      <p:sp>
+        <p:nvSpPr>
           <p:cNvPr id="2" name="Shape 0"/>
           <p:cNvSpPr/>
           <p:nvPr/>
@@ -4781,11 +6614,11 @@
           <a:bodyPr wrap="square" lIns="0" tIns="0" rIns="0" bIns="0" rtlCol="0" anchor="ctr"/>
           <a:lstStyle/>
           <a:p>
-            <a:pPr indent="0" marL="0">
-              <a:buNone/>
-            </a:pPr>
-            <a:r>
-              <a:rPr lang="en-US" sz="1300" b="1" spc="400" kern="0" dirty="0">
+            <a:pPr marL="0" indent="0">
+              <a:buNone/>
+            </a:pPr>
+            <a:r>
+              <a:rPr lang="en-US" sz="1300" b="1" kern="0" spc="400" dirty="0">
                 <a:solidFill>
                   <a:srgbClr val="1C7293"/>
                 </a:solidFill>
@@ -4820,7 +6653,7 @@
           <a:bodyPr wrap="square" lIns="0" tIns="0" rIns="0" bIns="0" rtlCol="0" anchor="ctr"/>
           <a:lstStyle/>
           <a:p>
-            <a:pPr indent="0" marL="0">
+            <a:pPr marL="0" indent="0">
               <a:buNone/>
             </a:pPr>
             <a:r>
@@ -4859,7 +6692,7 @@
           <a:bodyPr wrap="square" lIns="0" tIns="0" rIns="0" bIns="0" rtlCol="0" anchor="t"/>
           <a:lstStyle/>
           <a:p>
-            <a:pPr indent="0" marL="0">
+            <a:pPr marL="0" indent="0">
               <a:buNone/>
             </a:pPr>
             <a:r>
@@ -4873,9 +6706,6 @@
               </a:rPr>
               <a:t>Q1</a:t>
             </a:r>
-            <a:pPr indent="0" marL="0">
-              <a:buNone/>
-            </a:pPr>
             <a:r>
               <a:rPr lang="en-US" sz="1600" dirty="0">
                 <a:solidFill>
@@ -4912,7 +6742,7 @@
           <a:bodyPr wrap="square" lIns="0" tIns="0" rIns="0" bIns="0" rtlCol="0" anchor="t"/>
           <a:lstStyle/>
           <a:p>
-            <a:pPr indent="0" marL="0">
+            <a:pPr marL="0" indent="0">
               <a:buNone/>
             </a:pPr>
             <a:r>
@@ -4926,9 +6756,6 @@
               </a:rPr>
               <a:t>Q2</a:t>
             </a:r>
-            <a:pPr indent="0" marL="0">
-              <a:buNone/>
-            </a:pPr>
             <a:r>
               <a:rPr lang="en-US" sz="1600" dirty="0">
                 <a:solidFill>
@@ -4965,7 +6792,7 @@
           <a:bodyPr wrap="square" lIns="0" tIns="0" rIns="0" bIns="0" rtlCol="0" anchor="ctr"/>
           <a:lstStyle/>
           <a:p>
-            <a:pPr indent="0" marL="0">
+            <a:pPr marL="0" indent="0">
               <a:buNone/>
             </a:pPr>
             <a:r>
@@ -5020,7 +6847,7 @@
                 <a:ea typeface="Calibri" pitchFamily="34" charset="-122"/>
                 <a:cs typeface="Calibri" pitchFamily="34" charset="-120"/>
               </a:rPr>
-              <a:t>Instantaneous moves (no travel time) — could be a durative-action.</a:t>
+              <a:t>Travel time addressed in the optional durative extension (timer process + arrival event).</a:t>
             </a:r>
             <a:endParaRPr lang="en-US" sz="1500" dirty="0"/>
           </a:p>
@@ -5062,7 +6889,7 @@
                 <a:ea typeface="Calibri" pitchFamily="34" charset="-122"/>
                 <a:cs typeface="Calibri" pitchFamily="34" charset="-120"/>
               </a:rPr>
-              <a:t>Single agent, deterministic world.</a:t>
+              <a:t>Single agent, deterministic world (no probabilistic uncertainty).</a:t>
             </a:r>
             <a:endParaRPr lang="en-US" sz="1500" dirty="0"/>
           </a:p>
@@ -5089,7 +6916,7 @@
           <a:bodyPr wrap="square" lIns="0" tIns="0" rIns="0" bIns="0" rtlCol="0" anchor="ctr"/>
           <a:lstStyle/>
           <a:p>
-            <a:pPr indent="0" marL="0">
+            <a:pPr marL="0" indent="0">
               <a:buNone/>
             </a:pPr>
             <a:r>
@@ -5123,6 +6950,7 @@
         <a:solidFill>
           <a:srgbClr val="F4F7FA"/>
         </a:solidFill>
+        <a:effectLst/>
       </p:bgPr>
     </p:bg>
     <p:spTree>
@@ -5160,11 +6988,11 @@
           <a:bodyPr wrap="square" lIns="0" tIns="0" rIns="0" bIns="0" rtlCol="0" anchor="ctr"/>
           <a:lstStyle/>
           <a:p>
-            <a:pPr indent="0" marL="0">
-              <a:buNone/>
-            </a:pPr>
-            <a:r>
-              <a:rPr lang="en-US" sz="1200" b="1" spc="300" kern="0" dirty="0">
+            <a:pPr marL="0" indent="0">
+              <a:buNone/>
+            </a:pPr>
+            <a:r>
+              <a:rPr lang="en-US" sz="1200" b="1" kern="0" spc="300" dirty="0">
                 <a:solidFill>
                   <a:srgbClr val="1C7293"/>
                 </a:solidFill>
@@ -5199,7 +7027,7 @@
           <a:bodyPr wrap="square" lIns="0" tIns="0" rIns="0" bIns="0" rtlCol="0" anchor="ctr"/>
           <a:lstStyle/>
           <a:p>
-            <a:pPr indent="0" marL="0">
+            <a:pPr marL="0" indent="0">
               <a:buNone/>
             </a:pPr>
             <a:r>
@@ -5241,7 +7069,7 @@
             <a:prstDash val="solid"/>
           </a:ln>
           <a:effectLst>
-            <a:outerShdw sx="100000" sy="100000" kx="0" ky="0" algn="bl" rotWithShape="0" blurRad="63500" dist="25400" dir="8100000">
+            <a:outerShdw blurRad="63500" dist="25400" dir="8100000" algn="bl" rotWithShape="0">
               <a:srgbClr val="000000">
                 <a:alpha val="10000"/>
               </a:srgbClr>
@@ -5270,7 +7098,7 @@
           <a:bodyPr wrap="square" lIns="0" tIns="0" rIns="0" bIns="0" rtlCol="0" anchor="ctr"/>
           <a:lstStyle/>
           <a:p>
-            <a:pPr indent="0" marL="0">
+            <a:pPr marL="0" indent="0">
               <a:buNone/>
             </a:pPr>
             <a:r>
@@ -5439,7 +7267,7 @@
             <a:prstDash val="solid"/>
           </a:ln>
           <a:effectLst>
-            <a:outerShdw sx="100000" sy="100000" kx="0" ky="0" algn="bl" rotWithShape="0" blurRad="63500" dist="25400" dir="8100000">
+            <a:outerShdw blurRad="63500" dist="25400" dir="8100000" algn="bl" rotWithShape="0">
               <a:srgbClr val="000000">
                 <a:alpha val="10000"/>
               </a:srgbClr>
@@ -5468,7 +7296,7 @@
           <a:bodyPr wrap="square" lIns="0" tIns="0" rIns="0" bIns="0" rtlCol="0" anchor="ctr"/>
           <a:lstStyle/>
           <a:p>
-            <a:pPr indent="0" marL="0">
+            <a:pPr marL="0" indent="0">
               <a:buNone/>
             </a:pPr>
             <a:r>
@@ -5507,7 +7335,7 @@
           <a:bodyPr wrap="square" lIns="0" tIns="0" rIns="0" bIns="0" rtlCol="0" anchor="ctr"/>
           <a:lstStyle/>
           <a:p>
-            <a:pPr indent="0" marL="0">
+            <a:pPr marL="0" indent="0">
               <a:buNone/>
             </a:pPr>
             <a:r>
@@ -5521,9 +7349,6 @@
               </a:rPr>
               <a:t>Exploration  </a:t>
             </a:r>
-            <a:pPr indent="0" marL="0">
-              <a:buNone/>
-            </a:pPr>
             <a:r>
               <a:rPr lang="en-US" sz="1800" i="1" dirty="0">
                 <a:solidFill>
@@ -5535,9 +7360,6 @@
               </a:rPr>
               <a:t>vs  </a:t>
             </a:r>
-            <a:pPr indent="0" marL="0">
-              <a:buNone/>
-            </a:pPr>
             <a:r>
               <a:rPr lang="en-US" sz="1800" b="1" dirty="0">
                 <a:solidFill>
@@ -5574,7 +7396,7 @@
           <a:bodyPr wrap="square" lIns="0" tIns="0" rIns="0" bIns="0" rtlCol="0" anchor="ctr"/>
           <a:lstStyle/>
           <a:p>
-            <a:pPr indent="0" marL="0">
+            <a:pPr marL="0" indent="0">
               <a:buNone/>
             </a:pPr>
             <a:r>
@@ -5616,7 +7438,7 @@
             <a:prstDash val="solid"/>
           </a:ln>
           <a:effectLst>
-            <a:outerShdw sx="100000" sy="100000" kx="0" ky="0" algn="bl" rotWithShape="0" blurRad="63500" dist="25400" dir="8100000">
+            <a:outerShdw blurRad="63500" dist="25400" dir="8100000" algn="bl" rotWithShape="0">
               <a:srgbClr val="000000">
                 <a:alpha val="10000"/>
               </a:srgbClr>
@@ -5645,7 +7467,7 @@
           <a:bodyPr wrap="square" lIns="0" tIns="0" rIns="0" bIns="0" rtlCol="0" anchor="ctr"/>
           <a:lstStyle/>
           <a:p>
-            <a:pPr indent="0" marL="0">
+            <a:pPr marL="0" indent="0">
               <a:buNone/>
             </a:pPr>
             <a:r>
@@ -5743,6 +7565,7 @@
         <a:solidFill>
           <a:srgbClr val="F4F7FA"/>
         </a:solidFill>
+        <a:effectLst/>
       </p:bgPr>
     </p:bg>
     <p:spTree>
@@ -5780,11 +7603,11 @@
           <a:bodyPr wrap="square" lIns="0" tIns="0" rIns="0" bIns="0" rtlCol="0" anchor="ctr"/>
           <a:lstStyle/>
           <a:p>
-            <a:pPr indent="0" marL="0">
-              <a:buNone/>
-            </a:pPr>
-            <a:r>
-              <a:rPr lang="en-US" sz="1200" b="1" spc="300" kern="0" dirty="0">
+            <a:pPr marL="0" indent="0">
+              <a:buNone/>
+            </a:pPr>
+            <a:r>
+              <a:rPr lang="en-US" sz="1200" b="1" kern="0" spc="300" dirty="0">
                 <a:solidFill>
                   <a:srgbClr val="1C7293"/>
                 </a:solidFill>
@@ -5819,7 +7642,7 @@
           <a:bodyPr wrap="square" lIns="0" tIns="0" rIns="0" bIns="0" rtlCol="0" anchor="ctr"/>
           <a:lstStyle/>
           <a:p>
-            <a:pPr indent="0" marL="0">
+            <a:pPr marL="0" indent="0">
               <a:buNone/>
             </a:pPr>
             <a:r>
@@ -5858,7 +7681,7 @@
           <a:bodyPr wrap="square" lIns="0" tIns="0" rIns="0" bIns="0" rtlCol="0" anchor="ctr"/>
           <a:lstStyle/>
           <a:p>
-            <a:pPr indent="0" marL="0">
+            <a:pPr marL="0" indent="0">
               <a:buNone/>
             </a:pPr>
             <a:r>
@@ -5900,7 +7723,7 @@
             <a:prstDash val="solid"/>
           </a:ln>
           <a:effectLst>
-            <a:outerShdw sx="100000" sy="100000" kx="0" ky="0" algn="bl" rotWithShape="0" blurRad="63500" dist="25400" dir="8100000">
+            <a:outerShdw blurRad="63500" dist="25400" dir="8100000" algn="bl" rotWithShape="0">
               <a:srgbClr val="000000">
                 <a:alpha val="10000"/>
               </a:srgbClr>
@@ -5949,7 +7772,7 @@
           <a:bodyPr wrap="square" lIns="0" tIns="0" rIns="0" bIns="0" rtlCol="0" anchor="ctr"/>
           <a:lstStyle/>
           <a:p>
-            <a:pPr indent="0" marL="0">
+            <a:pPr marL="0" indent="0">
               <a:buNone/>
             </a:pPr>
             <a:r>
@@ -5988,7 +7811,7 @@
           <a:bodyPr wrap="square" lIns="0" tIns="0" rIns="0" bIns="0" rtlCol="0" anchor="t"/>
           <a:lstStyle/>
           <a:p>
-            <a:pPr indent="0" marL="0">
+            <a:pPr marL="0" indent="0">
               <a:spcAft>
                 <a:spcPts val="600"/>
               </a:spcAft>
@@ -6008,7 +7831,7 @@
             <a:endParaRPr lang="en-US" sz="1250" dirty="0"/>
           </a:p>
           <a:p>
-            <a:pPr indent="0" marL="0">
+            <a:pPr marL="0" indent="0">
               <a:spcAft>
                 <a:spcPts val="600"/>
               </a:spcAft>
@@ -6028,7 +7851,7 @@
             <a:endParaRPr lang="en-US" sz="1250" dirty="0"/>
           </a:p>
           <a:p>
-            <a:pPr indent="0" marL="0">
+            <a:pPr marL="0" indent="0">
               <a:spcAft>
                 <a:spcPts val="600"/>
               </a:spcAft>
@@ -6037,7 +7860,7 @@
             <a:endParaRPr lang="en-US" sz="1250" dirty="0"/>
           </a:p>
           <a:p>
-            <a:pPr indent="0" marL="0">
+            <a:pPr marL="0" indent="0">
               <a:spcAft>
                 <a:spcPts val="600"/>
               </a:spcAft>
@@ -6057,7 +7880,7 @@
             <a:endParaRPr lang="en-US" sz="1250" dirty="0"/>
           </a:p>
           <a:p>
-            <a:pPr indent="0" marL="0">
+            <a:pPr marL="0" indent="0">
               <a:spcAft>
                 <a:spcPts val="600"/>
               </a:spcAft>
@@ -6102,7 +7925,7 @@
             <a:prstDash val="solid"/>
           </a:ln>
           <a:effectLst>
-            <a:outerShdw sx="100000" sy="100000" kx="0" ky="0" algn="bl" rotWithShape="0" blurRad="63500" dist="25400" dir="8100000">
+            <a:outerShdw blurRad="63500" dist="25400" dir="8100000" algn="bl" rotWithShape="0">
               <a:srgbClr val="000000">
                 <a:alpha val="10000"/>
               </a:srgbClr>
@@ -6151,7 +7974,7 @@
           <a:bodyPr wrap="square" lIns="0" tIns="0" rIns="0" bIns="0" rtlCol="0" anchor="ctr"/>
           <a:lstStyle/>
           <a:p>
-            <a:pPr indent="0" marL="0">
+            <a:pPr marL="0" indent="0">
               <a:buNone/>
             </a:pPr>
             <a:r>
@@ -6190,7 +8013,7 @@
           <a:bodyPr wrap="square" lIns="0" tIns="0" rIns="0" bIns="0" rtlCol="0" anchor="t"/>
           <a:lstStyle/>
           <a:p>
-            <a:pPr indent="0" marL="0">
+            <a:pPr marL="0" indent="0">
               <a:spcAft>
                 <a:spcPts val="600"/>
               </a:spcAft>
@@ -6210,7 +8033,7 @@
             <a:endParaRPr lang="en-US" sz="1250" dirty="0"/>
           </a:p>
           <a:p>
-            <a:pPr indent="0" marL="0">
+            <a:pPr marL="0" indent="0">
               <a:spcAft>
                 <a:spcPts val="600"/>
               </a:spcAft>
@@ -6230,7 +8053,7 @@
             <a:endParaRPr lang="en-US" sz="1250" dirty="0"/>
           </a:p>
           <a:p>
-            <a:pPr indent="0" marL="0">
+            <a:pPr marL="0" indent="0">
               <a:spcAft>
                 <a:spcPts val="600"/>
               </a:spcAft>
@@ -6250,7 +8073,7 @@
             <a:endParaRPr lang="en-US" sz="1250" dirty="0"/>
           </a:p>
           <a:p>
-            <a:pPr indent="0" marL="0">
+            <a:pPr marL="0" indent="0">
               <a:spcAft>
                 <a:spcPts val="600"/>
               </a:spcAft>
@@ -6270,7 +8093,7 @@
             <a:endParaRPr lang="en-US" sz="1250" dirty="0"/>
           </a:p>
           <a:p>
-            <a:pPr indent="0" marL="0">
+            <a:pPr marL="0" indent="0">
               <a:spcAft>
                 <a:spcPts val="600"/>
               </a:spcAft>
@@ -6315,7 +8138,7 @@
             <a:prstDash val="solid"/>
           </a:ln>
           <a:effectLst>
-            <a:outerShdw sx="100000" sy="100000" kx="0" ky="0" algn="bl" rotWithShape="0" blurRad="63500" dist="25400" dir="8100000">
+            <a:outerShdw blurRad="63500" dist="25400" dir="8100000" algn="bl" rotWithShape="0">
               <a:srgbClr val="000000">
                 <a:alpha val="10000"/>
               </a:srgbClr>
@@ -6364,7 +8187,7 @@
           <a:bodyPr wrap="square" lIns="0" tIns="0" rIns="0" bIns="0" rtlCol="0" anchor="ctr"/>
           <a:lstStyle/>
           <a:p>
-            <a:pPr indent="0" marL="0">
+            <a:pPr marL="0" indent="0">
               <a:buNone/>
             </a:pPr>
             <a:r>
@@ -6403,7 +8226,7 @@
           <a:bodyPr wrap="square" lIns="0" tIns="0" rIns="0" bIns="0" rtlCol="0" anchor="t"/>
           <a:lstStyle/>
           <a:p>
-            <a:pPr indent="0" marL="0">
+            <a:pPr marL="0" indent="0">
               <a:spcAft>
                 <a:spcPts val="600"/>
               </a:spcAft>
@@ -6423,7 +8246,7 @@
             <a:endParaRPr lang="en-US" sz="1250" dirty="0"/>
           </a:p>
           <a:p>
-            <a:pPr indent="0" marL="0">
+            <a:pPr marL="0" indent="0">
               <a:spcAft>
                 <a:spcPts val="600"/>
               </a:spcAft>
@@ -6443,7 +8266,7 @@
             <a:endParaRPr lang="en-US" sz="1250" dirty="0"/>
           </a:p>
           <a:p>
-            <a:pPr indent="0" marL="0">
+            <a:pPr marL="0" indent="0">
               <a:spcAft>
                 <a:spcPts val="600"/>
               </a:spcAft>
@@ -6463,7 +8286,7 @@
             <a:endParaRPr lang="en-US" sz="1250" dirty="0"/>
           </a:p>
           <a:p>
-            <a:pPr indent="0" marL="0">
+            <a:pPr marL="0" indent="0">
               <a:spcAft>
                 <a:spcPts val="600"/>
               </a:spcAft>
@@ -6483,7 +8306,7 @@
             <a:endParaRPr lang="en-US" sz="1250" dirty="0"/>
           </a:p>
           <a:p>
-            <a:pPr indent="0" marL="0">
+            <a:pPr marL="0" indent="0">
               <a:spcAft>
                 <a:spcPts val="600"/>
               </a:spcAft>
@@ -6528,7 +8351,7 @@
             <a:prstDash val="solid"/>
           </a:ln>
           <a:effectLst>
-            <a:outerShdw sx="100000" sy="100000" kx="0" ky="0" algn="bl" rotWithShape="0" blurRad="63500" dist="25400" dir="8100000">
+            <a:outerShdw blurRad="63500" dist="25400" dir="8100000" algn="bl" rotWithShape="0">
               <a:srgbClr val="000000">
                 <a:alpha val="10000"/>
               </a:srgbClr>
@@ -6557,7 +8380,7 @@
           <a:bodyPr wrap="square" lIns="0" tIns="0" rIns="0" bIns="0" rtlCol="0" anchor="ctr"/>
           <a:lstStyle/>
           <a:p>
-            <a:pPr indent="0" marL="0">
+            <a:pPr marL="0" indent="0">
               <a:buNone/>
             </a:pPr>
             <a:r>
@@ -6596,7 +8419,7 @@
           <a:bodyPr wrap="square" lIns="0" tIns="0" rIns="0" bIns="0" rtlCol="0" anchor="t"/>
           <a:lstStyle/>
           <a:p>
-            <a:pPr indent="0" marL="0">
+            <a:pPr marL="0" indent="0">
               <a:buNone/>
             </a:pPr>
             <a:r>
@@ -6610,9 +8433,6 @@
               </a:rPr>
               <a:t>move-cost</a:t>
             </a:r>
-            <a:pPr indent="0" marL="0">
-              <a:buNone/>
-            </a:pPr>
             <a:r>
               <a:rPr lang="en-US" sz="1350" dirty="0">
                 <a:solidFill>
@@ -6624,9 +8444,6 @@
               </a:rPr>
               <a:t> (consumption) vs </a:t>
             </a:r>
-            <a:pPr indent="0" marL="0">
-              <a:buNone/>
-            </a:pPr>
             <a:r>
               <a:rPr lang="en-US" sz="1350" b="1" dirty="0">
                 <a:solidFill>
@@ -6638,9 +8455,6 @@
               </a:rPr>
               <a:t>charge-rate</a:t>
             </a:r>
-            <a:pPr indent="0" marL="0">
-              <a:buNone/>
-            </a:pPr>
             <a:r>
               <a:rPr lang="en-US" sz="1350" dirty="0">
                 <a:solidFill>
@@ -6652,9 +8466,6 @@
               </a:rPr>
               <a:t> (generation) → satisfies “distinguish consumption from generation”.   </a:t>
             </a:r>
-            <a:pPr indent="0" marL="0">
-              <a:buNone/>
-            </a:pPr>
             <a:r>
               <a:rPr lang="en-US" sz="1350" b="1" dirty="0">
                 <a:solidFill>
@@ -6666,9 +8477,6 @@
               </a:rPr>
               <a:t>charge-rate is per-location</a:t>
             </a:r>
-            <a:pPr indent="0" marL="0">
-              <a:buNone/>
-            </a:pPr>
             <a:r>
               <a:rPr lang="en-US" sz="1350" dirty="0">
                 <a:solidFill>
@@ -6700,6 +8508,7 @@
         <a:solidFill>
           <a:srgbClr val="F4F7FA"/>
         </a:solidFill>
+        <a:effectLst/>
       </p:bgPr>
     </p:bg>
     <p:spTree>
@@ -6737,11 +8546,11 @@
           <a:bodyPr wrap="square" lIns="0" tIns="0" rIns="0" bIns="0" rtlCol="0" anchor="ctr"/>
           <a:lstStyle/>
           <a:p>
-            <a:pPr indent="0" marL="0">
-              <a:buNone/>
-            </a:pPr>
-            <a:r>
-              <a:rPr lang="en-US" sz="1200" b="1" spc="300" kern="0" dirty="0">
+            <a:pPr marL="0" indent="0">
+              <a:buNone/>
+            </a:pPr>
+            <a:r>
+              <a:rPr lang="en-US" sz="1200" b="1" kern="0" spc="300" dirty="0">
                 <a:solidFill>
                   <a:srgbClr val="1C7293"/>
                 </a:solidFill>
@@ -6776,7 +8585,7 @@
           <a:bodyPr wrap="square" lIns="0" tIns="0" rIns="0" bIns="0" rtlCol="0" anchor="ctr"/>
           <a:lstStyle/>
           <a:p>
-            <a:pPr indent="0" marL="0">
+            <a:pPr marL="0" indent="0">
               <a:buNone/>
             </a:pPr>
             <a:r>
@@ -6965,7 +8774,7 @@
           <a:bodyPr wrap="square" lIns="0" tIns="0" rIns="0" bIns="0" rtlCol="0" anchor="ctr"/>
           <a:lstStyle/>
           <a:p>
-            <a:pPr algn="ctr" indent="0" marL="0">
+            <a:pPr marL="0" indent="0" algn="ctr">
               <a:buNone/>
             </a:pPr>
             <a:r>
@@ -7029,7 +8838,7 @@
           <a:bodyPr wrap="square" lIns="0" tIns="0" rIns="0" bIns="0" rtlCol="0" anchor="ctr"/>
           <a:lstStyle/>
           <a:p>
-            <a:pPr algn="ctr" indent="0" marL="0">
+            <a:pPr marL="0" indent="0" algn="ctr">
               <a:buNone/>
             </a:pPr>
             <a:r>
@@ -7093,7 +8902,7 @@
           <a:bodyPr wrap="square" lIns="0" tIns="0" rIns="0" bIns="0" rtlCol="0" anchor="ctr"/>
           <a:lstStyle/>
           <a:p>
-            <a:pPr algn="ctr" indent="0" marL="0">
+            <a:pPr marL="0" indent="0" algn="ctr">
               <a:buNone/>
             </a:pPr>
             <a:r>
@@ -7157,7 +8966,7 @@
           <a:bodyPr wrap="square" lIns="0" tIns="0" rIns="0" bIns="0" rtlCol="0" anchor="ctr"/>
           <a:lstStyle/>
           <a:p>
-            <a:pPr algn="ctr" indent="0" marL="0">
+            <a:pPr marL="0" indent="0" algn="ctr">
               <a:buNone/>
             </a:pPr>
             <a:r>
@@ -7196,7 +9005,7 @@
           <a:bodyPr wrap="square" lIns="0" tIns="0" rIns="0" bIns="0" rtlCol="0" anchor="ctr"/>
           <a:lstStyle/>
           <a:p>
-            <a:pPr indent="0" marL="0">
+            <a:pPr marL="0" indent="0">
               <a:buNone/>
             </a:pPr>
             <a:r>
@@ -7238,7 +9047,7 @@
             <a:prstDash val="solid"/>
           </a:ln>
           <a:effectLst>
-            <a:outerShdw sx="100000" sy="100000" kx="0" ky="0" algn="bl" rotWithShape="0" blurRad="63500" dist="25400" dir="8100000">
+            <a:outerShdw blurRad="63500" dist="25400" dir="8100000" algn="bl" rotWithShape="0">
               <a:srgbClr val="000000">
                 <a:alpha val="10000"/>
               </a:srgbClr>
@@ -7267,7 +9076,7 @@
           <a:bodyPr wrap="square" lIns="0" tIns="0" rIns="0" bIns="0" rtlCol="0" anchor="ctr"/>
           <a:lstStyle/>
           <a:p>
-            <a:pPr indent="0" marL="0">
+            <a:pPr marL="0" indent="0">
               <a:buNone/>
             </a:pPr>
             <a:r>
@@ -7306,7 +9115,7 @@
           <a:bodyPr wrap="square" lIns="0" tIns="0" rIns="0" bIns="0" rtlCol="0" anchor="t"/>
           <a:lstStyle/>
           <a:p>
-            <a:pPr indent="0" marL="0">
+            <a:pPr marL="0" indent="0">
               <a:spcAft>
                 <a:spcPts val="700"/>
               </a:spcAft>
@@ -7326,7 +9135,7 @@
             <a:endParaRPr lang="en-US" sz="1150" dirty="0"/>
           </a:p>
           <a:p>
-            <a:pPr indent="0" marL="0">
+            <a:pPr marL="0" indent="0">
               <a:spcAft>
                 <a:spcPts val="700"/>
               </a:spcAft>
@@ -7346,7 +9155,7 @@
             <a:endParaRPr lang="en-US" sz="1150" dirty="0"/>
           </a:p>
           <a:p>
-            <a:pPr indent="0" marL="0">
+            <a:pPr marL="0" indent="0">
               <a:spcAft>
                 <a:spcPts val="700"/>
               </a:spcAft>
@@ -7388,7 +9197,7 @@
           <a:bodyPr wrap="square" lIns="0" tIns="0" rIns="0" bIns="0" rtlCol="0" anchor="t"/>
           <a:lstStyle/>
           <a:p>
-            <a:pPr indent="0" marL="0">
+            <a:pPr marL="0" indent="0">
               <a:buNone/>
             </a:pPr>
             <a:r>
@@ -7402,9 +9211,6 @@
               </a:rPr>
               <a:t>Directional</a:t>
             </a:r>
-            <a:pPr indent="0" marL="0">
-              <a:buNone/>
-            </a:pPr>
             <a:r>
               <a:rPr lang="en-US" sz="1350" dirty="0">
                 <a:solidFill>
@@ -7441,7 +9247,7 @@
           <a:bodyPr wrap="square" lIns="0" tIns="0" rIns="0" bIns="0" rtlCol="0" anchor="t"/>
           <a:lstStyle/>
           <a:p>
-            <a:pPr indent="0" marL="0">
+            <a:pPr marL="0" indent="0">
               <a:buNone/>
             </a:pPr>
             <a:r>
@@ -7455,9 +9261,6 @@
               </a:rPr>
               <a:t>Decoy edge B→D</a:t>
             </a:r>
-            <a:pPr indent="0" marL="0">
-              <a:buNone/>
-            </a:pPr>
             <a:r>
               <a:rPr lang="en-US" sz="1350" dirty="0">
                 <a:solidFill>
@@ -7494,7 +9297,7 @@
           <a:bodyPr wrap="square" lIns="0" tIns="0" rIns="0" bIns="0" rtlCol="0" anchor="t"/>
           <a:lstStyle/>
           <a:p>
-            <a:pPr indent="0" marL="0">
+            <a:pPr marL="0" indent="0">
               <a:buNone/>
             </a:pPr>
             <a:r>
@@ -7508,9 +9311,6 @@
               </a:rPr>
               <a:t>Goal (Style 3): </a:t>
             </a:r>
-            <a:pPr indent="0" marL="0">
-              <a:buNone/>
-            </a:pPr>
             <a:r>
               <a:rPr lang="en-US" sz="1350" dirty="0">
                 <a:solidFill>
@@ -7542,6 +9342,7 @@
         <a:solidFill>
           <a:srgbClr val="F4F7FA"/>
         </a:solidFill>
+        <a:effectLst/>
       </p:bgPr>
     </p:bg>
     <p:spTree>
@@ -7579,11 +9380,11 @@
           <a:bodyPr wrap="square" lIns="0" tIns="0" rIns="0" bIns="0" rtlCol="0" anchor="ctr"/>
           <a:lstStyle/>
           <a:p>
-            <a:pPr indent="0" marL="0">
-              <a:buNone/>
-            </a:pPr>
-            <a:r>
-              <a:rPr lang="en-US" sz="1200" b="1" spc="300" kern="0" dirty="0">
+            <a:pPr marL="0" indent="0">
+              <a:buNone/>
+            </a:pPr>
+            <a:r>
+              <a:rPr lang="en-US" sz="1200" b="1" kern="0" spc="300" dirty="0">
                 <a:solidFill>
                   <a:srgbClr val="1C7293"/>
                 </a:solidFill>
@@ -7618,7 +9419,7 @@
           <a:bodyPr wrap="square" lIns="0" tIns="0" rIns="0" bIns="0" rtlCol="0" anchor="ctr"/>
           <a:lstStyle/>
           <a:p>
-            <a:pPr indent="0" marL="0">
+            <a:pPr marL="0" indent="0">
               <a:buNone/>
             </a:pPr>
             <a:r>
@@ -7682,7 +9483,7 @@
           <a:bodyPr wrap="square" lIns="0" tIns="0" rIns="0" bIns="0" rtlCol="0" anchor="t"/>
           <a:lstStyle/>
           <a:p>
-            <a:pPr indent="0" marL="0">
+            <a:pPr marL="0" indent="0">
               <a:lnSpc>
                 <a:spcPct val="102000"/>
               </a:lnSpc>
@@ -7702,7 +9503,7 @@
             <a:endParaRPr lang="en-US" sz="1250" dirty="0"/>
           </a:p>
           <a:p>
-            <a:pPr indent="0" marL="0">
+            <a:pPr marL="0" indent="0">
               <a:lnSpc>
                 <a:spcPct val="102000"/>
               </a:lnSpc>
@@ -7722,7 +9523,7 @@
             <a:endParaRPr lang="en-US" sz="1250" dirty="0"/>
           </a:p>
           <a:p>
-            <a:pPr indent="0" marL="0">
+            <a:pPr marL="0" indent="0">
               <a:lnSpc>
                 <a:spcPct val="102000"/>
               </a:lnSpc>
@@ -7742,7 +9543,7 @@
             <a:endParaRPr lang="en-US" sz="1250" dirty="0"/>
           </a:p>
           <a:p>
-            <a:pPr indent="0" marL="0">
+            <a:pPr marL="0" indent="0">
               <a:lnSpc>
                 <a:spcPct val="102000"/>
               </a:lnSpc>
@@ -7762,7 +9563,7 @@
             <a:endParaRPr lang="en-US" sz="1250" dirty="0"/>
           </a:p>
           <a:p>
-            <a:pPr indent="0" marL="0">
+            <a:pPr marL="0" indent="0">
               <a:lnSpc>
                 <a:spcPct val="102000"/>
               </a:lnSpc>
@@ -7782,7 +9583,7 @@
             <a:endParaRPr lang="en-US" sz="1250" dirty="0"/>
           </a:p>
           <a:p>
-            <a:pPr indent="0" marL="0">
+            <a:pPr marL="0" indent="0">
               <a:lnSpc>
                 <a:spcPct val="102000"/>
               </a:lnSpc>
@@ -7802,7 +9603,7 @@
             <a:endParaRPr lang="en-US" sz="1250" dirty="0"/>
           </a:p>
           <a:p>
-            <a:pPr indent="0" marL="0">
+            <a:pPr marL="0" indent="0">
               <a:lnSpc>
                 <a:spcPct val="102000"/>
               </a:lnSpc>
@@ -7822,7 +9623,7 @@
             <a:endParaRPr lang="en-US" sz="1250" dirty="0"/>
           </a:p>
           <a:p>
-            <a:pPr indent="0" marL="0">
+            <a:pPr marL="0" indent="0">
               <a:lnSpc>
                 <a:spcPct val="102000"/>
               </a:lnSpc>
@@ -7842,7 +9643,7 @@
             <a:endParaRPr lang="en-US" sz="1250" dirty="0"/>
           </a:p>
           <a:p>
-            <a:pPr indent="0" marL="0">
+            <a:pPr marL="0" indent="0">
               <a:lnSpc>
                 <a:spcPct val="102000"/>
               </a:lnSpc>
@@ -7862,7 +9663,7 @@
             <a:endParaRPr lang="en-US" sz="1250" dirty="0"/>
           </a:p>
           <a:p>
-            <a:pPr indent="0" marL="0">
+            <a:pPr marL="0" indent="0">
               <a:lnSpc>
                 <a:spcPct val="102000"/>
               </a:lnSpc>
@@ -7882,7 +9683,7 @@
             <a:endParaRPr lang="en-US" sz="1250" dirty="0"/>
           </a:p>
           <a:p>
-            <a:pPr indent="0" marL="0">
+            <a:pPr marL="0" indent="0">
               <a:lnSpc>
                 <a:spcPct val="102000"/>
               </a:lnSpc>
@@ -7902,7 +9703,7 @@
             <a:endParaRPr lang="en-US" sz="1250" dirty="0"/>
           </a:p>
           <a:p>
-            <a:pPr indent="0" marL="0">
+            <a:pPr marL="0" indent="0">
               <a:lnSpc>
                 <a:spcPct val="102000"/>
               </a:lnSpc>
@@ -7969,7 +9770,7 @@
           <a:bodyPr wrap="square" lIns="0" tIns="0" rIns="0" bIns="0" rtlCol="0" anchor="t"/>
           <a:lstStyle/>
           <a:p>
-            <a:pPr indent="0" marL="0">
+            <a:pPr marL="0" indent="0">
               <a:lnSpc>
                 <a:spcPct val="102000"/>
               </a:lnSpc>
@@ -7989,7 +9790,7 @@
             <a:endParaRPr lang="en-US" sz="1250" dirty="0"/>
           </a:p>
           <a:p>
-            <a:pPr indent="0" marL="0">
+            <a:pPr marL="0" indent="0">
               <a:lnSpc>
                 <a:spcPct val="102000"/>
               </a:lnSpc>
@@ -8009,7 +9810,7 @@
             <a:endParaRPr lang="en-US" sz="1250" dirty="0"/>
           </a:p>
           <a:p>
-            <a:pPr indent="0" marL="0">
+            <a:pPr marL="0" indent="0">
               <a:lnSpc>
                 <a:spcPct val="102000"/>
               </a:lnSpc>
@@ -8029,7 +9830,7 @@
             <a:endParaRPr lang="en-US" sz="1250" dirty="0"/>
           </a:p>
           <a:p>
-            <a:pPr indent="0" marL="0">
+            <a:pPr marL="0" indent="0">
               <a:lnSpc>
                 <a:spcPct val="102000"/>
               </a:lnSpc>
@@ -8049,7 +9850,7 @@
             <a:endParaRPr lang="en-US" sz="1250" dirty="0"/>
           </a:p>
           <a:p>
-            <a:pPr indent="0" marL="0">
+            <a:pPr marL="0" indent="0">
               <a:lnSpc>
                 <a:spcPct val="102000"/>
               </a:lnSpc>
@@ -8069,7 +9870,7 @@
             <a:endParaRPr lang="en-US" sz="1250" dirty="0"/>
           </a:p>
           <a:p>
-            <a:pPr indent="0" marL="0">
+            <a:pPr marL="0" indent="0">
               <a:lnSpc>
                 <a:spcPct val="102000"/>
               </a:lnSpc>
@@ -8089,7 +9890,7 @@
             <a:endParaRPr lang="en-US" sz="1250" dirty="0"/>
           </a:p>
           <a:p>
-            <a:pPr indent="0" marL="0">
+            <a:pPr marL="0" indent="0">
               <a:lnSpc>
                 <a:spcPct val="102000"/>
               </a:lnSpc>
@@ -8109,7 +9910,7 @@
             <a:endParaRPr lang="en-US" sz="1250" dirty="0"/>
           </a:p>
           <a:p>
-            <a:pPr indent="0" marL="0">
+            <a:pPr marL="0" indent="0">
               <a:lnSpc>
                 <a:spcPct val="102000"/>
               </a:lnSpc>
@@ -8129,7 +9930,7 @@
             <a:endParaRPr lang="en-US" sz="1250" dirty="0"/>
           </a:p>
           <a:p>
-            <a:pPr indent="0" marL="0">
+            <a:pPr marL="0" indent="0">
               <a:lnSpc>
                 <a:spcPct val="102000"/>
               </a:lnSpc>
@@ -8149,7 +9950,7 @@
             <a:endParaRPr lang="en-US" sz="1250" dirty="0"/>
           </a:p>
           <a:p>
-            <a:pPr indent="0" marL="0">
+            <a:pPr marL="0" indent="0">
               <a:lnSpc>
                 <a:spcPct val="102000"/>
               </a:lnSpc>
@@ -8169,7 +9970,7 @@
             <a:endParaRPr lang="en-US" sz="1250" dirty="0"/>
           </a:p>
           <a:p>
-            <a:pPr indent="0" marL="0">
+            <a:pPr marL="0" indent="0">
               <a:lnSpc>
                 <a:spcPct val="102000"/>
               </a:lnSpc>
@@ -8214,7 +10015,7 @@
             <a:prstDash val="solid"/>
           </a:ln>
           <a:effectLst>
-            <a:outerShdw sx="100000" sy="100000" kx="0" ky="0" algn="bl" rotWithShape="0" blurRad="63500" dist="25400" dir="8100000">
+            <a:outerShdw blurRad="63500" dist="25400" dir="8100000" algn="bl" rotWithShape="0">
               <a:srgbClr val="000000">
                 <a:alpha val="10000"/>
               </a:srgbClr>
@@ -8243,7 +10044,7 @@
           <a:bodyPr wrap="square" lIns="0" tIns="0" rIns="0" bIns="0" rtlCol="0" anchor="ctr"/>
           <a:lstStyle/>
           <a:p>
-            <a:pPr indent="0" marL="0">
+            <a:pPr marL="0" indent="0">
               <a:buNone/>
             </a:pPr>
             <a:r>
@@ -8257,9 +10058,6 @@
               </a:rPr>
               <a:t>Key idea  </a:t>
             </a:r>
-            <a:pPr indent="0" marL="0">
-              <a:buNone/>
-            </a:pPr>
             <a:r>
               <a:rPr lang="en-US" sz="1300" dirty="0">
                 <a:solidFill>
@@ -8271,9 +10069,6 @@
               </a:rPr>
               <a:t>the numeric precondition </a:t>
             </a:r>
-            <a:pPr indent="0" marL="0">
-              <a:buNone/>
-            </a:pPr>
             <a:r>
               <a:rPr lang="en-US" sz="1300" dirty="0">
                 <a:solidFill>
@@ -8285,9 +10080,6 @@
               </a:rPr>
               <a:t>(&gt;= battery move-cost)</a:t>
             </a:r>
-            <a:pPr indent="0" marL="0">
-              <a:buNone/>
-            </a:pPr>
             <a:r>
               <a:rPr lang="en-US" sz="1300" dirty="0">
                 <a:solidFill>
@@ -8319,6 +10111,7 @@
         <a:solidFill>
           <a:srgbClr val="F4F7FA"/>
         </a:solidFill>
+        <a:effectLst/>
       </p:bgPr>
     </p:bg>
     <p:spTree>
@@ -8356,11 +10149,11 @@
           <a:bodyPr wrap="square" lIns="0" tIns="0" rIns="0" bIns="0" rtlCol="0" anchor="ctr"/>
           <a:lstStyle/>
           <a:p>
-            <a:pPr indent="0" marL="0">
-              <a:buNone/>
-            </a:pPr>
-            <a:r>
-              <a:rPr lang="en-US" sz="1200" b="1" spc="300" kern="0" dirty="0">
+            <a:pPr marL="0" indent="0">
+              <a:buNone/>
+            </a:pPr>
+            <a:r>
+              <a:rPr lang="en-US" sz="1200" b="1" kern="0" spc="300" dirty="0">
                 <a:solidFill>
                   <a:srgbClr val="1C7293"/>
                 </a:solidFill>
@@ -8395,7 +10188,7 @@
           <a:bodyPr wrap="square" lIns="0" tIns="0" rIns="0" bIns="0" rtlCol="0" anchor="ctr"/>
           <a:lstStyle/>
           <a:p>
-            <a:pPr indent="0" marL="0">
+            <a:pPr marL="0" indent="0">
               <a:buNone/>
             </a:pPr>
             <a:r>
@@ -8437,7 +10230,7 @@
             <a:prstDash val="solid"/>
           </a:ln>
           <a:effectLst>
-            <a:outerShdw sx="100000" sy="100000" kx="0" ky="0" algn="bl" rotWithShape="0" blurRad="63500" dist="25400" dir="8100000">
+            <a:outerShdw blurRad="63500" dist="25400" dir="8100000" algn="bl" rotWithShape="0">
               <a:srgbClr val="000000">
                 <a:alpha val="10000"/>
               </a:srgbClr>
@@ -8486,7 +10279,7 @@
           <a:bodyPr wrap="square" lIns="0" tIns="0" rIns="0" bIns="0" rtlCol="0" anchor="ctr"/>
           <a:lstStyle/>
           <a:p>
-            <a:pPr indent="0" marL="0">
+            <a:pPr marL="0" indent="0">
               <a:buNone/>
             </a:pPr>
             <a:r>
@@ -8525,7 +10318,7 @@
           <a:bodyPr wrap="square" lIns="0" tIns="0" rIns="0" bIns="0" rtlCol="0" anchor="ctr"/>
           <a:lstStyle/>
           <a:p>
-            <a:pPr indent="0" marL="0">
+            <a:pPr marL="0" indent="0">
               <a:buNone/>
             </a:pPr>
             <a:r>
@@ -8589,7 +10382,7 @@
           <a:bodyPr wrap="square" lIns="0" tIns="0" rIns="0" bIns="0" rtlCol="0" anchor="t"/>
           <a:lstStyle/>
           <a:p>
-            <a:pPr indent="0" marL="0">
+            <a:pPr marL="0" indent="0">
               <a:lnSpc>
                 <a:spcPct val="102000"/>
               </a:lnSpc>
@@ -8609,7 +10402,7 @@
             <a:endParaRPr lang="en-US" sz="1300" dirty="0"/>
           </a:p>
           <a:p>
-            <a:pPr indent="0" marL="0">
+            <a:pPr marL="0" indent="0">
               <a:lnSpc>
                 <a:spcPct val="102000"/>
               </a:lnSpc>
@@ -8629,7 +10422,7 @@
             <a:endParaRPr lang="en-US" sz="1300" dirty="0"/>
           </a:p>
           <a:p>
-            <a:pPr indent="0" marL="0">
+            <a:pPr marL="0" indent="0">
               <a:lnSpc>
                 <a:spcPct val="102000"/>
               </a:lnSpc>
@@ -8671,7 +10464,7 @@
           <a:bodyPr wrap="square" lIns="0" tIns="0" rIns="0" bIns="0" rtlCol="0" anchor="t"/>
           <a:lstStyle/>
           <a:p>
-            <a:pPr indent="0" marL="0">
+            <a:pPr marL="0" indent="0">
               <a:buNone/>
             </a:pPr>
             <a:r>
@@ -8685,9 +10478,6 @@
               </a:rPr>
               <a:t>Battery: 50 → 40 → 30 → 20.  </a:t>
             </a:r>
-            <a:pPr indent="0" marL="0">
-              <a:buNone/>
-            </a:pPr>
             <a:r>
               <a:rPr lang="en-US" sz="1400" b="1" dirty="0">
                 <a:solidFill>
@@ -8699,9 +10489,6 @@
               </a:rPr>
               <a:t>No recharge</a:t>
             </a:r>
-            <a:pPr indent="0" marL="0">
-              <a:buNone/>
-            </a:pPr>
             <a:r>
               <a:rPr lang="en-US" sz="1400" dirty="0">
                 <a:solidFill>
@@ -8741,7 +10528,7 @@
             <a:prstDash val="solid"/>
           </a:ln>
           <a:effectLst>
-            <a:outerShdw sx="100000" sy="100000" kx="0" ky="0" algn="bl" rotWithShape="0" blurRad="63500" dist="25400" dir="8100000">
+            <a:outerShdw blurRad="63500" dist="25400" dir="8100000" algn="bl" rotWithShape="0">
               <a:srgbClr val="000000">
                 <a:alpha val="10000"/>
               </a:srgbClr>
@@ -8790,7 +10577,7 @@
           <a:bodyPr wrap="square" lIns="0" tIns="0" rIns="0" bIns="0" rtlCol="0" anchor="ctr"/>
           <a:lstStyle/>
           <a:p>
-            <a:pPr indent="0" marL="0">
+            <a:pPr marL="0" indent="0">
               <a:buNone/>
             </a:pPr>
             <a:r>
@@ -8829,7 +10616,7 @@
           <a:bodyPr wrap="square" lIns="0" tIns="0" rIns="0" bIns="0" rtlCol="0" anchor="ctr"/>
           <a:lstStyle/>
           <a:p>
-            <a:pPr indent="0" marL="0">
+            <a:pPr marL="0" indent="0">
               <a:buNone/>
             </a:pPr>
             <a:r>
@@ -8893,7 +10680,7 @@
           <a:bodyPr wrap="square" lIns="0" tIns="0" rIns="0" bIns="0" rtlCol="0" anchor="t"/>
           <a:lstStyle/>
           <a:p>
-            <a:pPr indent="0" marL="0">
+            <a:pPr marL="0" indent="0">
               <a:lnSpc>
                 <a:spcPct val="102000"/>
               </a:lnSpc>
@@ -8913,7 +10700,7 @@
             <a:endParaRPr lang="en-US" sz="1300" dirty="0"/>
           </a:p>
           <a:p>
-            <a:pPr indent="0" marL="0">
+            <a:pPr marL="0" indent="0">
               <a:lnSpc>
                 <a:spcPct val="102000"/>
               </a:lnSpc>
@@ -8933,7 +10720,7 @@
             <a:endParaRPr lang="en-US" sz="1300" dirty="0"/>
           </a:p>
           <a:p>
-            <a:pPr indent="0" marL="0">
+            <a:pPr marL="0" indent="0">
               <a:lnSpc>
                 <a:spcPct val="102000"/>
               </a:lnSpc>
@@ -8953,7 +10740,7 @@
             <a:endParaRPr lang="en-US" sz="1300" dirty="0"/>
           </a:p>
           <a:p>
-            <a:pPr indent="0" marL="0">
+            <a:pPr marL="0" indent="0">
               <a:lnSpc>
                 <a:spcPct val="102000"/>
               </a:lnSpc>
@@ -8995,7 +10782,7 @@
           <a:bodyPr wrap="square" lIns="0" tIns="0" rIns="0" bIns="0" rtlCol="0" anchor="t"/>
           <a:lstStyle/>
           <a:p>
-            <a:pPr indent="0" marL="0">
+            <a:pPr marL="0" indent="0">
               <a:buNone/>
             </a:pPr>
             <a:r>
@@ -9009,9 +10796,6 @@
               </a:rPr>
               <a:t>Battery: 25 → 15 → 5 → (recharge) 30 → 20.  </a:t>
             </a:r>
-            <a:pPr indent="0" marL="0">
-              <a:buNone/>
-            </a:pPr>
             <a:r>
               <a:rPr lang="en-US" sz="1400" b="1" dirty="0">
                 <a:solidFill>
@@ -9023,9 +10807,6 @@
               </a:rPr>
               <a:t>Recharge forced</a:t>
             </a:r>
-            <a:pPr indent="0" marL="0">
-              <a:buNone/>
-            </a:pPr>
             <a:r>
               <a:rPr lang="en-US" sz="1400" dirty="0">
                 <a:solidFill>
@@ -9057,6 +10838,7 @@
         <a:solidFill>
           <a:srgbClr val="F4F7FA"/>
         </a:solidFill>
+        <a:effectLst/>
       </p:bgPr>
     </p:bg>
     <p:spTree>
@@ -9094,11 +10876,11 @@
           <a:bodyPr wrap="square" lIns="0" tIns="0" rIns="0" bIns="0" rtlCol="0" anchor="ctr"/>
           <a:lstStyle/>
           <a:p>
-            <a:pPr indent="0" marL="0">
-              <a:buNone/>
-            </a:pPr>
-            <a:r>
-              <a:rPr lang="en-US" sz="1200" b="1" spc="300" kern="0" dirty="0">
+            <a:pPr marL="0" indent="0">
+              <a:buNone/>
+            </a:pPr>
+            <a:r>
+              <a:rPr lang="en-US" sz="1200" b="1" kern="0" spc="300" dirty="0">
                 <a:solidFill>
                   <a:srgbClr val="1C7293"/>
                 </a:solidFill>
@@ -9133,7 +10915,7 @@
           <a:bodyPr wrap="square" lIns="0" tIns="0" rIns="0" bIns="0" rtlCol="0" anchor="ctr"/>
           <a:lstStyle/>
           <a:p>
-            <a:pPr indent="0" marL="0">
+            <a:pPr marL="0" indent="0">
               <a:buNone/>
             </a:pPr>
             <a:r>
@@ -9175,7 +10957,7 @@
             <a:prstDash val="solid"/>
           </a:ln>
           <a:effectLst>
-            <a:outerShdw sx="100000" sy="100000" kx="0" ky="0" algn="bl" rotWithShape="0" blurRad="63500" dist="25400" dir="8100000">
+            <a:outerShdw blurRad="63500" dist="25400" dir="8100000" algn="bl" rotWithShape="0">
               <a:srgbClr val="000000">
                 <a:alpha val="10000"/>
               </a:srgbClr>
@@ -9224,7 +11006,7 @@
           <a:bodyPr wrap="square" lIns="0" tIns="0" rIns="0" bIns="0" rtlCol="0" anchor="ctr"/>
           <a:lstStyle/>
           <a:p>
-            <a:pPr algn="ctr" indent="0" marL="0">
+            <a:pPr marL="0" indent="0" algn="ctr">
               <a:buNone/>
             </a:pPr>
             <a:r>
@@ -9263,7 +11045,7 @@
           <a:bodyPr wrap="square" lIns="0" tIns="0" rIns="0" bIns="0" rtlCol="0" anchor="ctr"/>
           <a:lstStyle/>
           <a:p>
-            <a:pPr indent="0" marL="0">
+            <a:pPr marL="0" indent="0">
               <a:buNone/>
             </a:pPr>
             <a:r>
@@ -9277,9 +11059,6 @@
               </a:rPr>
               <a:t>Controlled by: </a:t>
             </a:r>
-            <a:pPr indent="0" marL="0">
-              <a:buNone/>
-            </a:pPr>
             <a:r>
               <a:rPr lang="en-US" sz="1350" b="1" dirty="0">
                 <a:solidFill>
@@ -9316,7 +11095,7 @@
           <a:bodyPr wrap="square" lIns="0" tIns="0" rIns="0" bIns="0" rtlCol="0" anchor="ctr"/>
           <a:lstStyle/>
           <a:p>
-            <a:pPr indent="0" marL="0">
+            <a:pPr marL="0" indent="0">
               <a:buNone/>
             </a:pPr>
             <a:r>
@@ -9355,7 +11134,7 @@
           <a:bodyPr wrap="square" lIns="0" tIns="0" rIns="0" bIns="0" rtlCol="0" anchor="ctr"/>
           <a:lstStyle/>
           <a:p>
-            <a:pPr indent="0" marL="0">
+            <a:pPr marL="0" indent="0">
               <a:buNone/>
             </a:pPr>
             <a:r>
@@ -9369,9 +11148,6 @@
               </a:rPr>
               <a:t>e.g.  </a:t>
             </a:r>
-            <a:pPr indent="0" marL="0">
-              <a:buNone/>
-            </a:pPr>
             <a:r>
               <a:rPr lang="en-US" sz="1500" b="1" dirty="0">
                 <a:solidFill>
@@ -9411,7 +11187,7 @@
             <a:prstDash val="solid"/>
           </a:ln>
           <a:effectLst>
-            <a:outerShdw sx="100000" sy="100000" kx="0" ky="0" algn="bl" rotWithShape="0" blurRad="63500" dist="25400" dir="8100000">
+            <a:outerShdw blurRad="63500" dist="25400" dir="8100000" algn="bl" rotWithShape="0">
               <a:srgbClr val="000000">
                 <a:alpha val="10000"/>
               </a:srgbClr>
@@ -9460,7 +11236,7 @@
           <a:bodyPr wrap="square" lIns="0" tIns="0" rIns="0" bIns="0" rtlCol="0" anchor="ctr"/>
           <a:lstStyle/>
           <a:p>
-            <a:pPr algn="ctr" indent="0" marL="0">
+            <a:pPr marL="0" indent="0" algn="ctr">
               <a:buNone/>
             </a:pPr>
             <a:r>
@@ -9499,7 +11275,7 @@
           <a:bodyPr wrap="square" lIns="0" tIns="0" rIns="0" bIns="0" rtlCol="0" anchor="ctr"/>
           <a:lstStyle/>
           <a:p>
-            <a:pPr indent="0" marL="0">
+            <a:pPr marL="0" indent="0">
               <a:buNone/>
             </a:pPr>
             <a:r>
@@ -9513,9 +11289,6 @@
               </a:rPr>
               <a:t>Controlled by: </a:t>
             </a:r>
-            <a:pPr indent="0" marL="0">
-              <a:buNone/>
-            </a:pPr>
             <a:r>
               <a:rPr lang="en-US" sz="1350" b="1" dirty="0">
                 <a:solidFill>
@@ -9552,7 +11325,7 @@
           <a:bodyPr wrap="square" lIns="0" tIns="0" rIns="0" bIns="0" rtlCol="0" anchor="ctr"/>
           <a:lstStyle/>
           <a:p>
-            <a:pPr indent="0" marL="0">
+            <a:pPr marL="0" indent="0">
               <a:buNone/>
             </a:pPr>
             <a:r>
@@ -9591,7 +11364,7 @@
           <a:bodyPr wrap="square" lIns="0" tIns="0" rIns="0" bIns="0" rtlCol="0" anchor="ctr"/>
           <a:lstStyle/>
           <a:p>
-            <a:pPr indent="0" marL="0">
+            <a:pPr marL="0" indent="0">
               <a:buNone/>
             </a:pPr>
             <a:r>
@@ -9605,9 +11378,6 @@
               </a:rPr>
               <a:t>e.g.  </a:t>
             </a:r>
-            <a:pPr indent="0" marL="0">
-              <a:buNone/>
-            </a:pPr>
             <a:r>
               <a:rPr lang="en-US" sz="1500" b="1" dirty="0">
                 <a:solidFill>
@@ -9647,7 +11417,7 @@
             <a:prstDash val="solid"/>
           </a:ln>
           <a:effectLst>
-            <a:outerShdw sx="100000" sy="100000" kx="0" ky="0" algn="bl" rotWithShape="0" blurRad="63500" dist="25400" dir="8100000">
+            <a:outerShdw blurRad="63500" dist="25400" dir="8100000" algn="bl" rotWithShape="0">
               <a:srgbClr val="000000">
                 <a:alpha val="10000"/>
               </a:srgbClr>
@@ -9696,7 +11466,7 @@
           <a:bodyPr wrap="square" lIns="0" tIns="0" rIns="0" bIns="0" rtlCol="0" anchor="ctr"/>
           <a:lstStyle/>
           <a:p>
-            <a:pPr algn="ctr" indent="0" marL="0">
+            <a:pPr marL="0" indent="0" algn="ctr">
               <a:buNone/>
             </a:pPr>
             <a:r>
@@ -9735,7 +11505,7 @@
           <a:bodyPr wrap="square" lIns="0" tIns="0" rIns="0" bIns="0" rtlCol="0" anchor="ctr"/>
           <a:lstStyle/>
           <a:p>
-            <a:pPr indent="0" marL="0">
+            <a:pPr marL="0" indent="0">
               <a:buNone/>
             </a:pPr>
             <a:r>
@@ -9749,9 +11519,6 @@
               </a:rPr>
               <a:t>Controlled by: </a:t>
             </a:r>
-            <a:pPr indent="0" marL="0">
-              <a:buNone/>
-            </a:pPr>
             <a:r>
               <a:rPr lang="en-US" sz="1350" b="1" dirty="0">
                 <a:solidFill>
@@ -9788,7 +11555,7 @@
           <a:bodyPr wrap="square" lIns="0" tIns="0" rIns="0" bIns="0" rtlCol="0" anchor="ctr"/>
           <a:lstStyle/>
           <a:p>
-            <a:pPr indent="0" marL="0">
+            <a:pPr marL="0" indent="0">
               <a:buNone/>
             </a:pPr>
             <a:r>
@@ -9827,7 +11594,7 @@
           <a:bodyPr wrap="square" lIns="0" tIns="0" rIns="0" bIns="0" rtlCol="0" anchor="ctr"/>
           <a:lstStyle/>
           <a:p>
-            <a:pPr indent="0" marL="0">
+            <a:pPr marL="0" indent="0">
               <a:buNone/>
             </a:pPr>
             <a:r>
@@ -9841,9 +11608,6 @@
               </a:rPr>
               <a:t>e.g.  </a:t>
             </a:r>
-            <a:pPr indent="0" marL="0">
-              <a:buNone/>
-            </a:pPr>
             <a:r>
               <a:rPr lang="en-US" sz="1500" b="1" dirty="0">
                 <a:solidFill>
@@ -9883,7 +11647,7 @@
             <a:prstDash val="solid"/>
           </a:ln>
           <a:effectLst>
-            <a:outerShdw sx="100000" sy="100000" kx="0" ky="0" algn="bl" rotWithShape="0" blurRad="63500" dist="25400" dir="8100000">
+            <a:outerShdw blurRad="63500" dist="25400" dir="8100000" algn="bl" rotWithShape="0">
               <a:srgbClr val="000000">
                 <a:alpha val="10000"/>
               </a:srgbClr>
@@ -9912,7 +11676,7 @@
           <a:bodyPr wrap="square" lIns="0" tIns="0" rIns="0" bIns="0" rtlCol="0" anchor="ctr"/>
           <a:lstStyle/>
           <a:p>
-            <a:pPr indent="0" marL="0">
+            <a:pPr marL="0" indent="0">
               <a:buNone/>
             </a:pPr>
             <a:r>
@@ -9926,9 +11690,6 @@
               </a:rPr>
               <a:t>In one line:  </a:t>
             </a:r>
-            <a:pPr indent="0" marL="0">
-              <a:buNone/>
-            </a:pPr>
             <a:r>
               <a:rPr lang="en-US" sz="1500" dirty="0">
                 <a:solidFill>
@@ -9940,9 +11701,6 @@
               </a:rPr>
               <a:t>the rover </a:t>
             </a:r>
-            <a:pPr indent="0" marL="0">
-              <a:buNone/>
-            </a:pPr>
             <a:r>
               <a:rPr lang="en-US" sz="1500" b="1" dirty="0">
                 <a:solidFill>
@@ -9954,9 +11712,6 @@
               </a:rPr>
               <a:t>chooses</a:t>
             </a:r>
-            <a:pPr indent="0" marL="0">
-              <a:buNone/>
-            </a:pPr>
             <a:r>
               <a:rPr lang="en-US" sz="1500" dirty="0">
                 <a:solidFill>
@@ -9968,9 +11723,6 @@
               </a:rPr>
               <a:t> to move (action), but the </a:t>
             </a:r>
-            <a:pPr indent="0" marL="0">
-              <a:buNone/>
-            </a:pPr>
             <a:r>
               <a:rPr lang="en-US" sz="1500" b="1" dirty="0">
                 <a:solidFill>
@@ -9982,9 +11734,6 @@
               </a:rPr>
               <a:t>world</a:t>
             </a:r>
-            <a:pPr indent="0" marL="0">
-              <a:buNone/>
-            </a:pPr>
             <a:r>
               <a:rPr lang="en-US" sz="1500" dirty="0">
                 <a:solidFill>
@@ -9996,9 +11745,6 @@
               </a:rPr>
               <a:t> charges it automatically (process) and </a:t>
             </a:r>
-            <a:pPr indent="0" marL="0">
-              <a:buNone/>
-            </a:pPr>
             <a:r>
               <a:rPr lang="en-US" sz="1500" b="1" dirty="0">
                 <a:solidFill>
@@ -10010,9 +11756,6 @@
               </a:rPr>
               <a:t>the world</a:t>
             </a:r>
-            <a:pPr indent="0" marL="0">
-              <a:buNone/>
-            </a:pPr>
             <a:r>
               <a:rPr lang="en-US" sz="1500" dirty="0">
                 <a:solidFill>
@@ -10044,6 +11787,7 @@
         <a:solidFill>
           <a:srgbClr val="F4F7FA"/>
         </a:solidFill>
+        <a:effectLst/>
       </p:bgPr>
     </p:bg>
     <p:spTree>
@@ -10081,11 +11825,11 @@
           <a:bodyPr wrap="square" lIns="0" tIns="0" rIns="0" bIns="0" rtlCol="0" anchor="ctr"/>
           <a:lstStyle/>
           <a:p>
-            <a:pPr indent="0" marL="0">
-              <a:buNone/>
-            </a:pPr>
-            <a:r>
-              <a:rPr lang="en-US" sz="1200" b="1" spc="300" kern="0" dirty="0">
+            <a:pPr marL="0" indent="0">
+              <a:buNone/>
+            </a:pPr>
+            <a:r>
+              <a:rPr lang="en-US" sz="1200" b="1" kern="0" spc="300" dirty="0">
                 <a:solidFill>
                   <a:srgbClr val="1C7293"/>
                 </a:solidFill>
@@ -10120,7 +11864,7 @@
           <a:bodyPr wrap="square" lIns="0" tIns="0" rIns="0" bIns="0" rtlCol="0" anchor="ctr"/>
           <a:lstStyle/>
           <a:p>
-            <a:pPr indent="0" marL="0">
+            <a:pPr marL="0" indent="0">
               <a:buNone/>
             </a:pPr>
             <a:r>
@@ -10184,7 +11928,7 @@
           <a:bodyPr wrap="square" lIns="0" tIns="0" rIns="0" bIns="0" rtlCol="0" anchor="t"/>
           <a:lstStyle/>
           <a:p>
-            <a:pPr indent="0" marL="0">
+            <a:pPr marL="0" indent="0">
               <a:lnSpc>
                 <a:spcPct val="102000"/>
               </a:lnSpc>
@@ -10204,7 +11948,7 @@
             <a:endParaRPr lang="en-US" sz="1250" dirty="0"/>
           </a:p>
           <a:p>
-            <a:pPr indent="0" marL="0">
+            <a:pPr marL="0" indent="0">
               <a:lnSpc>
                 <a:spcPct val="102000"/>
               </a:lnSpc>
@@ -10224,7 +11968,7 @@
             <a:endParaRPr lang="en-US" sz="1250" dirty="0"/>
           </a:p>
           <a:p>
-            <a:pPr indent="0" marL="0">
+            <a:pPr marL="0" indent="0">
               <a:lnSpc>
                 <a:spcPct val="102000"/>
               </a:lnSpc>
@@ -10244,7 +11988,7 @@
             <a:endParaRPr lang="en-US" sz="1250" dirty="0"/>
           </a:p>
           <a:p>
-            <a:pPr indent="0" marL="0">
+            <a:pPr marL="0" indent="0">
               <a:lnSpc>
                 <a:spcPct val="102000"/>
               </a:lnSpc>
@@ -10264,7 +12008,7 @@
             <a:endParaRPr lang="en-US" sz="1250" dirty="0"/>
           </a:p>
           <a:p>
-            <a:pPr indent="0" marL="0">
+            <a:pPr marL="0" indent="0">
               <a:lnSpc>
                 <a:spcPct val="102000"/>
               </a:lnSpc>
@@ -10284,7 +12028,7 @@
             <a:endParaRPr lang="en-US" sz="1250" dirty="0"/>
           </a:p>
           <a:p>
-            <a:pPr indent="0" marL="0">
+            <a:pPr marL="0" indent="0">
               <a:lnSpc>
                 <a:spcPct val="102000"/>
               </a:lnSpc>
@@ -10304,7 +12048,7 @@
             <a:endParaRPr lang="en-US" sz="1250" dirty="0"/>
           </a:p>
           <a:p>
-            <a:pPr indent="0" marL="0">
+            <a:pPr marL="0" indent="0">
               <a:lnSpc>
                 <a:spcPct val="102000"/>
               </a:lnSpc>
@@ -10324,7 +12068,7 @@
             <a:endParaRPr lang="en-US" sz="1250" dirty="0"/>
           </a:p>
           <a:p>
-            <a:pPr indent="0" marL="0">
+            <a:pPr marL="0" indent="0">
               <a:lnSpc>
                 <a:spcPct val="102000"/>
               </a:lnSpc>
@@ -10344,7 +12088,7 @@
             <a:endParaRPr lang="en-US" sz="1250" dirty="0"/>
           </a:p>
           <a:p>
-            <a:pPr indent="0" marL="0">
+            <a:pPr marL="0" indent="0">
               <a:lnSpc>
                 <a:spcPct val="102000"/>
               </a:lnSpc>
@@ -10411,7 +12155,7 @@
           <a:bodyPr wrap="square" lIns="0" tIns="0" rIns="0" bIns="0" rtlCol="0" anchor="t"/>
           <a:lstStyle/>
           <a:p>
-            <a:pPr indent="0" marL="0">
+            <a:pPr marL="0" indent="0">
               <a:lnSpc>
                 <a:spcPct val="102000"/>
               </a:lnSpc>
@@ -10431,7 +12175,7 @@
             <a:endParaRPr lang="en-US" sz="1250" dirty="0"/>
           </a:p>
           <a:p>
-            <a:pPr indent="0" marL="0">
+            <a:pPr marL="0" indent="0">
               <a:lnSpc>
                 <a:spcPct val="102000"/>
               </a:lnSpc>
@@ -10451,7 +12195,7 @@
             <a:endParaRPr lang="en-US" sz="1250" dirty="0"/>
           </a:p>
           <a:p>
-            <a:pPr indent="0" marL="0">
+            <a:pPr marL="0" indent="0">
               <a:lnSpc>
                 <a:spcPct val="102000"/>
               </a:lnSpc>
@@ -10471,7 +12215,7 @@
             <a:endParaRPr lang="en-US" sz="1250" dirty="0"/>
           </a:p>
           <a:p>
-            <a:pPr indent="0" marL="0">
+            <a:pPr marL="0" indent="0">
               <a:lnSpc>
                 <a:spcPct val="102000"/>
               </a:lnSpc>
@@ -10491,7 +12235,7 @@
             <a:endParaRPr lang="en-US" sz="1250" dirty="0"/>
           </a:p>
           <a:p>
-            <a:pPr indent="0" marL="0">
+            <a:pPr marL="0" indent="0">
               <a:lnSpc>
                 <a:spcPct val="102000"/>
               </a:lnSpc>
@@ -10511,7 +12255,7 @@
             <a:endParaRPr lang="en-US" sz="1250" dirty="0"/>
           </a:p>
           <a:p>
-            <a:pPr indent="0" marL="0">
+            <a:pPr marL="0" indent="0">
               <a:lnSpc>
                 <a:spcPct val="102000"/>
               </a:lnSpc>
@@ -10531,7 +12275,7 @@
             <a:endParaRPr lang="en-US" sz="1250" dirty="0"/>
           </a:p>
           <a:p>
-            <a:pPr indent="0" marL="0">
+            <a:pPr marL="0" indent="0">
               <a:lnSpc>
                 <a:spcPct val="102000"/>
               </a:lnSpc>
@@ -10576,7 +12320,7 @@
             <a:prstDash val="solid"/>
           </a:ln>
           <a:effectLst>
-            <a:outerShdw sx="100000" sy="100000" kx="0" ky="0" algn="bl" rotWithShape="0" blurRad="63500" dist="25400" dir="8100000">
+            <a:outerShdw blurRad="63500" dist="25400" dir="8100000" algn="bl" rotWithShape="0">
               <a:srgbClr val="000000">
                 <a:alpha val="10000"/>
               </a:srgbClr>
@@ -10605,7 +12349,7 @@
           <a:bodyPr wrap="square" lIns="0" tIns="0" rIns="0" bIns="0" rtlCol="0" anchor="ctr"/>
           <a:lstStyle/>
           <a:p>
-            <a:pPr indent="0" marL="0">
+            <a:pPr marL="0" indent="0">
               <a:buNone/>
             </a:pPr>
             <a:r>
@@ -10619,9 +12363,6 @@
               </a:rPr>
               <a:t>(* #t (charge-rate ?l))  </a:t>
             </a:r>
-            <a:pPr indent="0" marL="0">
-              <a:buNone/>
-            </a:pPr>
             <a:r>
               <a:rPr lang="en-US" sz="1300" dirty="0">
                 <a:solidFill>
@@ -10661,7 +12402,7 @@
             <a:prstDash val="solid"/>
           </a:ln>
           <a:effectLst>
-            <a:outerShdw sx="100000" sy="100000" kx="0" ky="0" algn="bl" rotWithShape="0" blurRad="63500" dist="25400" dir="8100000">
+            <a:outerShdw blurRad="63500" dist="25400" dir="8100000" algn="bl" rotWithShape="0">
               <a:srgbClr val="000000">
                 <a:alpha val="10000"/>
               </a:srgbClr>
@@ -10690,7 +12431,7 @@
           <a:bodyPr wrap="square" lIns="0" tIns="0" rIns="0" bIns="0" rtlCol="0" anchor="ctr"/>
           <a:lstStyle/>
           <a:p>
-            <a:pPr indent="0" marL="0">
+            <a:pPr marL="0" indent="0">
               <a:buNone/>
             </a:pPr>
             <a:r>
@@ -10704,9 +12445,6 @@
               </a:rPr>
               <a:t>They never reference each other. </a:t>
             </a:r>
-            <a:pPr indent="0" marL="0">
-              <a:buNone/>
-            </a:pPr>
             <a:r>
               <a:rPr lang="en-US" sz="1300" dirty="0">
                 <a:solidFill>
@@ -10718,9 +12456,6 @@
               </a:rPr>
               <a:t>nightfall flips </a:t>
             </a:r>
-            <a:pPr indent="0" marL="0">
-              <a:buNone/>
-            </a:pPr>
             <a:r>
               <a:rPr lang="en-US" sz="1300" dirty="0">
                 <a:solidFill>
@@ -10732,9 +12467,6 @@
               </a:rPr>
               <a:t>(daytime)</a:t>
             </a:r>
-            <a:pPr indent="0" marL="0">
-              <a:buNone/>
-            </a:pPr>
             <a:r>
               <a:rPr lang="en-US" sz="1300" dirty="0">
                 <a:solidFill>
@@ -10766,6 +12498,7 @@
         <a:solidFill>
           <a:srgbClr val="F4F7FA"/>
         </a:solidFill>
+        <a:effectLst/>
       </p:bgPr>
     </p:bg>
     <p:spTree>
@@ -10803,11 +12536,11 @@
           <a:bodyPr wrap="square" lIns="0" tIns="0" rIns="0" bIns="0" rtlCol="0" anchor="ctr"/>
           <a:lstStyle/>
           <a:p>
-            <a:pPr indent="0" marL="0">
-              <a:buNone/>
-            </a:pPr>
-            <a:r>
-              <a:rPr lang="en-US" sz="1200" b="1" spc="300" kern="0" dirty="0">
+            <a:pPr marL="0" indent="0">
+              <a:buNone/>
+            </a:pPr>
+            <a:r>
+              <a:rPr lang="en-US" sz="1200" b="1" kern="0" spc="300" dirty="0">
                 <a:solidFill>
                   <a:srgbClr val="1C7293"/>
                 </a:solidFill>
@@ -10842,7 +12575,7 @@
           <a:bodyPr wrap="square" lIns="0" tIns="0" rIns="0" bIns="0" rtlCol="0" anchor="ctr"/>
           <a:lstStyle/>
           <a:p>
-            <a:pPr indent="0" marL="0">
+            <a:pPr marL="0" indent="0">
               <a:buNone/>
             </a:pPr>
             <a:r>
@@ -10876,17 +12609,41 @@
         </p:nvGraphicFramePr>
         <p:xfrm>
           <a:off x="548640" y="1645920"/>
-          <a:ext cx="11082528" cy="914400"/>
+          <a:ext cx="11082528" cy="2724912"/>
         </p:xfrm>
         <a:graphic>
           <a:graphicData uri="http://schemas.openxmlformats.org/drawingml/2006/table">
             <a:tbl>
               <a:tblPr/>
               <a:tblGrid>
-                <a:gridCol w="2011680"/>
-                <a:gridCol w="1188720"/>
-                <a:gridCol w="1645920"/>
-                <a:gridCol w="6236208"/>
+                <a:gridCol w="2011680">
+                  <a:extLst>
+                    <a:ext uri="{9D8B030D-6E8A-4147-A177-3AD203B41FA5}">
+                      <a16:colId xmlns:a16="http://schemas.microsoft.com/office/drawing/2014/main" val="20000"/>
+                    </a:ext>
+                  </a:extLst>
+                </a:gridCol>
+                <a:gridCol w="1188720">
+                  <a:extLst>
+                    <a:ext uri="{9D8B030D-6E8A-4147-A177-3AD203B41FA5}">
+                      <a16:colId xmlns:a16="http://schemas.microsoft.com/office/drawing/2014/main" val="20001"/>
+                    </a:ext>
+                  </a:extLst>
+                </a:gridCol>
+                <a:gridCol w="1645920">
+                  <a:extLst>
+                    <a:ext uri="{9D8B030D-6E8A-4147-A177-3AD203B41FA5}">
+                      <a16:colId xmlns:a16="http://schemas.microsoft.com/office/drawing/2014/main" val="20002"/>
+                    </a:ext>
+                  </a:extLst>
+                </a:gridCol>
+                <a:gridCol w="6236208">
+                  <a:extLst>
+                    <a:ext uri="{9D8B030D-6E8A-4147-A177-3AD203B41FA5}">
+                      <a16:colId xmlns:a16="http://schemas.microsoft.com/office/drawing/2014/main" val="20003"/>
+                    </a:ext>
+                  </a:extLst>
+                </a:gridCol>
               </a:tblGrid>
               <a:tr h="457200">
                 <a:tc>
@@ -10894,7 +12651,7 @@
                     <a:bodyPr/>
                     <a:lstStyle/>
                     <a:p>
-                      <a:pPr algn="l" indent="0" marL="0">
+                      <a:pPr marL="0" indent="0" algn="l">
                         <a:buNone/>
                       </a:pPr>
                       <a:r>
@@ -10915,7 +12672,7 @@
                       </a:endParaRPr>
                     </a:p>
                   </a:txBody>
-                  <a:tcPr marL="91440" marR="91440" marT="45720" marB="45720" anchor="ctr">
+                  <a:tcPr anchor="ctr">
                     <a:lnL w="6350" cap="flat" cmpd="sng" algn="ctr">
                       <a:solidFill>
                         <a:srgbClr val="D8E0E8"/>
@@ -10962,7 +12719,7 @@
                     <a:bodyPr/>
                     <a:lstStyle/>
                     <a:p>
-                      <a:pPr algn="ctr" indent="0" marL="0">
+                      <a:pPr marL="0" indent="0" algn="ctr">
                         <a:buNone/>
                       </a:pPr>
                       <a:r>
@@ -10983,7 +12740,7 @@
                       </a:endParaRPr>
                     </a:p>
                   </a:txBody>
-                  <a:tcPr marL="91440" marR="91440" marT="45720" marB="45720" anchor="ctr">
+                  <a:tcPr anchor="ctr">
                     <a:lnL w="6350" cap="flat" cmpd="sng" algn="ctr">
                       <a:solidFill>
                         <a:srgbClr val="D8E0E8"/>
@@ -11030,7 +12787,7 @@
                     <a:bodyPr/>
                     <a:lstStyle/>
                     <a:p>
-                      <a:pPr algn="ctr" indent="0" marL="0">
+                      <a:pPr marL="0" indent="0" algn="ctr">
                         <a:buNone/>
                       </a:pPr>
                       <a:r>
@@ -11051,7 +12808,7 @@
                       </a:endParaRPr>
                     </a:p>
                   </a:txBody>
-                  <a:tcPr marL="91440" marR="91440" marT="45720" marB="45720" anchor="ctr">
+                  <a:tcPr anchor="ctr">
                     <a:lnL w="6350" cap="flat" cmpd="sng" algn="ctr">
                       <a:solidFill>
                         <a:srgbClr val="D8E0E8"/>
@@ -11098,7 +12855,7 @@
                     <a:bodyPr/>
                     <a:lstStyle/>
                     <a:p>
-                      <a:pPr algn="l" indent="0" marL="0">
+                      <a:pPr marL="0" indent="0" algn="l">
                         <a:buNone/>
                       </a:pPr>
                       <a:r>
@@ -11119,7 +12876,7 @@
                       </a:endParaRPr>
                     </a:p>
                   </a:txBody>
-                  <a:tcPr marL="91440" marR="91440" marT="45720" marB="45720" anchor="ctr">
+                  <a:tcPr anchor="ctr">
                     <a:lnL w="6350" cap="flat" cmpd="sng" algn="ctr">
                       <a:solidFill>
                         <a:srgbClr val="D8E0E8"/>
@@ -11161,6 +12918,11 @@
                     </a:solidFill>
                   </a:tcPr>
                 </a:tc>
+                <a:extLst>
+                  <a:ext uri="{0D108BD9-81ED-4DB2-BD59-A6C34878D82A}">
+                    <a16:rowId xmlns:a16="http://schemas.microsoft.com/office/drawing/2014/main" val="10000"/>
+                  </a:ext>
+                </a:extLst>
               </a:tr>
               <a:tr h="566928">
                 <a:tc>
@@ -11168,7 +12930,7 @@
                     <a:bodyPr/>
                     <a:lstStyle/>
                     <a:p>
-                      <a:pPr algn="l" indent="0" marL="0">
+                      <a:pPr marL="0" indent="0" algn="l">
                         <a:buNone/>
                       </a:pPr>
                       <a:r>
@@ -11189,7 +12951,7 @@
                       </a:endParaRPr>
                     </a:p>
                   </a:txBody>
-                  <a:tcPr marL="91440" marR="91440" marT="45720" marB="45720" anchor="ctr">
+                  <a:tcPr anchor="ctr">
                     <a:lnL w="6350" cap="flat" cmpd="sng" algn="ctr">
                       <a:solidFill>
                         <a:srgbClr val="D8E0E8"/>
@@ -11233,7 +12995,7 @@
                     <a:bodyPr/>
                     <a:lstStyle/>
                     <a:p>
-                      <a:pPr algn="ctr" indent="0" marL="0">
+                      <a:pPr marL="0" indent="0" algn="ctr">
                         <a:buNone/>
                       </a:pPr>
                       <a:r>
@@ -11254,7 +13016,7 @@
                       </a:endParaRPr>
                     </a:p>
                   </a:txBody>
-                  <a:tcPr marL="91440" marR="91440" marT="45720" marB="45720" anchor="ctr">
+                  <a:tcPr anchor="ctr">
                     <a:lnL w="6350" cap="flat" cmpd="sng" algn="ctr">
                       <a:solidFill>
                         <a:srgbClr val="D8E0E8"/>
@@ -11298,7 +13060,7 @@
                     <a:bodyPr/>
                     <a:lstStyle/>
                     <a:p>
-                      <a:pPr algn="ctr" indent="0" marL="0">
+                      <a:pPr marL="0" indent="0" algn="ctr">
                         <a:buNone/>
                       </a:pPr>
                       <a:r>
@@ -11319,7 +13081,7 @@
                       </a:endParaRPr>
                     </a:p>
                   </a:txBody>
-                  <a:tcPr marL="91440" marR="91440" marT="45720" marB="45720" anchor="ctr">
+                  <a:tcPr anchor="ctr">
                     <a:lnL w="6350" cap="flat" cmpd="sng" algn="ctr">
                       <a:solidFill>
                         <a:srgbClr val="D8E0E8"/>
@@ -11363,7 +13125,7 @@
                     <a:bodyPr/>
                     <a:lstStyle/>
                     <a:p>
-                      <a:pPr algn="l" indent="0" marL="0">
+                      <a:pPr marL="0" indent="0" algn="l">
                         <a:buNone/>
                       </a:pPr>
                       <a:r>
@@ -11384,7 +13146,7 @@
                       </a:endParaRPr>
                     </a:p>
                   </a:txBody>
-                  <a:tcPr marL="91440" marR="91440" marT="45720" marB="45720" anchor="ctr">
+                  <a:tcPr anchor="ctr">
                     <a:lnL w="6350" cap="flat" cmpd="sng" algn="ctr">
                       <a:solidFill>
                         <a:srgbClr val="D8E0E8"/>
@@ -11423,6 +13185,11 @@
                     </a:lnB>
                   </a:tcPr>
                 </a:tc>
+                <a:extLst>
+                  <a:ext uri="{0D108BD9-81ED-4DB2-BD59-A6C34878D82A}">
+                    <a16:rowId xmlns:a16="http://schemas.microsoft.com/office/drawing/2014/main" val="10001"/>
+                  </a:ext>
+                </a:extLst>
               </a:tr>
               <a:tr h="566928">
                 <a:tc>
@@ -11430,7 +13197,7 @@
                     <a:bodyPr/>
                     <a:lstStyle/>
                     <a:p>
-                      <a:pPr algn="l" indent="0" marL="0">
+                      <a:pPr marL="0" indent="0" algn="l">
                         <a:buNone/>
                       </a:pPr>
                       <a:r>
@@ -11451,7 +13218,7 @@
                       </a:endParaRPr>
                     </a:p>
                   </a:txBody>
-                  <a:tcPr marL="91440" marR="91440" marT="45720" marB="45720" anchor="ctr">
+                  <a:tcPr anchor="ctr">
                     <a:lnL w="6350" cap="flat" cmpd="sng" algn="ctr">
                       <a:solidFill>
                         <a:srgbClr val="D8E0E8"/>
@@ -11495,7 +13262,7 @@
                     <a:bodyPr/>
                     <a:lstStyle/>
                     <a:p>
-                      <a:pPr algn="ctr" indent="0" marL="0">
+                      <a:pPr marL="0" indent="0" algn="ctr">
                         <a:buNone/>
                       </a:pPr>
                       <a:r>
@@ -11516,7 +13283,7 @@
                       </a:endParaRPr>
                     </a:p>
                   </a:txBody>
-                  <a:tcPr marL="91440" marR="91440" marT="45720" marB="45720" anchor="ctr">
+                  <a:tcPr anchor="ctr">
                     <a:lnL w="6350" cap="flat" cmpd="sng" algn="ctr">
                       <a:solidFill>
                         <a:srgbClr val="D8E0E8"/>
@@ -11560,7 +13327,7 @@
                     <a:bodyPr/>
                     <a:lstStyle/>
                     <a:p>
-                      <a:pPr algn="ctr" indent="0" marL="0">
+                      <a:pPr marL="0" indent="0" algn="ctr">
                         <a:buNone/>
                       </a:pPr>
                       <a:r>
@@ -11581,7 +13348,7 @@
                       </a:endParaRPr>
                     </a:p>
                   </a:txBody>
-                  <a:tcPr marL="91440" marR="91440" marT="45720" marB="45720" anchor="ctr">
+                  <a:tcPr anchor="ctr">
                     <a:lnL w="6350" cap="flat" cmpd="sng" algn="ctr">
                       <a:solidFill>
                         <a:srgbClr val="D8E0E8"/>
@@ -11625,7 +13392,7 @@
                     <a:bodyPr/>
                     <a:lstStyle/>
                     <a:p>
-                      <a:pPr algn="l" indent="0" marL="0">
+                      <a:pPr marL="0" indent="0" algn="l">
                         <a:buNone/>
                       </a:pPr>
                       <a:r>
@@ -11646,7 +13413,7 @@
                       </a:endParaRPr>
                     </a:p>
                   </a:txBody>
-                  <a:tcPr marL="91440" marR="91440" marT="45720" marB="45720" anchor="ctr">
+                  <a:tcPr anchor="ctr">
                     <a:lnL w="6350" cap="flat" cmpd="sng" algn="ctr">
                       <a:solidFill>
                         <a:srgbClr val="D8E0E8"/>
@@ -11685,6 +13452,11 @@
                     </a:lnB>
                   </a:tcPr>
                 </a:tc>
+                <a:extLst>
+                  <a:ext uri="{0D108BD9-81ED-4DB2-BD59-A6C34878D82A}">
+                    <a16:rowId xmlns:a16="http://schemas.microsoft.com/office/drawing/2014/main" val="10002"/>
+                  </a:ext>
+                </a:extLst>
               </a:tr>
               <a:tr h="566928">
                 <a:tc>
@@ -11692,7 +13464,7 @@
                     <a:bodyPr/>
                     <a:lstStyle/>
                     <a:p>
-                      <a:pPr algn="l" indent="0" marL="0">
+                      <a:pPr marL="0" indent="0" algn="l">
                         <a:buNone/>
                       </a:pPr>
                       <a:r>
@@ -11713,7 +13485,7 @@
                       </a:endParaRPr>
                     </a:p>
                   </a:txBody>
-                  <a:tcPr marL="91440" marR="91440" marT="45720" marB="45720" anchor="ctr">
+                  <a:tcPr anchor="ctr">
                     <a:lnL w="6350" cap="flat" cmpd="sng" algn="ctr">
                       <a:solidFill>
                         <a:srgbClr val="D8E0E8"/>
@@ -11757,7 +13529,7 @@
                     <a:bodyPr/>
                     <a:lstStyle/>
                     <a:p>
-                      <a:pPr algn="ctr" indent="0" marL="0">
+                      <a:pPr marL="0" indent="0" algn="ctr">
                         <a:buNone/>
                       </a:pPr>
                       <a:r>
@@ -11778,7 +13550,7 @@
                       </a:endParaRPr>
                     </a:p>
                   </a:txBody>
-                  <a:tcPr marL="91440" marR="91440" marT="45720" marB="45720" anchor="ctr">
+                  <a:tcPr anchor="ctr">
                     <a:lnL w="6350" cap="flat" cmpd="sng" algn="ctr">
                       <a:solidFill>
                         <a:srgbClr val="D8E0E8"/>
@@ -11822,7 +13594,7 @@
                     <a:bodyPr/>
                     <a:lstStyle/>
                     <a:p>
-                      <a:pPr algn="ctr" indent="0" marL="0">
+                      <a:pPr marL="0" indent="0" algn="ctr">
                         <a:buNone/>
                       </a:pPr>
                       <a:r>
@@ -11843,7 +13615,7 @@
                       </a:endParaRPr>
                     </a:p>
                   </a:txBody>
-                  <a:tcPr marL="91440" marR="91440" marT="45720" marB="45720" anchor="ctr">
+                  <a:tcPr anchor="ctr">
                     <a:lnL w="6350" cap="flat" cmpd="sng" algn="ctr">
                       <a:solidFill>
                         <a:srgbClr val="D8E0E8"/>
@@ -11887,7 +13659,7 @@
                     <a:bodyPr/>
                     <a:lstStyle/>
                     <a:p>
-                      <a:pPr algn="l" indent="0" marL="0">
+                      <a:pPr marL="0" indent="0" algn="l">
                         <a:buNone/>
                       </a:pPr>
                       <a:r>
@@ -11908,7 +13680,7 @@
                       </a:endParaRPr>
                     </a:p>
                   </a:txBody>
-                  <a:tcPr marL="91440" marR="91440" marT="45720" marB="45720" anchor="ctr">
+                  <a:tcPr anchor="ctr">
                     <a:lnL w="6350" cap="flat" cmpd="sng" algn="ctr">
                       <a:solidFill>
                         <a:srgbClr val="D8E0E8"/>
@@ -11947,6 +13719,11 @@
                     </a:lnB>
                   </a:tcPr>
                 </a:tc>
+                <a:extLst>
+                  <a:ext uri="{0D108BD9-81ED-4DB2-BD59-A6C34878D82A}">
+                    <a16:rowId xmlns:a16="http://schemas.microsoft.com/office/drawing/2014/main" val="10003"/>
+                  </a:ext>
+                </a:extLst>
               </a:tr>
               <a:tr h="566928">
                 <a:tc>
@@ -11954,7 +13731,7 @@
                     <a:bodyPr/>
                     <a:lstStyle/>
                     <a:p>
-                      <a:pPr algn="l" indent="0" marL="0">
+                      <a:pPr marL="0" indent="0" algn="l">
                         <a:buNone/>
                       </a:pPr>
                       <a:r>
@@ -11975,7 +13752,7 @@
                       </a:endParaRPr>
                     </a:p>
                   </a:txBody>
-                  <a:tcPr marL="91440" marR="91440" marT="45720" marB="45720" anchor="ctr">
+                  <a:tcPr anchor="ctr">
                     <a:lnL w="6350" cap="flat" cmpd="sng" algn="ctr">
                       <a:solidFill>
                         <a:srgbClr val="D8E0E8"/>
@@ -12019,7 +13796,7 @@
                     <a:bodyPr/>
                     <a:lstStyle/>
                     <a:p>
-                      <a:pPr algn="ctr" indent="0" marL="0">
+                      <a:pPr marL="0" indent="0" algn="ctr">
                         <a:buNone/>
                       </a:pPr>
                       <a:r>
@@ -12040,7 +13817,7 @@
                       </a:endParaRPr>
                     </a:p>
                   </a:txBody>
-                  <a:tcPr marL="91440" marR="91440" marT="45720" marB="45720" anchor="ctr">
+                  <a:tcPr anchor="ctr">
                     <a:lnL w="6350" cap="flat" cmpd="sng" algn="ctr">
                       <a:solidFill>
                         <a:srgbClr val="D8E0E8"/>
@@ -12084,7 +13861,7 @@
                     <a:bodyPr/>
                     <a:lstStyle/>
                     <a:p>
-                      <a:pPr algn="ctr" indent="0" marL="0">
+                      <a:pPr marL="0" indent="0" algn="ctr">
                         <a:buNone/>
                       </a:pPr>
                       <a:r>
@@ -12105,7 +13882,7 @@
                       </a:endParaRPr>
                     </a:p>
                   </a:txBody>
-                  <a:tcPr marL="91440" marR="91440" marT="45720" marB="45720" anchor="ctr">
+                  <a:tcPr anchor="ctr">
                     <a:lnL w="6350" cap="flat" cmpd="sng" algn="ctr">
                       <a:solidFill>
                         <a:srgbClr val="D8E0E8"/>
@@ -12149,7 +13926,7 @@
                     <a:bodyPr/>
                     <a:lstStyle/>
                     <a:p>
-                      <a:pPr algn="l" indent="0" marL="0">
+                      <a:pPr marL="0" indent="0" algn="l">
                         <a:buNone/>
                       </a:pPr>
                       <a:r>
@@ -12170,7 +13947,7 @@
                       </a:endParaRPr>
                     </a:p>
                   </a:txBody>
-                  <a:tcPr marL="91440" marR="91440" marT="45720" marB="45720" anchor="ctr">
+                  <a:tcPr anchor="ctr">
                     <a:lnL w="6350" cap="flat" cmpd="sng" algn="ctr">
                       <a:solidFill>
                         <a:srgbClr val="D8E0E8"/>
@@ -12209,6 +13986,11 @@
                     </a:lnB>
                   </a:tcPr>
                 </a:tc>
+                <a:extLst>
+                  <a:ext uri="{0D108BD9-81ED-4DB2-BD59-A6C34878D82A}">
+                    <a16:rowId xmlns:a16="http://schemas.microsoft.com/office/drawing/2014/main" val="10004"/>
+                  </a:ext>
+                </a:extLst>
               </a:tr>
             </a:tbl>
           </a:graphicData>
@@ -12238,7 +14020,7 @@
             <a:prstDash val="solid"/>
           </a:ln>
           <a:effectLst>
-            <a:outerShdw sx="100000" sy="100000" kx="0" ky="0" algn="bl" rotWithShape="0" blurRad="63500" dist="25400" dir="8100000">
+            <a:outerShdw blurRad="63500" dist="25400" dir="8100000" algn="bl" rotWithShape="0">
               <a:srgbClr val="000000">
                 <a:alpha val="10000"/>
               </a:srgbClr>
@@ -12267,7 +14049,7 @@
           <a:bodyPr wrap="square" lIns="0" tIns="0" rIns="0" bIns="0" rtlCol="0" anchor="ctr"/>
           <a:lstStyle/>
           <a:p>
-            <a:pPr indent="0" marL="0">
+            <a:pPr marL="0" indent="0">
               <a:buNone/>
             </a:pPr>
             <a:r>
@@ -12281,9 +14063,6 @@
               </a:rPr>
               <a:t>The lesson:  </a:t>
             </a:r>
-            <a:pPr indent="0" marL="0">
-              <a:buNone/>
-            </a:pPr>
             <a:r>
               <a:rPr lang="en-US" sz="1400" dirty="0">
                 <a:solidFill>
@@ -12295,9 +14074,6 @@
               </a:rPr>
               <a:t>same map, same battery, same charge rates — only </a:t>
             </a:r>
-            <a:pPr indent="0" marL="0">
-              <a:buNone/>
-            </a:pPr>
             <a:r>
               <a:rPr lang="en-US" sz="1400" dirty="0">
                 <a:solidFill>
@@ -12309,9 +14085,6 @@
               </a:rPr>
               <a:t>time-of-day</a:t>
             </a:r>
-            <a:pPr indent="0" marL="0">
-              <a:buNone/>
-            </a:pPr>
             <a:r>
               <a:rPr lang="en-US" sz="1400" dirty="0">
                 <a:solidFill>
@@ -12323,9 +14096,6 @@
               </a:rPr>
               <a:t> differs. A tighter deadline flips the plan from 47 ticks → 20 ticks → unsolvable. PDDL+ guarantees </a:t>
             </a:r>
-            <a:pPr indent="0" marL="0">
-              <a:buNone/>
-            </a:pPr>
             <a:r>
               <a:rPr lang="en-US" sz="1400" b="1" dirty="0">
                 <a:solidFill>
@@ -12337,9 +14107,6 @@
               </a:rPr>
               <a:t>validity, not optimality</a:t>
             </a:r>
-            <a:pPr indent="0" marL="0">
-              <a:buNone/>
-            </a:pPr>
             <a:r>
               <a:rPr lang="en-US" sz="1400" dirty="0">
                 <a:solidFill>
@@ -12656,4 +14423,265 @@
     </a:ext>
   </a:extLst>
 </a:theme>
+</file>
+
+<file path=ppt/theme/theme2.xml><?xml version="1.0" encoding="utf-8"?>
+<a:theme xmlns:a="http://schemas.openxmlformats.org/drawingml/2006/main" name="Thème Office">
+  <a:themeElements>
+    <a:clrScheme name="Office">
+      <a:dk1>
+        <a:sysClr val="windowText" lastClr="000000"/>
+      </a:dk1>
+      <a:lt1>
+        <a:sysClr val="window" lastClr="FFFFFF"/>
+      </a:lt1>
+      <a:dk2>
+        <a:srgbClr val="44546A"/>
+      </a:dk2>
+      <a:lt2>
+        <a:srgbClr val="E7E6E6"/>
+      </a:lt2>
+      <a:accent1>
+        <a:srgbClr val="5B9BD5"/>
+      </a:accent1>
+      <a:accent2>
+        <a:srgbClr val="ED7D31"/>
+      </a:accent2>
+      <a:accent3>
+        <a:srgbClr val="A5A5A5"/>
+      </a:accent3>
+      <a:accent4>
+        <a:srgbClr val="FFC000"/>
+      </a:accent4>
+      <a:accent5>
+        <a:srgbClr val="4472C4"/>
+      </a:accent5>
+      <a:accent6>
+        <a:srgbClr val="70AD47"/>
+      </a:accent6>
+      <a:hlink>
+        <a:srgbClr val="0563C1"/>
+      </a:hlink>
+      <a:folHlink>
+        <a:srgbClr val="954F72"/>
+      </a:folHlink>
+    </a:clrScheme>
+    <a:fontScheme name="Office">
+      <a:majorFont>
+        <a:latin typeface="Calibri Light" panose="020F0302020204030204"/>
+        <a:ea typeface=""/>
+        <a:cs typeface=""/>
+        <a:font script="Jpan" typeface="游ゴシック Light"/>
+        <a:font script="Hang" typeface="맑은 고딕"/>
+        <a:font script="Hans" typeface="等线 Light"/>
+        <a:font script="Hant" typeface="新細明體"/>
+        <a:font script="Arab" typeface="Times New Roman"/>
+        <a:font script="Hebr" typeface="Times New Roman"/>
+        <a:font script="Thai" typeface="Angsana New"/>
+        <a:font script="Ethi" typeface="Nyala"/>
+        <a:font script="Beng" typeface="Vrinda"/>
+        <a:font script="Gujr" typeface="Shruti"/>
+        <a:font script="Khmr" typeface="MoolBoran"/>
+        <a:font script="Knda" typeface="Tunga"/>
+        <a:font script="Guru" typeface="Raavi"/>
+        <a:font script="Cans" typeface="Euphemia"/>
+        <a:font script="Cher" typeface="Plantagenet Cherokee"/>
+        <a:font script="Yiii" typeface="Microsoft Yi Baiti"/>
+        <a:font script="Tibt" typeface="Microsoft Himalaya"/>
+        <a:font script="Thaa" typeface="MV Boli"/>
+        <a:font script="Deva" typeface="Mangal"/>
+        <a:font script="Telu" typeface="Gautami"/>
+        <a:font script="Taml" typeface="Latha"/>
+        <a:font script="Syrc" typeface="Estrangelo Edessa"/>
+        <a:font script="Orya" typeface="Kalinga"/>
+        <a:font script="Mlym" typeface="Kartika"/>
+        <a:font script="Laoo" typeface="DokChampa"/>
+        <a:font script="Sinh" typeface="Iskoola Pota"/>
+        <a:font script="Mong" typeface="Mongolian Baiti"/>
+        <a:font script="Viet" typeface="Times New Roman"/>
+        <a:font script="Uigh" typeface="Microsoft Uighur"/>
+        <a:font script="Geor" typeface="Sylfaen"/>
+      </a:majorFont>
+      <a:minorFont>
+        <a:latin typeface="Calibri" panose="020F0502020204030204"/>
+        <a:ea typeface=""/>
+        <a:cs typeface=""/>
+        <a:font script="Jpan" typeface="游ゴシック"/>
+        <a:font script="Hang" typeface="맑은 고딕"/>
+        <a:font script="Hans" typeface="等线"/>
+        <a:font script="Hant" typeface="新細明體"/>
+        <a:font script="Arab" typeface="Arial"/>
+        <a:font script="Hebr" typeface="Arial"/>
+        <a:font script="Thai" typeface="Cordia New"/>
+        <a:font script="Ethi" typeface="Nyala"/>
+        <a:font script="Beng" typeface="Vrinda"/>
+        <a:font script="Gujr" typeface="Shruti"/>
+        <a:font script="Khmr" typeface="DaunPenh"/>
+        <a:font script="Knda" typeface="Tunga"/>
+        <a:font script="Guru" typeface="Raavi"/>
+        <a:font script="Cans" typeface="Euphemia"/>
+        <a:font script="Cher" typeface="Plantagenet Cherokee"/>
+        <a:font script="Yiii" typeface="Microsoft Yi Baiti"/>
+        <a:font script="Tibt" typeface="Microsoft Himalaya"/>
+        <a:font script="Thaa" typeface="MV Boli"/>
+        <a:font script="Deva" typeface="Mangal"/>
+        <a:font script="Telu" typeface="Gautami"/>
+        <a:font script="Taml" typeface="Latha"/>
+        <a:font script="Syrc" typeface="Estrangelo Edessa"/>
+        <a:font script="Orya" typeface="Kalinga"/>
+        <a:font script="Mlym" typeface="Kartika"/>
+        <a:font script="Laoo" typeface="DokChampa"/>
+        <a:font script="Sinh" typeface="Iskoola Pota"/>
+        <a:font script="Mong" typeface="Mongolian Baiti"/>
+        <a:font script="Viet" typeface="Arial"/>
+        <a:font script="Uigh" typeface="Microsoft Uighur"/>
+        <a:font script="Geor" typeface="Sylfaen"/>
+      </a:minorFont>
+    </a:fontScheme>
+    <a:fmtScheme name="Office">
+      <a:fillStyleLst>
+        <a:solidFill>
+          <a:schemeClr val="phClr"/>
+        </a:solidFill>
+        <a:gradFill rotWithShape="1">
+          <a:gsLst>
+            <a:gs pos="0">
+              <a:schemeClr val="phClr">
+                <a:lumMod val="110000"/>
+                <a:satMod val="105000"/>
+                <a:tint val="67000"/>
+              </a:schemeClr>
+            </a:gs>
+            <a:gs pos="50000">
+              <a:schemeClr val="phClr">
+                <a:lumMod val="105000"/>
+                <a:satMod val="103000"/>
+                <a:tint val="73000"/>
+              </a:schemeClr>
+            </a:gs>
+            <a:gs pos="100000">
+              <a:schemeClr val="phClr">
+                <a:lumMod val="105000"/>
+                <a:satMod val="109000"/>
+                <a:tint val="81000"/>
+              </a:schemeClr>
+            </a:gs>
+          </a:gsLst>
+          <a:lin ang="5400000" scaled="0"/>
+        </a:gradFill>
+        <a:gradFill rotWithShape="1">
+          <a:gsLst>
+            <a:gs pos="0">
+              <a:schemeClr val="phClr">
+                <a:satMod val="103000"/>
+                <a:lumMod val="102000"/>
+                <a:tint val="94000"/>
+              </a:schemeClr>
+            </a:gs>
+            <a:gs pos="50000">
+              <a:schemeClr val="phClr">
+                <a:satMod val="110000"/>
+                <a:lumMod val="100000"/>
+                <a:shade val="100000"/>
+              </a:schemeClr>
+            </a:gs>
+            <a:gs pos="100000">
+              <a:schemeClr val="phClr">
+                <a:lumMod val="99000"/>
+                <a:satMod val="120000"/>
+                <a:shade val="78000"/>
+              </a:schemeClr>
+            </a:gs>
+          </a:gsLst>
+          <a:lin ang="5400000" scaled="0"/>
+        </a:gradFill>
+      </a:fillStyleLst>
+      <a:lnStyleLst>
+        <a:ln w="6350" cap="flat" cmpd="sng" algn="ctr">
+          <a:solidFill>
+            <a:schemeClr val="phClr"/>
+          </a:solidFill>
+          <a:prstDash val="solid"/>
+          <a:miter lim="800000"/>
+        </a:ln>
+        <a:ln w="12700" cap="flat" cmpd="sng" algn="ctr">
+          <a:solidFill>
+            <a:schemeClr val="phClr"/>
+          </a:solidFill>
+          <a:prstDash val="solid"/>
+          <a:miter lim="800000"/>
+        </a:ln>
+        <a:ln w="19050" cap="flat" cmpd="sng" algn="ctr">
+          <a:solidFill>
+            <a:schemeClr val="phClr"/>
+          </a:solidFill>
+          <a:prstDash val="solid"/>
+          <a:miter lim="800000"/>
+        </a:ln>
+      </a:lnStyleLst>
+      <a:effectStyleLst>
+        <a:effectStyle>
+          <a:effectLst/>
+        </a:effectStyle>
+        <a:effectStyle>
+          <a:effectLst/>
+        </a:effectStyle>
+        <a:effectStyle>
+          <a:effectLst>
+            <a:outerShdw blurRad="57150" dist="19050" dir="5400000" algn="ctr" rotWithShape="0">
+              <a:srgbClr val="000000">
+                <a:alpha val="63000"/>
+              </a:srgbClr>
+            </a:outerShdw>
+          </a:effectLst>
+        </a:effectStyle>
+      </a:effectStyleLst>
+      <a:bgFillStyleLst>
+        <a:solidFill>
+          <a:schemeClr val="phClr"/>
+        </a:solidFill>
+        <a:solidFill>
+          <a:schemeClr val="phClr">
+            <a:tint val="95000"/>
+            <a:satMod val="170000"/>
+          </a:schemeClr>
+        </a:solidFill>
+        <a:gradFill rotWithShape="1">
+          <a:gsLst>
+            <a:gs pos="0">
+              <a:schemeClr val="phClr">
+                <a:tint val="93000"/>
+                <a:satMod val="150000"/>
+                <a:shade val="98000"/>
+                <a:lumMod val="102000"/>
+              </a:schemeClr>
+            </a:gs>
+            <a:gs pos="50000">
+              <a:schemeClr val="phClr">
+                <a:tint val="98000"/>
+                <a:satMod val="130000"/>
+                <a:shade val="90000"/>
+                <a:lumMod val="103000"/>
+              </a:schemeClr>
+            </a:gs>
+            <a:gs pos="100000">
+              <a:schemeClr val="phClr">
+                <a:shade val="63000"/>
+                <a:satMod val="120000"/>
+              </a:schemeClr>
+            </a:gs>
+          </a:gsLst>
+          <a:lin ang="5400000" scaled="0"/>
+        </a:gradFill>
+      </a:bgFillStyleLst>
+    </a:fmtScheme>
+  </a:themeElements>
+  <a:objectDefaults/>
+  <a:extraClrSchemeLst/>
+  <a:extLst>
+    <a:ext uri="{05A4C25C-085E-4340-85A3-A5531E510DB2}">
+      <thm15:themeFamily xmlns:thm15="http://schemas.microsoft.com/office/thememl/2012/main" name="Office Theme" id="{62F939B6-93AF-4DB8-9C6B-D6C7DFDC589F}" vid="{4A3C46E8-61CC-4603-A589-7422A47A8E4A}"/>
+    </a:ext>
+  </a:extLst>
+</a:theme>
 </file>